--- a/Smart_Traffic_Forecasting_New.pptx
+++ b/Smart_Traffic_Forecasting_New.pptx
@@ -1,33 +1,133 @@
 
 <file path=ppt/presentation.xml><?xml version="1.0" encoding="utf-8"?>
-<p:presentation xmlns:r="http://schemas.openxmlformats.org/officeDocument/2006/relationships" xmlns:p="http://schemas.openxmlformats.org/presentationml/2006/main">
+<p:presentation xmlns:a="http://schemas.openxmlformats.org/drawingml/2006/main" xmlns:r="http://schemas.openxmlformats.org/officeDocument/2006/relationships" xmlns:p="http://schemas.openxmlformats.org/presentationml/2006/main">
   <p:sldMasterIdLst>
-    <p:sldMasterId xmlns:r="http://schemas.openxmlformats.org/officeDocument/2006/relationships" id="2147483648" r:id="rId1"/>
+    <p:sldMasterId id="2147483648" r:id="rId1"/>
   </p:sldMasterIdLst>
   <p:notesMasterIdLst>
-    <p:notesMasterId r:id="R5d30405da5b34b59"/>
+    <p:notesMasterId r:id="rId13"/>
   </p:notesMasterIdLst>
   <p:sldIdLst>
-    <p:sldId id="256" r:id="Ra09a8dd9889d4639"/>
-    <p:sldId id="257" r:id="Rd8c2b31f9d9c4cef"/>
-    <p:sldId id="258" r:id="R3c9fc2f6a0044247"/>
-    <p:sldId id="259" r:id="R8dc899f4389946f1"/>
-    <p:sldId id="260" r:id="Rf74537bb345f4b51"/>
-    <p:sldId id="261" r:id="R8b48b614edcc491a"/>
-    <p:sldId id="262" r:id="R284e167f713d490c"/>
-    <p:sldId id="263" r:id="R1975e81e20464761"/>
-    <p:sldId id="264" r:id="R33ace156105943df"/>
-    <p:sldId id="265" r:id="R10274e6a6cbe4964"/>
-    <p:sldId id="266" r:id="R5961cc4a50634713"/>
+    <p:sldId id="256" r:id="rId2"/>
+    <p:sldId id="257" r:id="rId3"/>
+    <p:sldId id="258" r:id="rId4"/>
+    <p:sldId id="259" r:id="rId5"/>
+    <p:sldId id="260" r:id="rId6"/>
+    <p:sldId id="261" r:id="rId7"/>
+    <p:sldId id="262" r:id="rId8"/>
+    <p:sldId id="263" r:id="rId9"/>
+    <p:sldId id="264" r:id="rId10"/>
+    <p:sldId id="265" r:id="rId11"/>
+    <p:sldId id="266" r:id="rId12"/>
   </p:sldIdLst>
   <p:sldSz cx="12192000" cy="6858000"/>
   <p:notesSz cx="6858000" cy="9144000"/>
+  <p:defaultTextStyle>
+    <a:defPPr>
+      <a:defRPr lang="en-US"/>
+    </a:defPPr>
+    <a:lvl1pPr marL="0" algn="l" defTabSz="914400" rtl="0" eaLnBrk="1" latinLnBrk="0" hangingPunct="1">
+      <a:defRPr sz="1800" kern="1200">
+        <a:solidFill>
+          <a:schemeClr val="tx1"/>
+        </a:solidFill>
+        <a:latin typeface="+mn-lt"/>
+        <a:ea typeface="+mn-ea"/>
+        <a:cs typeface="+mn-cs"/>
+      </a:defRPr>
+    </a:lvl1pPr>
+    <a:lvl2pPr marL="457200" algn="l" defTabSz="914400" rtl="0" eaLnBrk="1" latinLnBrk="0" hangingPunct="1">
+      <a:defRPr sz="1800" kern="1200">
+        <a:solidFill>
+          <a:schemeClr val="tx1"/>
+        </a:solidFill>
+        <a:latin typeface="+mn-lt"/>
+        <a:ea typeface="+mn-ea"/>
+        <a:cs typeface="+mn-cs"/>
+      </a:defRPr>
+    </a:lvl2pPr>
+    <a:lvl3pPr marL="914400" algn="l" defTabSz="914400" rtl="0" eaLnBrk="1" latinLnBrk="0" hangingPunct="1">
+      <a:defRPr sz="1800" kern="1200">
+        <a:solidFill>
+          <a:schemeClr val="tx1"/>
+        </a:solidFill>
+        <a:latin typeface="+mn-lt"/>
+        <a:ea typeface="+mn-ea"/>
+        <a:cs typeface="+mn-cs"/>
+      </a:defRPr>
+    </a:lvl3pPr>
+    <a:lvl4pPr marL="1371600" algn="l" defTabSz="914400" rtl="0" eaLnBrk="1" latinLnBrk="0" hangingPunct="1">
+      <a:defRPr sz="1800" kern="1200">
+        <a:solidFill>
+          <a:schemeClr val="tx1"/>
+        </a:solidFill>
+        <a:latin typeface="+mn-lt"/>
+        <a:ea typeface="+mn-ea"/>
+        <a:cs typeface="+mn-cs"/>
+      </a:defRPr>
+    </a:lvl4pPr>
+    <a:lvl5pPr marL="1828800" algn="l" defTabSz="914400" rtl="0" eaLnBrk="1" latinLnBrk="0" hangingPunct="1">
+      <a:defRPr sz="1800" kern="1200">
+        <a:solidFill>
+          <a:schemeClr val="tx1"/>
+        </a:solidFill>
+        <a:latin typeface="+mn-lt"/>
+        <a:ea typeface="+mn-ea"/>
+        <a:cs typeface="+mn-cs"/>
+      </a:defRPr>
+    </a:lvl5pPr>
+    <a:lvl6pPr marL="2286000" algn="l" defTabSz="914400" rtl="0" eaLnBrk="1" latinLnBrk="0" hangingPunct="1">
+      <a:defRPr sz="1800" kern="1200">
+        <a:solidFill>
+          <a:schemeClr val="tx1"/>
+        </a:solidFill>
+        <a:latin typeface="+mn-lt"/>
+        <a:ea typeface="+mn-ea"/>
+        <a:cs typeface="+mn-cs"/>
+      </a:defRPr>
+    </a:lvl6pPr>
+    <a:lvl7pPr marL="2743200" algn="l" defTabSz="914400" rtl="0" eaLnBrk="1" latinLnBrk="0" hangingPunct="1">
+      <a:defRPr sz="1800" kern="1200">
+        <a:solidFill>
+          <a:schemeClr val="tx1"/>
+        </a:solidFill>
+        <a:latin typeface="+mn-lt"/>
+        <a:ea typeface="+mn-ea"/>
+        <a:cs typeface="+mn-cs"/>
+      </a:defRPr>
+    </a:lvl7pPr>
+    <a:lvl8pPr marL="3200400" algn="l" defTabSz="914400" rtl="0" eaLnBrk="1" latinLnBrk="0" hangingPunct="1">
+      <a:defRPr sz="1800" kern="1200">
+        <a:solidFill>
+          <a:schemeClr val="tx1"/>
+        </a:solidFill>
+        <a:latin typeface="+mn-lt"/>
+        <a:ea typeface="+mn-ea"/>
+        <a:cs typeface="+mn-cs"/>
+      </a:defRPr>
+    </a:lvl8pPr>
+    <a:lvl9pPr marL="3657600" algn="l" defTabSz="914400" rtl="0" eaLnBrk="1" latinLnBrk="0" hangingPunct="1">
+      <a:defRPr sz="1800" kern="1200">
+        <a:solidFill>
+          <a:schemeClr val="tx1"/>
+        </a:solidFill>
+        <a:latin typeface="+mn-lt"/>
+        <a:ea typeface="+mn-ea"/>
+        <a:cs typeface="+mn-cs"/>
+      </a:defRPr>
+    </a:lvl9pPr>
+  </p:defaultTextStyle>
 </p:presentation>
 </file>
 
 <file path=ppt/notesMasters/notesMaster1.xml><?xml version="1.0" encoding="utf-8"?>
 <p:notesMaster xmlns:a="http://schemas.openxmlformats.org/drawingml/2006/main" xmlns:r="http://schemas.openxmlformats.org/officeDocument/2006/relationships" xmlns:p="http://schemas.openxmlformats.org/presentationml/2006/main">
   <p:cSld>
+    <p:bg>
+      <p:bgRef idx="1001">
+        <a:schemeClr val="bg1"/>
+      </p:bgRef>
+    </p:bg>
     <p:spTree>
       <p:nvGrpSpPr>
         <p:cNvPr id="1" name=""/>
@@ -102,6 +202,7 @@
           <a:p>
             <a:fld id="{B1E4B0A2-5C8E-4E5F-9C1D-2F3A4B5C6D71}" type="datetimeFigureOut">
               <a:rPr lang="en-US"/>
+              <a:t>10/7/2026</a:t>
             </a:fld>
             <a:endParaRPr lang="en-US"/>
           </a:p>
@@ -227,6 +328,7 @@
           <a:p>
             <a:fld id="{B1E4B0A2-5C8E-4E5F-9C1D-2F3A4B5C6D72}" type="slidenum">
               <a:rPr lang="en-US"/>
+              <a:t>‹#›</a:t>
             </a:fld>
             <a:endParaRPr lang="en-US"/>
           </a:p>
@@ -330,117 +432,8 @@
 </p:notesMaster>
 </file>
 
-<file path=ppt/notesMasters/theme/theme2.xml><?xml version="1.0" encoding="utf-8"?>
-<a:theme xmlns:a="http://schemas.openxmlformats.org/drawingml/2006/main" name="Office Theme">
-  <a:themeElements>
-    <a:clrScheme name="Office">
-      <a:dk1>
-        <a:sysClr val="windowText" lastClr="000000"/>
-      </a:dk1>
-      <a:lt1>
-        <a:sysClr val="window" lastClr="FFFFFF"/>
-      </a:lt1>
-      <a:dk2>
-        <a:srgbClr val="44546A"/>
-      </a:dk2>
-      <a:lt2>
-        <a:srgbClr val="E7E6E6"/>
-      </a:lt2>
-      <a:accent1>
-        <a:srgbClr val="4472C4"/>
-      </a:accent1>
-      <a:accent2>
-        <a:srgbClr val="ED7D31"/>
-      </a:accent2>
-      <a:accent3>
-        <a:srgbClr val="A5A5A5"/>
-      </a:accent3>
-      <a:accent4>
-        <a:srgbClr val="FFC000"/>
-      </a:accent4>
-      <a:accent5>
-        <a:srgbClr val="5B9BD5"/>
-      </a:accent5>
-      <a:accent6>
-        <a:srgbClr val="70AD47"/>
-      </a:accent6>
-      <a:hlink>
-        <a:srgbClr val="0563C1"/>
-      </a:hlink>
-      <a:folHlink>
-        <a:srgbClr val="954F72"/>
-      </a:folHlink>
-    </a:clrScheme>
-    <a:fontScheme name="Office">
-      <a:majorFont>
-        <a:latin typeface="Calibri Light"/>
-        <a:ea typeface=""/>
-        <a:cs typeface=""/>
-      </a:majorFont>
-      <a:minorFont>
-        <a:latin typeface="Calibri"/>
-        <a:ea typeface=""/>
-        <a:cs typeface=""/>
-      </a:minorFont>
-    </a:fontScheme>
-    <a:fmtScheme name="Office">
-      <a:fillStyleLst>
-        <a:solidFill>
-          <a:schemeClr val="phClr"/>
-        </a:solidFill>
-        <a:solidFill>
-          <a:schemeClr val="phClr"/>
-        </a:solidFill>
-        <a:solidFill>
-          <a:schemeClr val="phClr"/>
-        </a:solidFill>
-      </a:fillStyleLst>
-      <a:lnStyleLst>
-        <a:ln w="6350" cap="flat">
-          <a:solidFill>
-            <a:schemeClr val="phClr"/>
-          </a:solidFill>
-        </a:ln>
-        <a:ln w="12700" cap="flat">
-          <a:solidFill>
-            <a:schemeClr val="phClr"/>
-          </a:solidFill>
-        </a:ln>
-        <a:ln w="19050" cap="flat">
-          <a:solidFill>
-            <a:schemeClr val="phClr"/>
-          </a:solidFill>
-        </a:ln>
-      </a:lnStyleLst>
-      <a:effectStyleLst>
-        <a:effectStyle>
-          <a:effectLst/>
-        </a:effectStyle>
-        <a:effectStyle>
-          <a:effectLst/>
-        </a:effectStyle>
-        <a:effectStyle>
-          <a:effectLst/>
-        </a:effectStyle>
-      </a:effectStyleLst>
-      <a:bgFillStyleLst>
-        <a:solidFill>
-          <a:schemeClr val="phClr"/>
-        </a:solidFill>
-        <a:solidFill>
-          <a:schemeClr val="phClr"/>
-        </a:solidFill>
-        <a:solidFill>
-          <a:schemeClr val="phClr"/>
-        </a:solidFill>
-      </a:bgFillStyleLst>
-    </a:fmtScheme>
-  </a:themeElements>
-</a:theme>
-</file>
-
 <file path=ppt/notesSlides/notesSlide1.xml><?xml version="1.0" encoding="utf-8"?>
-<p:notes xmlns:p="http://schemas.openxmlformats.org/presentationml/2006/main">
+<p:notes xmlns:a="http://schemas.openxmlformats.org/drawingml/2006/main" xmlns:r="http://schemas.openxmlformats.org/officeDocument/2006/relationships" xmlns:p="http://schemas.openxmlformats.org/presentationml/2006/main">
   <p:cSld>
     <p:spTree>
       <p:nvGrpSpPr>
@@ -449,36 +442,47 @@
         <p:nvPr/>
       </p:nvGrpSpPr>
       <p:grpSpPr>
-        <a:xfrm xmlns:a="http://schemas.openxmlformats.org/drawingml/2006/main"/>
+        <a:xfrm>
+          <a:off x="0" y="0"/>
+          <a:ext cx="0" cy="0"/>
+          <a:chOff x="0" y="0"/>
+          <a:chExt cx="0" cy="0"/>
+        </a:xfrm>
       </p:grpSpPr>
       <p:sp>
         <p:nvSpPr>
           <p:cNvPr id="2" name="Slide Image Placeholder 1"/>
-          <p:cNvSpPr/>
+          <p:cNvSpPr>
+            <a:spLocks noGrp="1" noRot="1" noChangeAspect="1"/>
+          </p:cNvSpPr>
           <p:nvPr>
-            <p:ph type="sldImg" idx="0"/>
+            <p:ph type="sldImg"/>
           </p:nvPr>
         </p:nvSpPr>
         <p:spPr/>
         <p:txBody>
-          <a:bodyPr xmlns:a="http://schemas.openxmlformats.org/drawingml/2006/main"/>
-          <a:lstStyle xmlns:a="http://schemas.openxmlformats.org/drawingml/2006/main"/>
-          <a:p xmlns:a="http://schemas.openxmlformats.org/drawingml/2006/main"/>
+          <a:bodyPr/>
+          <a:lstStyle/>
+          <a:p>
+            <a:endParaRPr/>
+          </a:p>
         </p:txBody>
       </p:sp>
       <p:sp>
         <p:nvSpPr>
           <p:cNvPr id="3" name="Notes Placeholder 2"/>
-          <p:cNvSpPr/>
+          <p:cNvSpPr>
+            <a:spLocks noGrp="1"/>
+          </p:cNvSpPr>
           <p:nvPr>
             <p:ph type="body" idx="1"/>
           </p:nvPr>
         </p:nvSpPr>
         <p:spPr/>
         <p:txBody>
-          <a:bodyPr xmlns:a="http://schemas.openxmlformats.org/drawingml/2006/main"/>
-          <a:lstStyle xmlns:a="http://schemas.openxmlformats.org/drawingml/2006/main"/>
-          <a:p xmlns:a="http://schemas.openxmlformats.org/drawingml/2006/main">
+          <a:bodyPr/>
+          <a:lstStyle/>
+          <a:p>
             <a:r>
               <a:rPr lang="en-US"/>
               <a:t>Title Slide — Smart Urban Traffic Forecasting System. Developer: Mohini.</a:t>
@@ -489,13 +493,13 @@
     </p:spTree>
   </p:cSld>
   <p:clrMapOvr>
-    <a:masterClrMapping xmlns:a="http://schemas.openxmlformats.org/drawingml/2006/main"/>
+    <a:masterClrMapping/>
   </p:clrMapOvr>
 </p:notes>
 </file>
 
 <file path=ppt/notesSlides/notesSlide10.xml><?xml version="1.0" encoding="utf-8"?>
-<p:notes xmlns:p="http://schemas.openxmlformats.org/presentationml/2006/main">
+<p:notes xmlns:a="http://schemas.openxmlformats.org/drawingml/2006/main" xmlns:r="http://schemas.openxmlformats.org/officeDocument/2006/relationships" xmlns:p="http://schemas.openxmlformats.org/presentationml/2006/main">
   <p:cSld>
     <p:spTree>
       <p:nvGrpSpPr>
@@ -504,36 +508,47 @@
         <p:nvPr/>
       </p:nvGrpSpPr>
       <p:grpSpPr>
-        <a:xfrm xmlns:a="http://schemas.openxmlformats.org/drawingml/2006/main"/>
+        <a:xfrm>
+          <a:off x="0" y="0"/>
+          <a:ext cx="0" cy="0"/>
+          <a:chOff x="0" y="0"/>
+          <a:chExt cx="0" cy="0"/>
+        </a:xfrm>
       </p:grpSpPr>
       <p:sp>
         <p:nvSpPr>
           <p:cNvPr id="2" name="Slide Image Placeholder 1"/>
-          <p:cNvSpPr/>
+          <p:cNvSpPr>
+            <a:spLocks noGrp="1" noRot="1" noChangeAspect="1"/>
+          </p:cNvSpPr>
           <p:nvPr>
-            <p:ph type="sldImg" idx="0"/>
+            <p:ph type="sldImg"/>
           </p:nvPr>
         </p:nvSpPr>
         <p:spPr/>
         <p:txBody>
-          <a:bodyPr xmlns:a="http://schemas.openxmlformats.org/drawingml/2006/main"/>
-          <a:lstStyle xmlns:a="http://schemas.openxmlformats.org/drawingml/2006/main"/>
-          <a:p xmlns:a="http://schemas.openxmlformats.org/drawingml/2006/main"/>
+          <a:bodyPr/>
+          <a:lstStyle/>
+          <a:p>
+            <a:endParaRPr/>
+          </a:p>
         </p:txBody>
       </p:sp>
       <p:sp>
         <p:nvSpPr>
           <p:cNvPr id="3" name="Notes Placeholder 2"/>
-          <p:cNvSpPr/>
+          <p:cNvSpPr>
+            <a:spLocks noGrp="1"/>
+          </p:cNvSpPr>
           <p:nvPr>
             <p:ph type="body" idx="1"/>
           </p:nvPr>
         </p:nvSpPr>
         <p:spPr/>
         <p:txBody>
-          <a:bodyPr xmlns:a="http://schemas.openxmlformats.org/drawingml/2006/main"/>
-          <a:lstStyle xmlns:a="http://schemas.openxmlformats.org/drawingml/2006/main"/>
-          <a:p xmlns:a="http://schemas.openxmlformats.org/drawingml/2006/main">
+          <a:bodyPr/>
+          <a:lstStyle/>
+          <a:p>
             <a:r>
               <a:rPr lang="en-US"/>
               <a:t>SDG 11 Impact: Target 11.2 Transport, 11.6 Air Quality, 11.b Resilient Cities.</a:t>
@@ -544,13 +559,13 @@
     </p:spTree>
   </p:cSld>
   <p:clrMapOvr>
-    <a:masterClrMapping xmlns:a="http://schemas.openxmlformats.org/drawingml/2006/main"/>
+    <a:masterClrMapping/>
   </p:clrMapOvr>
 </p:notes>
 </file>
 
 <file path=ppt/notesSlides/notesSlide11.xml><?xml version="1.0" encoding="utf-8"?>
-<p:notes xmlns:p="http://schemas.openxmlformats.org/presentationml/2006/main">
+<p:notes xmlns:a="http://schemas.openxmlformats.org/drawingml/2006/main" xmlns:r="http://schemas.openxmlformats.org/officeDocument/2006/relationships" xmlns:p="http://schemas.openxmlformats.org/presentationml/2006/main">
   <p:cSld>
     <p:spTree>
       <p:nvGrpSpPr>
@@ -559,36 +574,47 @@
         <p:nvPr/>
       </p:nvGrpSpPr>
       <p:grpSpPr>
-        <a:xfrm xmlns:a="http://schemas.openxmlformats.org/drawingml/2006/main"/>
+        <a:xfrm>
+          <a:off x="0" y="0"/>
+          <a:ext cx="0" cy="0"/>
+          <a:chOff x="0" y="0"/>
+          <a:chExt cx="0" cy="0"/>
+        </a:xfrm>
       </p:grpSpPr>
       <p:sp>
         <p:nvSpPr>
           <p:cNvPr id="2" name="Slide Image Placeholder 1"/>
-          <p:cNvSpPr/>
+          <p:cNvSpPr>
+            <a:spLocks noGrp="1" noRot="1" noChangeAspect="1"/>
+          </p:cNvSpPr>
           <p:nvPr>
-            <p:ph type="sldImg" idx="0"/>
+            <p:ph type="sldImg"/>
           </p:nvPr>
         </p:nvSpPr>
         <p:spPr/>
         <p:txBody>
-          <a:bodyPr xmlns:a="http://schemas.openxmlformats.org/drawingml/2006/main"/>
-          <a:lstStyle xmlns:a="http://schemas.openxmlformats.org/drawingml/2006/main"/>
-          <a:p xmlns:a="http://schemas.openxmlformats.org/drawingml/2006/main"/>
+          <a:bodyPr/>
+          <a:lstStyle/>
+          <a:p>
+            <a:endParaRPr/>
+          </a:p>
         </p:txBody>
       </p:sp>
       <p:sp>
         <p:nvSpPr>
           <p:cNvPr id="3" name="Notes Placeholder 2"/>
-          <p:cNvSpPr/>
+          <p:cNvSpPr>
+            <a:spLocks noGrp="1"/>
+          </p:cNvSpPr>
           <p:nvPr>
             <p:ph type="body" idx="1"/>
           </p:nvPr>
         </p:nvSpPr>
         <p:spPr/>
         <p:txBody>
-          <a:bodyPr xmlns:a="http://schemas.openxmlformats.org/drawingml/2006/main"/>
-          <a:lstStyle xmlns:a="http://schemas.openxmlformats.org/drawingml/2006/main"/>
-          <a:p xmlns:a="http://schemas.openxmlformats.org/drawingml/2006/main">
+          <a:bodyPr/>
+          <a:lstStyle/>
+          <a:p>
             <a:r>
               <a:rPr lang="en-US"/>
               <a:t>Thank You slide. Developer: Mohini. GitHub: mohinibuilds. SDG 11. Best model XGBoost R2=0.9670.</a:t>
@@ -599,13 +625,13 @@
     </p:spTree>
   </p:cSld>
   <p:clrMapOvr>
-    <a:masterClrMapping xmlns:a="http://schemas.openxmlformats.org/drawingml/2006/main"/>
+    <a:masterClrMapping/>
   </p:clrMapOvr>
 </p:notes>
 </file>
 
 <file path=ppt/notesSlides/notesSlide2.xml><?xml version="1.0" encoding="utf-8"?>
-<p:notes xmlns:p="http://schemas.openxmlformats.org/presentationml/2006/main">
+<p:notes xmlns:a="http://schemas.openxmlformats.org/drawingml/2006/main" xmlns:r="http://schemas.openxmlformats.org/officeDocument/2006/relationships" xmlns:p="http://schemas.openxmlformats.org/presentationml/2006/main">
   <p:cSld>
     <p:spTree>
       <p:nvGrpSpPr>
@@ -614,36 +640,47 @@
         <p:nvPr/>
       </p:nvGrpSpPr>
       <p:grpSpPr>
-        <a:xfrm xmlns:a="http://schemas.openxmlformats.org/drawingml/2006/main"/>
+        <a:xfrm>
+          <a:off x="0" y="0"/>
+          <a:ext cx="0" cy="0"/>
+          <a:chOff x="0" y="0"/>
+          <a:chExt cx="0" cy="0"/>
+        </a:xfrm>
       </p:grpSpPr>
       <p:sp>
         <p:nvSpPr>
           <p:cNvPr id="2" name="Slide Image Placeholder 1"/>
-          <p:cNvSpPr/>
+          <p:cNvSpPr>
+            <a:spLocks noGrp="1" noRot="1" noChangeAspect="1"/>
+          </p:cNvSpPr>
           <p:nvPr>
-            <p:ph type="sldImg" idx="0"/>
+            <p:ph type="sldImg"/>
           </p:nvPr>
         </p:nvSpPr>
         <p:spPr/>
         <p:txBody>
-          <a:bodyPr xmlns:a="http://schemas.openxmlformats.org/drawingml/2006/main"/>
-          <a:lstStyle xmlns:a="http://schemas.openxmlformats.org/drawingml/2006/main"/>
-          <a:p xmlns:a="http://schemas.openxmlformats.org/drawingml/2006/main"/>
+          <a:bodyPr/>
+          <a:lstStyle/>
+          <a:p>
+            <a:endParaRPr/>
+          </a:p>
         </p:txBody>
       </p:sp>
       <p:sp>
         <p:nvSpPr>
           <p:cNvPr id="3" name="Notes Placeholder 2"/>
-          <p:cNvSpPr/>
+          <p:cNvSpPr>
+            <a:spLocks noGrp="1"/>
+          </p:cNvSpPr>
           <p:nvPr>
             <p:ph type="body" idx="1"/>
           </p:nvPr>
         </p:nvSpPr>
         <p:spPr/>
         <p:txBody>
-          <a:bodyPr xmlns:a="http://schemas.openxmlformats.org/drawingml/2006/main"/>
-          <a:lstStyle xmlns:a="http://schemas.openxmlformats.org/drawingml/2006/main"/>
-          <a:p xmlns:a="http://schemas.openxmlformats.org/drawingml/2006/main">
+          <a:bodyPr/>
+          <a:lstStyle/>
+          <a:p>
             <a:r>
               <a:rPr lang="en-US"/>
               <a:t>Problem Statement: Urban congestion is reactive, no prediction tools, causes emissions and economic loss.</a:t>
@@ -654,13 +691,13 @@
     </p:spTree>
   </p:cSld>
   <p:clrMapOvr>
-    <a:masterClrMapping xmlns:a="http://schemas.openxmlformats.org/drawingml/2006/main"/>
+    <a:masterClrMapping/>
   </p:clrMapOvr>
 </p:notes>
 </file>
 
 <file path=ppt/notesSlides/notesSlide3.xml><?xml version="1.0" encoding="utf-8"?>
-<p:notes xmlns:p="http://schemas.openxmlformats.org/presentationml/2006/main">
+<p:notes xmlns:a="http://schemas.openxmlformats.org/drawingml/2006/main" xmlns:r="http://schemas.openxmlformats.org/officeDocument/2006/relationships" xmlns:p="http://schemas.openxmlformats.org/presentationml/2006/main">
   <p:cSld>
     <p:spTree>
       <p:nvGrpSpPr>
@@ -669,36 +706,47 @@
         <p:nvPr/>
       </p:nvGrpSpPr>
       <p:grpSpPr>
-        <a:xfrm xmlns:a="http://schemas.openxmlformats.org/drawingml/2006/main"/>
+        <a:xfrm>
+          <a:off x="0" y="0"/>
+          <a:ext cx="0" cy="0"/>
+          <a:chOff x="0" y="0"/>
+          <a:chExt cx="0" cy="0"/>
+        </a:xfrm>
       </p:grpSpPr>
       <p:sp>
         <p:nvSpPr>
           <p:cNvPr id="2" name="Slide Image Placeholder 1"/>
-          <p:cNvSpPr/>
+          <p:cNvSpPr>
+            <a:spLocks noGrp="1" noRot="1" noChangeAspect="1"/>
+          </p:cNvSpPr>
           <p:nvPr>
-            <p:ph type="sldImg" idx="0"/>
+            <p:ph type="sldImg"/>
           </p:nvPr>
         </p:nvSpPr>
         <p:spPr/>
         <p:txBody>
-          <a:bodyPr xmlns:a="http://schemas.openxmlformats.org/drawingml/2006/main"/>
-          <a:lstStyle xmlns:a="http://schemas.openxmlformats.org/drawingml/2006/main"/>
-          <a:p xmlns:a="http://schemas.openxmlformats.org/drawingml/2006/main"/>
+          <a:bodyPr/>
+          <a:lstStyle/>
+          <a:p>
+            <a:endParaRPr/>
+          </a:p>
         </p:txBody>
       </p:sp>
       <p:sp>
         <p:nvSpPr>
           <p:cNvPr id="3" name="Notes Placeholder 2"/>
-          <p:cNvSpPr/>
+          <p:cNvSpPr>
+            <a:spLocks noGrp="1"/>
+          </p:cNvSpPr>
           <p:nvPr>
             <p:ph type="body" idx="1"/>
           </p:nvPr>
         </p:nvSpPr>
         <p:spPr/>
         <p:txBody>
-          <a:bodyPr xmlns:a="http://schemas.openxmlformats.org/drawingml/2006/main"/>
-          <a:lstStyle xmlns:a="http://schemas.openxmlformats.org/drawingml/2006/main"/>
-          <a:p xmlns:a="http://schemas.openxmlformats.org/drawingml/2006/main">
+          <a:bodyPr/>
+          <a:lstStyle/>
+          <a:p>
             <a:r>
               <a:rPr lang="en-US"/>
               <a:t>Our Solution: 2-4 hour ahead prediction, severity classification, re-routing, Streamlit dashboard, 87600 rows of data.</a:t>
@@ -709,13 +757,13 @@
     </p:spTree>
   </p:cSld>
   <p:clrMapOvr>
-    <a:masterClrMapping xmlns:a="http://schemas.openxmlformats.org/drawingml/2006/main"/>
+    <a:masterClrMapping/>
   </p:clrMapOvr>
 </p:notes>
 </file>
 
 <file path=ppt/notesSlides/notesSlide4.xml><?xml version="1.0" encoding="utf-8"?>
-<p:notes xmlns:p="http://schemas.openxmlformats.org/presentationml/2006/main">
+<p:notes xmlns:a="http://schemas.openxmlformats.org/drawingml/2006/main" xmlns:r="http://schemas.openxmlformats.org/officeDocument/2006/relationships" xmlns:p="http://schemas.openxmlformats.org/presentationml/2006/main">
   <p:cSld>
     <p:spTree>
       <p:nvGrpSpPr>
@@ -724,36 +772,47 @@
         <p:nvPr/>
       </p:nvGrpSpPr>
       <p:grpSpPr>
-        <a:xfrm xmlns:a="http://schemas.openxmlformats.org/drawingml/2006/main"/>
+        <a:xfrm>
+          <a:off x="0" y="0"/>
+          <a:ext cx="0" cy="0"/>
+          <a:chOff x="0" y="0"/>
+          <a:chExt cx="0" cy="0"/>
+        </a:xfrm>
       </p:grpSpPr>
       <p:sp>
         <p:nvSpPr>
           <p:cNvPr id="2" name="Slide Image Placeholder 1"/>
-          <p:cNvSpPr/>
+          <p:cNvSpPr>
+            <a:spLocks noGrp="1" noRot="1" noChangeAspect="1"/>
+          </p:cNvSpPr>
           <p:nvPr>
-            <p:ph type="sldImg" idx="0"/>
+            <p:ph type="sldImg"/>
           </p:nvPr>
         </p:nvSpPr>
         <p:spPr/>
         <p:txBody>
-          <a:bodyPr xmlns:a="http://schemas.openxmlformats.org/drawingml/2006/main"/>
-          <a:lstStyle xmlns:a="http://schemas.openxmlformats.org/drawingml/2006/main"/>
-          <a:p xmlns:a="http://schemas.openxmlformats.org/drawingml/2006/main"/>
+          <a:bodyPr/>
+          <a:lstStyle/>
+          <a:p>
+            <a:endParaRPr/>
+          </a:p>
         </p:txBody>
       </p:sp>
       <p:sp>
         <p:nvSpPr>
           <p:cNvPr id="3" name="Notes Placeholder 2"/>
-          <p:cNvSpPr/>
+          <p:cNvSpPr>
+            <a:spLocks noGrp="1"/>
+          </p:cNvSpPr>
           <p:nvPr>
             <p:ph type="body" idx="1"/>
           </p:nvPr>
         </p:nvSpPr>
         <p:spPr/>
         <p:txBody>
-          <a:bodyPr xmlns:a="http://schemas.openxmlformats.org/drawingml/2006/main"/>
-          <a:lstStyle xmlns:a="http://schemas.openxmlformats.org/drawingml/2006/main"/>
-          <a:p xmlns:a="http://schemas.openxmlformats.org/drawingml/2006/main">
+          <a:bodyPr/>
+          <a:lstStyle/>
+          <a:p>
             <a:r>
               <a:rPr lang="en-US"/>
               <a:t>Tech Stack: Python, pandas, numpy, scikit-learn, XGBoost, TensorFlow LSTM, Streamlit, Folium, joblib, GitHub.</a:t>
@@ -764,13 +823,13 @@
     </p:spTree>
   </p:cSld>
   <p:clrMapOvr>
-    <a:masterClrMapping xmlns:a="http://schemas.openxmlformats.org/drawingml/2006/main"/>
+    <a:masterClrMapping/>
   </p:clrMapOvr>
 </p:notes>
 </file>
 
 <file path=ppt/notesSlides/notesSlide5.xml><?xml version="1.0" encoding="utf-8"?>
-<p:notes xmlns:p="http://schemas.openxmlformats.org/presentationml/2006/main">
+<p:notes xmlns:a="http://schemas.openxmlformats.org/drawingml/2006/main" xmlns:r="http://schemas.openxmlformats.org/officeDocument/2006/relationships" xmlns:p="http://schemas.openxmlformats.org/presentationml/2006/main">
   <p:cSld>
     <p:spTree>
       <p:nvGrpSpPr>
@@ -779,36 +838,47 @@
         <p:nvPr/>
       </p:nvGrpSpPr>
       <p:grpSpPr>
-        <a:xfrm xmlns:a="http://schemas.openxmlformats.org/drawingml/2006/main"/>
+        <a:xfrm>
+          <a:off x="0" y="0"/>
+          <a:ext cx="0" cy="0"/>
+          <a:chOff x="0" y="0"/>
+          <a:chExt cx="0" cy="0"/>
+        </a:xfrm>
       </p:grpSpPr>
       <p:sp>
         <p:nvSpPr>
           <p:cNvPr id="2" name="Slide Image Placeholder 1"/>
-          <p:cNvSpPr/>
+          <p:cNvSpPr>
+            <a:spLocks noGrp="1" noRot="1" noChangeAspect="1"/>
+          </p:cNvSpPr>
           <p:nvPr>
-            <p:ph type="sldImg" idx="0"/>
+            <p:ph type="sldImg"/>
           </p:nvPr>
         </p:nvSpPr>
         <p:spPr/>
         <p:txBody>
-          <a:bodyPr xmlns:a="http://schemas.openxmlformats.org/drawingml/2006/main"/>
-          <a:lstStyle xmlns:a="http://schemas.openxmlformats.org/drawingml/2006/main"/>
-          <a:p xmlns:a="http://schemas.openxmlformats.org/drawingml/2006/main"/>
+          <a:bodyPr/>
+          <a:lstStyle/>
+          <a:p>
+            <a:endParaRPr/>
+          </a:p>
         </p:txBody>
       </p:sp>
       <p:sp>
         <p:nvSpPr>
           <p:cNvPr id="3" name="Notes Placeholder 2"/>
-          <p:cNvSpPr/>
+          <p:cNvSpPr>
+            <a:spLocks noGrp="1"/>
+          </p:cNvSpPr>
           <p:nvPr>
             <p:ph type="body" idx="1"/>
           </p:nvPr>
         </p:nvSpPr>
         <p:spPr/>
         <p:txBody>
-          <a:bodyPr xmlns:a="http://schemas.openxmlformats.org/drawingml/2006/main"/>
-          <a:lstStyle xmlns:a="http://schemas.openxmlformats.org/drawingml/2006/main"/>
-          <a:p xmlns:a="http://schemas.openxmlformats.org/drawingml/2006/main">
+          <a:bodyPr/>
+          <a:lstStyle/>
+          <a:p>
             <a:r>
               <a:rPr lang="en-US"/>
               <a:t>Technical Workflow: Data Collection → Pre-processing → Feature Engineering → ML Models → Dashboard &amp; Alerts.</a:t>
@@ -819,13 +889,13 @@
     </p:spTree>
   </p:cSld>
   <p:clrMapOvr>
-    <a:masterClrMapping xmlns:a="http://schemas.openxmlformats.org/drawingml/2006/main"/>
+    <a:masterClrMapping/>
   </p:clrMapOvr>
 </p:notes>
 </file>
 
 <file path=ppt/notesSlides/notesSlide6.xml><?xml version="1.0" encoding="utf-8"?>
-<p:notes xmlns:p="http://schemas.openxmlformats.org/presentationml/2006/main">
+<p:notes xmlns:a="http://schemas.openxmlformats.org/drawingml/2006/main" xmlns:r="http://schemas.openxmlformats.org/officeDocument/2006/relationships" xmlns:p="http://schemas.openxmlformats.org/presentationml/2006/main">
   <p:cSld>
     <p:spTree>
       <p:nvGrpSpPr>
@@ -834,36 +904,47 @@
         <p:nvPr/>
       </p:nvGrpSpPr>
       <p:grpSpPr>
-        <a:xfrm xmlns:a="http://schemas.openxmlformats.org/drawingml/2006/main"/>
+        <a:xfrm>
+          <a:off x="0" y="0"/>
+          <a:ext cx="0" cy="0"/>
+          <a:chOff x="0" y="0"/>
+          <a:chExt cx="0" cy="0"/>
+        </a:xfrm>
       </p:grpSpPr>
       <p:sp>
         <p:nvSpPr>
           <p:cNvPr id="2" name="Slide Image Placeholder 1"/>
-          <p:cNvSpPr/>
+          <p:cNvSpPr>
+            <a:spLocks noGrp="1" noRot="1" noChangeAspect="1"/>
+          </p:cNvSpPr>
           <p:nvPr>
-            <p:ph type="sldImg" idx="0"/>
+            <p:ph type="sldImg"/>
           </p:nvPr>
         </p:nvSpPr>
         <p:spPr/>
         <p:txBody>
-          <a:bodyPr xmlns:a="http://schemas.openxmlformats.org/drawingml/2006/main"/>
-          <a:lstStyle xmlns:a="http://schemas.openxmlformats.org/drawingml/2006/main"/>
-          <a:p xmlns:a="http://schemas.openxmlformats.org/drawingml/2006/main"/>
+          <a:bodyPr/>
+          <a:lstStyle/>
+          <a:p>
+            <a:endParaRPr/>
+          </a:p>
         </p:txBody>
       </p:sp>
       <p:sp>
         <p:nvSpPr>
           <p:cNvPr id="3" name="Notes Placeholder 2"/>
-          <p:cNvSpPr/>
+          <p:cNvSpPr>
+            <a:spLocks noGrp="1"/>
+          </p:cNvSpPr>
           <p:nvPr>
             <p:ph type="body" idx="1"/>
           </p:nvPr>
         </p:nvSpPr>
         <p:spPr/>
         <p:txBody>
-          <a:bodyPr xmlns:a="http://schemas.openxmlformats.org/drawingml/2006/main"/>
-          <a:lstStyle xmlns:a="http://schemas.openxmlformats.org/drawingml/2006/main"/>
-          <a:p xmlns:a="http://schemas.openxmlformats.org/drawingml/2006/main">
+          <a:bodyPr/>
+          <a:lstStyle/>
+          <a:p>
             <a:r>
               <a:rPr lang="en-US"/>
               <a:t>Feature Engineering: Lag features, rolling stats, cyclical time encoding, weather parameters.</a:t>
@@ -874,13 +955,13 @@
     </p:spTree>
   </p:cSld>
   <p:clrMapOvr>
-    <a:masterClrMapping xmlns:a="http://schemas.openxmlformats.org/drawingml/2006/main"/>
+    <a:masterClrMapping/>
   </p:clrMapOvr>
 </p:notes>
 </file>
 
 <file path=ppt/notesSlides/notesSlide7.xml><?xml version="1.0" encoding="utf-8"?>
-<p:notes xmlns:p="http://schemas.openxmlformats.org/presentationml/2006/main">
+<p:notes xmlns:a="http://schemas.openxmlformats.org/drawingml/2006/main" xmlns:r="http://schemas.openxmlformats.org/officeDocument/2006/relationships" xmlns:p="http://schemas.openxmlformats.org/presentationml/2006/main">
   <p:cSld>
     <p:spTree>
       <p:nvGrpSpPr>
@@ -889,36 +970,47 @@
         <p:nvPr/>
       </p:nvGrpSpPr>
       <p:grpSpPr>
-        <a:xfrm xmlns:a="http://schemas.openxmlformats.org/drawingml/2006/main"/>
+        <a:xfrm>
+          <a:off x="0" y="0"/>
+          <a:ext cx="0" cy="0"/>
+          <a:chOff x="0" y="0"/>
+          <a:chExt cx="0" cy="0"/>
+        </a:xfrm>
       </p:grpSpPr>
       <p:sp>
         <p:nvSpPr>
           <p:cNvPr id="2" name="Slide Image Placeholder 1"/>
-          <p:cNvSpPr/>
+          <p:cNvSpPr>
+            <a:spLocks noGrp="1" noRot="1" noChangeAspect="1"/>
+          </p:cNvSpPr>
           <p:nvPr>
-            <p:ph type="sldImg" idx="0"/>
+            <p:ph type="sldImg"/>
           </p:nvPr>
         </p:nvSpPr>
         <p:spPr/>
         <p:txBody>
-          <a:bodyPr xmlns:a="http://schemas.openxmlformats.org/drawingml/2006/main"/>
-          <a:lstStyle xmlns:a="http://schemas.openxmlformats.org/drawingml/2006/main"/>
-          <a:p xmlns:a="http://schemas.openxmlformats.org/drawingml/2006/main"/>
+          <a:bodyPr/>
+          <a:lstStyle/>
+          <a:p>
+            <a:endParaRPr/>
+          </a:p>
         </p:txBody>
       </p:sp>
       <p:sp>
         <p:nvSpPr>
           <p:cNvPr id="3" name="Notes Placeholder 2"/>
-          <p:cNvSpPr/>
+          <p:cNvSpPr>
+            <a:spLocks noGrp="1"/>
+          </p:cNvSpPr>
           <p:nvPr>
             <p:ph type="body" idx="1"/>
           </p:nvPr>
         </p:nvSpPr>
         <p:spPr/>
         <p:txBody>
-          <a:bodyPr xmlns:a="http://schemas.openxmlformats.org/drawingml/2006/main"/>
-          <a:lstStyle xmlns:a="http://schemas.openxmlformats.org/drawingml/2006/main"/>
-          <a:p xmlns:a="http://schemas.openxmlformats.org/drawingml/2006/main">
+          <a:bodyPr/>
+          <a:lstStyle/>
+          <a:p>
             <a:r>
               <a:rPr lang="en-US"/>
               <a:t>Model Results: Random Forest R²=0.9647, XGBoost R²=0.9670 (best), LSTM for sequential patterns.</a:t>
@@ -929,13 +1021,13 @@
     </p:spTree>
   </p:cSld>
   <p:clrMapOvr>
-    <a:masterClrMapping xmlns:a="http://schemas.openxmlformats.org/drawingml/2006/main"/>
+    <a:masterClrMapping/>
   </p:clrMapOvr>
 </p:notes>
 </file>
 
 <file path=ppt/notesSlides/notesSlide8.xml><?xml version="1.0" encoding="utf-8"?>
-<p:notes xmlns:p="http://schemas.openxmlformats.org/presentationml/2006/main">
+<p:notes xmlns:a="http://schemas.openxmlformats.org/drawingml/2006/main" xmlns:r="http://schemas.openxmlformats.org/officeDocument/2006/relationships" xmlns:p="http://schemas.openxmlformats.org/presentationml/2006/main">
   <p:cSld>
     <p:spTree>
       <p:nvGrpSpPr>
@@ -944,36 +1036,47 @@
         <p:nvPr/>
       </p:nvGrpSpPr>
       <p:grpSpPr>
-        <a:xfrm xmlns:a="http://schemas.openxmlformats.org/drawingml/2006/main"/>
+        <a:xfrm>
+          <a:off x="0" y="0"/>
+          <a:ext cx="0" cy="0"/>
+          <a:chOff x="0" y="0"/>
+          <a:chExt cx="0" cy="0"/>
+        </a:xfrm>
       </p:grpSpPr>
       <p:sp>
         <p:nvSpPr>
           <p:cNvPr id="2" name="Slide Image Placeholder 1"/>
-          <p:cNvSpPr/>
+          <p:cNvSpPr>
+            <a:spLocks noGrp="1" noRot="1" noChangeAspect="1"/>
+          </p:cNvSpPr>
           <p:nvPr>
-            <p:ph type="sldImg" idx="0"/>
+            <p:ph type="sldImg"/>
           </p:nvPr>
         </p:nvSpPr>
         <p:spPr/>
         <p:txBody>
-          <a:bodyPr xmlns:a="http://schemas.openxmlformats.org/drawingml/2006/main"/>
-          <a:lstStyle xmlns:a="http://schemas.openxmlformats.org/drawingml/2006/main"/>
-          <a:p xmlns:a="http://schemas.openxmlformats.org/drawingml/2006/main"/>
+          <a:bodyPr/>
+          <a:lstStyle/>
+          <a:p>
+            <a:endParaRPr/>
+          </a:p>
         </p:txBody>
       </p:sp>
       <p:sp>
         <p:nvSpPr>
           <p:cNvPr id="3" name="Notes Placeholder 2"/>
-          <p:cNvSpPr/>
+          <p:cNvSpPr>
+            <a:spLocks noGrp="1"/>
+          </p:cNvSpPr>
           <p:nvPr>
             <p:ph type="body" idx="1"/>
           </p:nvPr>
         </p:nvSpPr>
         <p:spPr/>
         <p:txBody>
-          <a:bodyPr xmlns:a="http://schemas.openxmlformats.org/drawingml/2006/main"/>
-          <a:lstStyle xmlns:a="http://schemas.openxmlformats.org/drawingml/2006/main"/>
-          <a:p xmlns:a="http://schemas.openxmlformats.org/drawingml/2006/main">
+          <a:bodyPr/>
+          <a:lstStyle/>
+          <a:p>
             <a:r>
               <a:rPr lang="en-US"/>
               <a:t>Dashboard UI Preview: Sidebar controls, KPI cards (volume, speed, rain, congestion), forecast cards, 7-day trend chart, Folium heatmap. Run: streamlit run app.py</a:t>
@@ -984,13 +1087,13 @@
     </p:spTree>
   </p:cSld>
   <p:clrMapOvr>
-    <a:masterClrMapping xmlns:a="http://schemas.openxmlformats.org/drawingml/2006/main"/>
+    <a:masterClrMapping/>
   </p:clrMapOvr>
 </p:notes>
 </file>
 
 <file path=ppt/notesSlides/notesSlide9.xml><?xml version="1.0" encoding="utf-8"?>
-<p:notes xmlns:p="http://schemas.openxmlformats.org/presentationml/2006/main">
+<p:notes xmlns:a="http://schemas.openxmlformats.org/drawingml/2006/main" xmlns:r="http://schemas.openxmlformats.org/officeDocument/2006/relationships" xmlns:p="http://schemas.openxmlformats.org/presentationml/2006/main">
   <p:cSld>
     <p:spTree>
       <p:nvGrpSpPr>
@@ -999,36 +1102,47 @@
         <p:nvPr/>
       </p:nvGrpSpPr>
       <p:grpSpPr>
-        <a:xfrm xmlns:a="http://schemas.openxmlformats.org/drawingml/2006/main"/>
+        <a:xfrm>
+          <a:off x="0" y="0"/>
+          <a:ext cx="0" cy="0"/>
+          <a:chOff x="0" y="0"/>
+          <a:chExt cx="0" cy="0"/>
+        </a:xfrm>
       </p:grpSpPr>
       <p:sp>
         <p:nvSpPr>
           <p:cNvPr id="2" name="Slide Image Placeholder 1"/>
-          <p:cNvSpPr/>
+          <p:cNvSpPr>
+            <a:spLocks noGrp="1" noRot="1" noChangeAspect="1"/>
+          </p:cNvSpPr>
           <p:nvPr>
-            <p:ph type="sldImg" idx="0"/>
+            <p:ph type="sldImg"/>
           </p:nvPr>
         </p:nvSpPr>
         <p:spPr/>
         <p:txBody>
-          <a:bodyPr xmlns:a="http://schemas.openxmlformats.org/drawingml/2006/main"/>
-          <a:lstStyle xmlns:a="http://schemas.openxmlformats.org/drawingml/2006/main"/>
-          <a:p xmlns:a="http://schemas.openxmlformats.org/drawingml/2006/main"/>
+          <a:bodyPr/>
+          <a:lstStyle/>
+          <a:p>
+            <a:endParaRPr/>
+          </a:p>
         </p:txBody>
       </p:sp>
       <p:sp>
         <p:nvSpPr>
           <p:cNvPr id="3" name="Notes Placeholder 2"/>
-          <p:cNvSpPr/>
+          <p:cNvSpPr>
+            <a:spLocks noGrp="1"/>
+          </p:cNvSpPr>
           <p:nvPr>
             <p:ph type="body" idx="1"/>
           </p:nvPr>
         </p:nvSpPr>
         <p:spPr/>
         <p:txBody>
-          <a:bodyPr xmlns:a="http://schemas.openxmlformats.org/drawingml/2006/main"/>
-          <a:lstStyle xmlns:a="http://schemas.openxmlformats.org/drawingml/2006/main"/>
-          <a:p xmlns:a="http://schemas.openxmlformats.org/drawingml/2006/main">
+          <a:bodyPr/>
+          <a:lstStyle/>
+          <a:p>
             <a:r>
               <a:rPr lang="en-US"/>
               <a:t>Streamlit dashboard has 6 sections: Real-time KPIs, Forecast Cards, Trend Analysis, Heatmap, Re-routing Alerts, Feature Importance.</a:t>
@@ -1039,13 +1153,13 @@
     </p:spTree>
   </p:cSld>
   <p:clrMapOvr>
-    <a:masterClrMapping xmlns:a="http://schemas.openxmlformats.org/drawingml/2006/main"/>
+    <a:masterClrMapping/>
   </p:clrMapOvr>
 </p:notes>
 </file>
 
 <file path=ppt/slideLayouts/slideLayout1.xml><?xml version="1.0" encoding="utf-8"?>
-<p:sldLayout xmlns:p="http://schemas.openxmlformats.org/presentationml/2006/main" type="blank">
+<p:sldLayout xmlns:a="http://schemas.openxmlformats.org/drawingml/2006/main" xmlns:r="http://schemas.openxmlformats.org/officeDocument/2006/relationships" xmlns:p="http://schemas.openxmlformats.org/presentationml/2006/main" type="blank">
   <p:cSld name="Blank">
     <p:spTree>
       <p:nvGrpSpPr>
@@ -1053,14 +1167,24 @@
         <p:cNvGrpSpPr/>
         <p:nvPr/>
       </p:nvGrpSpPr>
-      <p:grpSpPr/>
+      <p:grpSpPr>
+        <a:xfrm>
+          <a:off x="0" y="0"/>
+          <a:ext cx="0" cy="0"/>
+          <a:chOff x="0" y="0"/>
+          <a:chExt cx="0" cy="0"/>
+        </a:xfrm>
+      </p:grpSpPr>
     </p:spTree>
   </p:cSld>
+  <p:clrMapOvr>
+    <a:masterClrMapping/>
+  </p:clrMapOvr>
 </p:sldLayout>
 </file>
 
 <file path=ppt/slideLayouts/slideLayout2.xml><?xml version="1.0" encoding="utf-8"?>
-<p:sldLayout xmlns:p="http://schemas.openxmlformats.org/presentationml/2006/main" type="title">
+<p:sldLayout xmlns:a="http://schemas.openxmlformats.org/drawingml/2006/main" xmlns:r="http://schemas.openxmlformats.org/officeDocument/2006/relationships" xmlns:p="http://schemas.openxmlformats.org/presentationml/2006/main" type="title">
   <p:cSld name="Title Slide">
     <p:spTree>
       <p:nvGrpSpPr>
@@ -1068,27 +1192,34 @@
         <p:cNvGrpSpPr/>
         <p:nvPr/>
       </p:nvGrpSpPr>
-      <p:grpSpPr/>
+      <p:grpSpPr>
+        <a:xfrm>
+          <a:off x="0" y="0"/>
+          <a:ext cx="0" cy="0"/>
+          <a:chOff x="0" y="0"/>
+          <a:chExt cx="0" cy="0"/>
+        </a:xfrm>
+      </p:grpSpPr>
       <p:sp>
         <p:nvSpPr>
           <p:cNvPr id="2" name="Title"/>
           <p:cNvSpPr>
-            <a:spLocks xmlns:a="http://schemas.openxmlformats.org/drawingml/2006/main" noGrp="1"/>
+            <a:spLocks noGrp="1"/>
           </p:cNvSpPr>
           <p:nvPr>
             <p:ph type="ctrTitle"/>
           </p:nvPr>
         </p:nvSpPr>
         <p:spPr>
-          <a:xfrm xmlns:a="http://schemas.openxmlformats.org/drawingml/2006/main">
+          <a:xfrm>
             <a:off x="685800" y="2130425"/>
             <a:ext cx="7772400" cy="1470025"/>
           </a:xfrm>
         </p:spPr>
         <p:txBody>
-          <a:bodyPr xmlns:a="http://schemas.openxmlformats.org/drawingml/2006/main"/>
-          <a:lstStyle xmlns:a="http://schemas.openxmlformats.org/drawingml/2006/main"/>
-          <a:p xmlns:a="http://schemas.openxmlformats.org/drawingml/2006/main">
+          <a:bodyPr/>
+          <a:lstStyle/>
+          <a:p>
             <a:endParaRPr lang="en-US"/>
           </a:p>
         </p:txBody>
@@ -1097,33 +1228,36 @@
         <p:nvSpPr>
           <p:cNvPr id="3" name="Subtitle"/>
           <p:cNvSpPr>
-            <a:spLocks xmlns:a="http://schemas.openxmlformats.org/drawingml/2006/main" noGrp="1"/>
+            <a:spLocks noGrp="1"/>
           </p:cNvSpPr>
           <p:nvPr>
             <p:ph type="subTitle" idx="1"/>
           </p:nvPr>
         </p:nvSpPr>
         <p:spPr>
-          <a:xfrm xmlns:a="http://schemas.openxmlformats.org/drawingml/2006/main">
+          <a:xfrm>
             <a:off x="1371600" y="3886200"/>
             <a:ext cx="6400800" cy="1752600"/>
           </a:xfrm>
         </p:spPr>
         <p:txBody>
-          <a:bodyPr xmlns:a="http://schemas.openxmlformats.org/drawingml/2006/main"/>
-          <a:lstStyle xmlns:a="http://schemas.openxmlformats.org/drawingml/2006/main"/>
-          <a:p xmlns:a="http://schemas.openxmlformats.org/drawingml/2006/main">
+          <a:bodyPr/>
+          <a:lstStyle/>
+          <a:p>
             <a:endParaRPr lang="en-US"/>
           </a:p>
         </p:txBody>
       </p:sp>
     </p:spTree>
   </p:cSld>
+  <p:clrMapOvr>
+    <a:masterClrMapping/>
+  </p:clrMapOvr>
 </p:sldLayout>
 </file>
 
 <file path=ppt/slideLayouts/slideLayout3.xml><?xml version="1.0" encoding="utf-8"?>
-<p:sldLayout xmlns:p="http://schemas.openxmlformats.org/presentationml/2006/main" type="objTx">
+<p:sldLayout xmlns:a="http://schemas.openxmlformats.org/drawingml/2006/main" xmlns:r="http://schemas.openxmlformats.org/officeDocument/2006/relationships" xmlns:p="http://schemas.openxmlformats.org/presentationml/2006/main" type="objTx">
   <p:cSld name="Title and Content">
     <p:spTree>
       <p:nvGrpSpPr>
@@ -1131,27 +1265,34 @@
         <p:cNvGrpSpPr/>
         <p:nvPr/>
       </p:nvGrpSpPr>
-      <p:grpSpPr/>
+      <p:grpSpPr>
+        <a:xfrm>
+          <a:off x="0" y="0"/>
+          <a:ext cx="0" cy="0"/>
+          <a:chOff x="0" y="0"/>
+          <a:chExt cx="0" cy="0"/>
+        </a:xfrm>
+      </p:grpSpPr>
       <p:sp>
         <p:nvSpPr>
           <p:cNvPr id="2" name="Title"/>
           <p:cNvSpPr>
-            <a:spLocks xmlns:a="http://schemas.openxmlformats.org/drawingml/2006/main" noGrp="1"/>
+            <a:spLocks noGrp="1"/>
           </p:cNvSpPr>
           <p:nvPr>
             <p:ph type="title"/>
           </p:nvPr>
         </p:nvSpPr>
         <p:spPr>
-          <a:xfrm xmlns:a="http://schemas.openxmlformats.org/drawingml/2006/main">
+          <a:xfrm>
             <a:off x="838200" y="365125"/>
             <a:ext cx="10515600" cy="1325563"/>
           </a:xfrm>
         </p:spPr>
         <p:txBody>
-          <a:bodyPr xmlns:a="http://schemas.openxmlformats.org/drawingml/2006/main"/>
-          <a:lstStyle xmlns:a="http://schemas.openxmlformats.org/drawingml/2006/main"/>
-          <a:p xmlns:a="http://schemas.openxmlformats.org/drawingml/2006/main">
+          <a:bodyPr/>
+          <a:lstStyle/>
+          <a:p>
             <a:endParaRPr lang="en-US"/>
           </a:p>
         </p:txBody>
@@ -1160,33 +1301,36 @@
         <p:nvSpPr>
           <p:cNvPr id="3" name="Content"/>
           <p:cNvSpPr>
-            <a:spLocks xmlns:a="http://schemas.openxmlformats.org/drawingml/2006/main" noGrp="1"/>
+            <a:spLocks noGrp="1"/>
           </p:cNvSpPr>
           <p:nvPr>
             <p:ph type="body" idx="1"/>
           </p:nvPr>
         </p:nvSpPr>
         <p:spPr>
-          <a:xfrm xmlns:a="http://schemas.openxmlformats.org/drawingml/2006/main">
+          <a:xfrm>
             <a:off x="838200" y="1825625"/>
             <a:ext cx="10515600" cy="4351338"/>
           </a:xfrm>
         </p:spPr>
         <p:txBody>
-          <a:bodyPr xmlns:a="http://schemas.openxmlformats.org/drawingml/2006/main"/>
-          <a:lstStyle xmlns:a="http://schemas.openxmlformats.org/drawingml/2006/main"/>
-          <a:p xmlns:a="http://schemas.openxmlformats.org/drawingml/2006/main">
+          <a:bodyPr/>
+          <a:lstStyle/>
+          <a:p>
             <a:endParaRPr lang="en-US"/>
           </a:p>
         </p:txBody>
       </p:sp>
     </p:spTree>
   </p:cSld>
+  <p:clrMapOvr>
+    <a:masterClrMapping/>
+  </p:clrMapOvr>
 </p:sldLayout>
 </file>
 
 <file path=ppt/slideLayouts/slideLayout4.xml><?xml version="1.0" encoding="utf-8"?>
-<p:sldLayout xmlns:p="http://schemas.openxmlformats.org/presentationml/2006/main" type="twoColTx">
+<p:sldLayout xmlns:a="http://schemas.openxmlformats.org/drawingml/2006/main" xmlns:r="http://schemas.openxmlformats.org/officeDocument/2006/relationships" xmlns:p="http://schemas.openxmlformats.org/presentationml/2006/main" type="twoColTx">
   <p:cSld name="Two Content">
     <p:spTree>
       <p:nvGrpSpPr>
@@ -1194,27 +1338,34 @@
         <p:cNvGrpSpPr/>
         <p:nvPr/>
       </p:nvGrpSpPr>
-      <p:grpSpPr/>
+      <p:grpSpPr>
+        <a:xfrm>
+          <a:off x="0" y="0"/>
+          <a:ext cx="0" cy="0"/>
+          <a:chOff x="0" y="0"/>
+          <a:chExt cx="0" cy="0"/>
+        </a:xfrm>
+      </p:grpSpPr>
       <p:sp>
         <p:nvSpPr>
           <p:cNvPr id="2" name="Title"/>
           <p:cNvSpPr>
-            <a:spLocks xmlns:a="http://schemas.openxmlformats.org/drawingml/2006/main" noGrp="1"/>
+            <a:spLocks noGrp="1"/>
           </p:cNvSpPr>
           <p:nvPr>
             <p:ph type="title"/>
           </p:nvPr>
         </p:nvSpPr>
         <p:spPr>
-          <a:xfrm xmlns:a="http://schemas.openxmlformats.org/drawingml/2006/main">
+          <a:xfrm>
             <a:off x="838200" y="365125"/>
             <a:ext cx="10515600" cy="1325563"/>
           </a:xfrm>
         </p:spPr>
         <p:txBody>
-          <a:bodyPr xmlns:a="http://schemas.openxmlformats.org/drawingml/2006/main"/>
-          <a:lstStyle xmlns:a="http://schemas.openxmlformats.org/drawingml/2006/main"/>
-          <a:p xmlns:a="http://schemas.openxmlformats.org/drawingml/2006/main">
+          <a:bodyPr/>
+          <a:lstStyle/>
+          <a:p>
             <a:endParaRPr lang="en-US"/>
           </a:p>
         </p:txBody>
@@ -1223,22 +1374,22 @@
         <p:nvSpPr>
           <p:cNvPr id="3" name="Content Left"/>
           <p:cNvSpPr>
-            <a:spLocks xmlns:a="http://schemas.openxmlformats.org/drawingml/2006/main" noGrp="1"/>
+            <a:spLocks noGrp="1"/>
           </p:cNvSpPr>
           <p:nvPr>
             <p:ph type="body" idx="1"/>
           </p:nvPr>
         </p:nvSpPr>
         <p:spPr>
-          <a:xfrm xmlns:a="http://schemas.openxmlformats.org/drawingml/2006/main">
+          <a:xfrm>
             <a:off x="838200" y="1825625"/>
             <a:ext cx="5181600" cy="4351338"/>
           </a:xfrm>
         </p:spPr>
         <p:txBody>
-          <a:bodyPr xmlns:a="http://schemas.openxmlformats.org/drawingml/2006/main"/>
-          <a:lstStyle xmlns:a="http://schemas.openxmlformats.org/drawingml/2006/main"/>
-          <a:p xmlns:a="http://schemas.openxmlformats.org/drawingml/2006/main">
+          <a:bodyPr/>
+          <a:lstStyle/>
+          <a:p>
             <a:endParaRPr lang="en-US"/>
           </a:p>
         </p:txBody>
@@ -1247,33 +1398,36 @@
         <p:nvSpPr>
           <p:cNvPr id="4" name="Content Right"/>
           <p:cNvSpPr>
-            <a:spLocks xmlns:a="http://schemas.openxmlformats.org/drawingml/2006/main" noGrp="1"/>
+            <a:spLocks noGrp="1"/>
           </p:cNvSpPr>
           <p:nvPr>
             <p:ph type="body" idx="2"/>
           </p:nvPr>
         </p:nvSpPr>
         <p:spPr>
-          <a:xfrm xmlns:a="http://schemas.openxmlformats.org/drawingml/2006/main">
+          <a:xfrm>
             <a:off x="6172200" y="1825625"/>
             <a:ext cx="5181600" cy="4351338"/>
           </a:xfrm>
         </p:spPr>
         <p:txBody>
-          <a:bodyPr xmlns:a="http://schemas.openxmlformats.org/drawingml/2006/main"/>
-          <a:lstStyle xmlns:a="http://schemas.openxmlformats.org/drawingml/2006/main"/>
-          <a:p xmlns:a="http://schemas.openxmlformats.org/drawingml/2006/main">
+          <a:bodyPr/>
+          <a:lstStyle/>
+          <a:p>
             <a:endParaRPr lang="en-US"/>
           </a:p>
         </p:txBody>
       </p:sp>
     </p:spTree>
   </p:cSld>
+  <p:clrMapOvr>
+    <a:masterClrMapping/>
+  </p:clrMapOvr>
 </p:sldLayout>
 </file>
 
 <file path=ppt/slideLayouts/slideLayout5.xml><?xml version="1.0" encoding="utf-8"?>
-<p:sldLayout xmlns:p="http://schemas.openxmlformats.org/presentationml/2006/main" type="titleOnly">
+<p:sldLayout xmlns:a="http://schemas.openxmlformats.org/drawingml/2006/main" xmlns:r="http://schemas.openxmlformats.org/officeDocument/2006/relationships" xmlns:p="http://schemas.openxmlformats.org/presentationml/2006/main" type="titleOnly">
   <p:cSld name="Title Only">
     <p:spTree>
       <p:nvGrpSpPr>
@@ -1281,67 +1435,370 @@
         <p:cNvGrpSpPr/>
         <p:nvPr/>
       </p:nvGrpSpPr>
-      <p:grpSpPr/>
+      <p:grpSpPr>
+        <a:xfrm>
+          <a:off x="0" y="0"/>
+          <a:ext cx="0" cy="0"/>
+          <a:chOff x="0" y="0"/>
+          <a:chExt cx="0" cy="0"/>
+        </a:xfrm>
+      </p:grpSpPr>
       <p:sp>
         <p:nvSpPr>
           <p:cNvPr id="2" name="Title"/>
           <p:cNvSpPr>
-            <a:spLocks xmlns:a="http://schemas.openxmlformats.org/drawingml/2006/main" noGrp="1"/>
+            <a:spLocks noGrp="1"/>
           </p:cNvSpPr>
           <p:nvPr>
             <p:ph type="title"/>
           </p:nvPr>
         </p:nvSpPr>
         <p:spPr>
-          <a:xfrm xmlns:a="http://schemas.openxmlformats.org/drawingml/2006/main">
+          <a:xfrm>
             <a:off x="838200" y="365125"/>
             <a:ext cx="10515600" cy="1325563"/>
           </a:xfrm>
         </p:spPr>
         <p:txBody>
-          <a:bodyPr xmlns:a="http://schemas.openxmlformats.org/drawingml/2006/main"/>
-          <a:lstStyle xmlns:a="http://schemas.openxmlformats.org/drawingml/2006/main"/>
-          <a:p xmlns:a="http://schemas.openxmlformats.org/drawingml/2006/main">
+          <a:bodyPr/>
+          <a:lstStyle/>
+          <a:p>
             <a:endParaRPr lang="en-US"/>
           </a:p>
         </p:txBody>
       </p:sp>
     </p:spTree>
   </p:cSld>
+  <p:clrMapOvr>
+    <a:masterClrMapping/>
+  </p:clrMapOvr>
 </p:sldLayout>
 </file>
 
 <file path=ppt/slideMasters/slideMaster1.xml><?xml version="1.0" encoding="utf-8"?>
-<p:sldMaster xmlns:r="http://schemas.openxmlformats.org/officeDocument/2006/relationships" xmlns:p="http://schemas.openxmlformats.org/presentationml/2006/main">
+<p:sldMaster xmlns:a="http://schemas.openxmlformats.org/drawingml/2006/main" xmlns:r="http://schemas.openxmlformats.org/officeDocument/2006/relationships" xmlns:p="http://schemas.openxmlformats.org/presentationml/2006/main">
   <p:cSld>
+    <p:bg>
+      <p:bgRef idx="1001">
+        <a:schemeClr val="bg1"/>
+      </p:bgRef>
+    </p:bg>
     <p:spTree>
       <p:nvGrpSpPr>
         <p:cNvPr id="1" name=""/>
         <p:cNvGrpSpPr/>
         <p:nvPr/>
       </p:nvGrpSpPr>
-      <p:grpSpPr/>
+      <p:grpSpPr>
+        <a:xfrm>
+          <a:off x="0" y="0"/>
+          <a:ext cx="0" cy="0"/>
+          <a:chOff x="0" y="0"/>
+          <a:chExt cx="0" cy="0"/>
+        </a:xfrm>
+      </p:grpSpPr>
     </p:spTree>
   </p:cSld>
   <p:clrMap bg1="lt1" tx1="dk1" bg2="lt2" tx2="dk2" accent1="accent1" accent2="accent2" accent3="accent3" accent4="accent4" accent5="accent5" accent6="accent6" hlink="hlink" folHlink="folHlink"/>
   <p:sldLayoutIdLst>
-    <p:sldLayoutId xmlns:r="http://schemas.openxmlformats.org/officeDocument/2006/relationships" id="2147483649" r:id="rId1"/>
-    <p:sldLayoutId xmlns:r="http://schemas.openxmlformats.org/officeDocument/2006/relationships" id="2147483650" r:id="rId2"/>
-    <p:sldLayoutId xmlns:r="http://schemas.openxmlformats.org/officeDocument/2006/relationships" id="2147483651" r:id="rId3"/>
-    <p:sldLayoutId xmlns:r="http://schemas.openxmlformats.org/officeDocument/2006/relationships" id="2147483652" r:id="rId4"/>
-    <p:sldLayoutId xmlns:r="http://schemas.openxmlformats.org/officeDocument/2006/relationships" id="2147483653" r:id="rId5"/>
+    <p:sldLayoutId id="2147483649" r:id="rId1"/>
+    <p:sldLayoutId id="2147483650" r:id="rId2"/>
+    <p:sldLayoutId id="2147483651" r:id="rId3"/>
+    <p:sldLayoutId id="2147483652" r:id="rId4"/>
+    <p:sldLayoutId id="2147483653" r:id="rId5"/>
   </p:sldLayoutIdLst>
+  <p:txStyles>
+    <p:titleStyle>
+      <a:lvl1pPr algn="l" defTabSz="914400" rtl="0" eaLnBrk="1" latinLnBrk="0" hangingPunct="1">
+        <a:lnSpc>
+          <a:spcPct val="90000"/>
+        </a:lnSpc>
+        <a:spcBef>
+          <a:spcPct val="0"/>
+        </a:spcBef>
+        <a:buNone/>
+        <a:defRPr sz="4400" kern="1200">
+          <a:solidFill>
+            <a:schemeClr val="tx1"/>
+          </a:solidFill>
+          <a:latin typeface="+mj-lt"/>
+          <a:ea typeface="+mj-ea"/>
+          <a:cs typeface="+mj-cs"/>
+        </a:defRPr>
+      </a:lvl1pPr>
+    </p:titleStyle>
+    <p:bodyStyle>
+      <a:lvl1pPr marL="228600" indent="-228600" algn="l" defTabSz="914400" rtl="0" eaLnBrk="1" latinLnBrk="0" hangingPunct="1">
+        <a:lnSpc>
+          <a:spcPct val="90000"/>
+        </a:lnSpc>
+        <a:spcBef>
+          <a:spcPts val="1000"/>
+        </a:spcBef>
+        <a:buFont typeface="Arial" panose="020B0604020202020204" pitchFamily="34" charset="0"/>
+        <a:buChar char="•"/>
+        <a:defRPr sz="2800" kern="1200">
+          <a:solidFill>
+            <a:schemeClr val="tx1"/>
+          </a:solidFill>
+          <a:latin typeface="+mn-lt"/>
+          <a:ea typeface="+mn-ea"/>
+          <a:cs typeface="+mn-cs"/>
+        </a:defRPr>
+      </a:lvl1pPr>
+      <a:lvl2pPr marL="685800" indent="-228600" algn="l" defTabSz="914400" rtl="0" eaLnBrk="1" latinLnBrk="0" hangingPunct="1">
+        <a:lnSpc>
+          <a:spcPct val="90000"/>
+        </a:lnSpc>
+        <a:spcBef>
+          <a:spcPts val="500"/>
+        </a:spcBef>
+        <a:buFont typeface="Arial" panose="020B0604020202020204" pitchFamily="34" charset="0"/>
+        <a:buChar char="•"/>
+        <a:defRPr sz="2400" kern="1200">
+          <a:solidFill>
+            <a:schemeClr val="tx1"/>
+          </a:solidFill>
+          <a:latin typeface="+mn-lt"/>
+          <a:ea typeface="+mn-ea"/>
+          <a:cs typeface="+mn-cs"/>
+        </a:defRPr>
+      </a:lvl2pPr>
+      <a:lvl3pPr marL="1143000" indent="-228600" algn="l" defTabSz="914400" rtl="0" eaLnBrk="1" latinLnBrk="0" hangingPunct="1">
+        <a:lnSpc>
+          <a:spcPct val="90000"/>
+        </a:lnSpc>
+        <a:spcBef>
+          <a:spcPts val="500"/>
+        </a:spcBef>
+        <a:buFont typeface="Arial" panose="020B0604020202020204" pitchFamily="34" charset="0"/>
+        <a:buChar char="•"/>
+        <a:defRPr sz="2000" kern="1200">
+          <a:solidFill>
+            <a:schemeClr val="tx1"/>
+          </a:solidFill>
+          <a:latin typeface="+mn-lt"/>
+          <a:ea typeface="+mn-ea"/>
+          <a:cs typeface="+mn-cs"/>
+        </a:defRPr>
+      </a:lvl3pPr>
+      <a:lvl4pPr marL="1600200" indent="-228600" algn="l" defTabSz="914400" rtl="0" eaLnBrk="1" latinLnBrk="0" hangingPunct="1">
+        <a:lnSpc>
+          <a:spcPct val="90000"/>
+        </a:lnSpc>
+        <a:spcBef>
+          <a:spcPts val="500"/>
+        </a:spcBef>
+        <a:buFont typeface="Arial" panose="020B0604020202020204" pitchFamily="34" charset="0"/>
+        <a:buChar char="•"/>
+        <a:defRPr sz="1800" kern="1200">
+          <a:solidFill>
+            <a:schemeClr val="tx1"/>
+          </a:solidFill>
+          <a:latin typeface="+mn-lt"/>
+          <a:ea typeface="+mn-ea"/>
+          <a:cs typeface="+mn-cs"/>
+        </a:defRPr>
+      </a:lvl4pPr>
+      <a:lvl5pPr marL="2057400" indent="-228600" algn="l" defTabSz="914400" rtl="0" eaLnBrk="1" latinLnBrk="0" hangingPunct="1">
+        <a:lnSpc>
+          <a:spcPct val="90000"/>
+        </a:lnSpc>
+        <a:spcBef>
+          <a:spcPts val="500"/>
+        </a:spcBef>
+        <a:buFont typeface="Arial" panose="020B0604020202020204" pitchFamily="34" charset="0"/>
+        <a:buChar char="•"/>
+        <a:defRPr sz="1800" kern="1200">
+          <a:solidFill>
+            <a:schemeClr val="tx1"/>
+          </a:solidFill>
+          <a:latin typeface="+mn-lt"/>
+          <a:ea typeface="+mn-ea"/>
+          <a:cs typeface="+mn-cs"/>
+        </a:defRPr>
+      </a:lvl5pPr>
+      <a:lvl6pPr marL="2514600" indent="-228600" algn="l" defTabSz="914400" rtl="0" eaLnBrk="1" latinLnBrk="0" hangingPunct="1">
+        <a:lnSpc>
+          <a:spcPct val="90000"/>
+        </a:lnSpc>
+        <a:spcBef>
+          <a:spcPts val="500"/>
+        </a:spcBef>
+        <a:buFont typeface="Arial" panose="020B0604020202020204" pitchFamily="34" charset="0"/>
+        <a:buChar char="•"/>
+        <a:defRPr sz="1800" kern="1200">
+          <a:solidFill>
+            <a:schemeClr val="tx1"/>
+          </a:solidFill>
+          <a:latin typeface="+mn-lt"/>
+          <a:ea typeface="+mn-ea"/>
+          <a:cs typeface="+mn-cs"/>
+        </a:defRPr>
+      </a:lvl6pPr>
+      <a:lvl7pPr marL="2971800" indent="-228600" algn="l" defTabSz="914400" rtl="0" eaLnBrk="1" latinLnBrk="0" hangingPunct="1">
+        <a:lnSpc>
+          <a:spcPct val="90000"/>
+        </a:lnSpc>
+        <a:spcBef>
+          <a:spcPts val="500"/>
+        </a:spcBef>
+        <a:buFont typeface="Arial" panose="020B0604020202020204" pitchFamily="34" charset="0"/>
+        <a:buChar char="•"/>
+        <a:defRPr sz="1800" kern="1200">
+          <a:solidFill>
+            <a:schemeClr val="tx1"/>
+          </a:solidFill>
+          <a:latin typeface="+mn-lt"/>
+          <a:ea typeface="+mn-ea"/>
+          <a:cs typeface="+mn-cs"/>
+        </a:defRPr>
+      </a:lvl7pPr>
+      <a:lvl8pPr marL="3429000" indent="-228600" algn="l" defTabSz="914400" rtl="0" eaLnBrk="1" latinLnBrk="0" hangingPunct="1">
+        <a:lnSpc>
+          <a:spcPct val="90000"/>
+        </a:lnSpc>
+        <a:spcBef>
+          <a:spcPts val="500"/>
+        </a:spcBef>
+        <a:buFont typeface="Arial" panose="020B0604020202020204" pitchFamily="34" charset="0"/>
+        <a:buChar char="•"/>
+        <a:defRPr sz="1800" kern="1200">
+          <a:solidFill>
+            <a:schemeClr val="tx1"/>
+          </a:solidFill>
+          <a:latin typeface="+mn-lt"/>
+          <a:ea typeface="+mn-ea"/>
+          <a:cs typeface="+mn-cs"/>
+        </a:defRPr>
+      </a:lvl8pPr>
+      <a:lvl9pPr marL="3886200" indent="-228600" algn="l" defTabSz="914400" rtl="0" eaLnBrk="1" latinLnBrk="0" hangingPunct="1">
+        <a:lnSpc>
+          <a:spcPct val="90000"/>
+        </a:lnSpc>
+        <a:spcBef>
+          <a:spcPts val="500"/>
+        </a:spcBef>
+        <a:buFont typeface="Arial" panose="020B0604020202020204" pitchFamily="34" charset="0"/>
+        <a:buChar char="•"/>
+        <a:defRPr sz="1800" kern="1200">
+          <a:solidFill>
+            <a:schemeClr val="tx1"/>
+          </a:solidFill>
+          <a:latin typeface="+mn-lt"/>
+          <a:ea typeface="+mn-ea"/>
+          <a:cs typeface="+mn-cs"/>
+        </a:defRPr>
+      </a:lvl9pPr>
+    </p:bodyStyle>
+    <p:otherStyle>
+      <a:defPPr>
+        <a:defRPr lang="en-US"/>
+      </a:defPPr>
+      <a:lvl1pPr marL="0" algn="l" defTabSz="914400" rtl="0" eaLnBrk="1" latinLnBrk="0" hangingPunct="1">
+        <a:defRPr sz="1800" kern="1200">
+          <a:solidFill>
+            <a:schemeClr val="tx1"/>
+          </a:solidFill>
+          <a:latin typeface="+mn-lt"/>
+          <a:ea typeface="+mn-ea"/>
+          <a:cs typeface="+mn-cs"/>
+        </a:defRPr>
+      </a:lvl1pPr>
+      <a:lvl2pPr marL="457200" algn="l" defTabSz="914400" rtl="0" eaLnBrk="1" latinLnBrk="0" hangingPunct="1">
+        <a:defRPr sz="1800" kern="1200">
+          <a:solidFill>
+            <a:schemeClr val="tx1"/>
+          </a:solidFill>
+          <a:latin typeface="+mn-lt"/>
+          <a:ea typeface="+mn-ea"/>
+          <a:cs typeface="+mn-cs"/>
+        </a:defRPr>
+      </a:lvl2pPr>
+      <a:lvl3pPr marL="914400" algn="l" defTabSz="914400" rtl="0" eaLnBrk="1" latinLnBrk="0" hangingPunct="1">
+        <a:defRPr sz="1800" kern="1200">
+          <a:solidFill>
+            <a:schemeClr val="tx1"/>
+          </a:solidFill>
+          <a:latin typeface="+mn-lt"/>
+          <a:ea typeface="+mn-ea"/>
+          <a:cs typeface="+mn-cs"/>
+        </a:defRPr>
+      </a:lvl3pPr>
+      <a:lvl4pPr marL="1371600" algn="l" defTabSz="914400" rtl="0" eaLnBrk="1" latinLnBrk="0" hangingPunct="1">
+        <a:defRPr sz="1800" kern="1200">
+          <a:solidFill>
+            <a:schemeClr val="tx1"/>
+          </a:solidFill>
+          <a:latin typeface="+mn-lt"/>
+          <a:ea typeface="+mn-ea"/>
+          <a:cs typeface="+mn-cs"/>
+        </a:defRPr>
+      </a:lvl4pPr>
+      <a:lvl5pPr marL="1828800" algn="l" defTabSz="914400" rtl="0" eaLnBrk="1" latinLnBrk="0" hangingPunct="1">
+        <a:defRPr sz="1800" kern="1200">
+          <a:solidFill>
+            <a:schemeClr val="tx1"/>
+          </a:solidFill>
+          <a:latin typeface="+mn-lt"/>
+          <a:ea typeface="+mn-ea"/>
+          <a:cs typeface="+mn-cs"/>
+        </a:defRPr>
+      </a:lvl5pPr>
+      <a:lvl6pPr marL="2286000" algn="l" defTabSz="914400" rtl="0" eaLnBrk="1" latinLnBrk="0" hangingPunct="1">
+        <a:defRPr sz="1800" kern="1200">
+          <a:solidFill>
+            <a:schemeClr val="tx1"/>
+          </a:solidFill>
+          <a:latin typeface="+mn-lt"/>
+          <a:ea typeface="+mn-ea"/>
+          <a:cs typeface="+mn-cs"/>
+        </a:defRPr>
+      </a:lvl6pPr>
+      <a:lvl7pPr marL="2743200" algn="l" defTabSz="914400" rtl="0" eaLnBrk="1" latinLnBrk="0" hangingPunct="1">
+        <a:defRPr sz="1800" kern="1200">
+          <a:solidFill>
+            <a:schemeClr val="tx1"/>
+          </a:solidFill>
+          <a:latin typeface="+mn-lt"/>
+          <a:ea typeface="+mn-ea"/>
+          <a:cs typeface="+mn-cs"/>
+        </a:defRPr>
+      </a:lvl7pPr>
+      <a:lvl8pPr marL="3200400" algn="l" defTabSz="914400" rtl="0" eaLnBrk="1" latinLnBrk="0" hangingPunct="1">
+        <a:defRPr sz="1800" kern="1200">
+          <a:solidFill>
+            <a:schemeClr val="tx1"/>
+          </a:solidFill>
+          <a:latin typeface="+mn-lt"/>
+          <a:ea typeface="+mn-ea"/>
+          <a:cs typeface="+mn-cs"/>
+        </a:defRPr>
+      </a:lvl8pPr>
+      <a:lvl9pPr marL="3657600" algn="l" defTabSz="914400" rtl="0" eaLnBrk="1" latinLnBrk="0" hangingPunct="1">
+        <a:defRPr sz="1800" kern="1200">
+          <a:solidFill>
+            <a:schemeClr val="tx1"/>
+          </a:solidFill>
+          <a:latin typeface="+mn-lt"/>
+          <a:ea typeface="+mn-ea"/>
+          <a:cs typeface="+mn-cs"/>
+        </a:defRPr>
+      </a:lvl9pPr>
+    </p:otherStyle>
+  </p:txStyles>
 </p:sldMaster>
 </file>
 
 <file path=ppt/slides/slide1.xml><?xml version="1.0" encoding="utf-8"?>
-<p:sld xmlns:p="http://schemas.openxmlformats.org/presentationml/2006/main">
+<p:sld xmlns:a="http://schemas.openxmlformats.org/drawingml/2006/main" xmlns:r="http://schemas.openxmlformats.org/officeDocument/2006/relationships" xmlns:p="http://schemas.openxmlformats.org/presentationml/2006/main">
   <p:cSld>
     <p:bg>
       <p:bgPr>
-        <a:solidFill xmlns:a="http://schemas.openxmlformats.org/drawingml/2006/main">
+        <a:solidFill>
           <a:srgbClr val="0A0E2A"/>
         </a:solidFill>
+        <a:effectLst/>
       </p:bgPr>
     </p:bg>
     <p:spTree>
@@ -1350,7 +1807,14 @@
         <p:cNvGrpSpPr/>
         <p:nvPr/>
       </p:nvGrpSpPr>
-      <p:grpSpPr/>
+      <p:grpSpPr>
+        <a:xfrm>
+          <a:off x="0" y="0"/>
+          <a:ext cx="0" cy="0"/>
+          <a:chOff x="0" y="0"/>
+          <a:chExt cx="0" cy="0"/>
+        </a:xfrm>
+      </p:grpSpPr>
       <p:sp>
         <p:nvSpPr>
           <p:cNvPr id="100000" name="TopBar"/>
@@ -1358,21 +1822,21 @@
           <p:nvPr/>
         </p:nvSpPr>
         <p:spPr>
-          <a:xfrm xmlns:a="http://schemas.openxmlformats.org/drawingml/2006/main">
+          <a:xfrm>
             <a:off x="0" y="0"/>
             <a:ext cx="12193200" cy="216000"/>
           </a:xfrm>
-          <a:prstGeom xmlns:a="http://schemas.openxmlformats.org/drawingml/2006/main" prst="rect">
-            <a:avLst/>
-          </a:prstGeom>
-          <a:solidFill xmlns:a="http://schemas.openxmlformats.org/drawingml/2006/main">
+          <a:prstGeom prst="rect">
+            <a:avLst/>
+          </a:prstGeom>
+          <a:solidFill>
             <a:srgbClr val="F5A623"/>
           </a:solidFill>
         </p:spPr>
         <p:txBody>
-          <a:bodyPr xmlns:a="http://schemas.openxmlformats.org/drawingml/2006/main"/>
-          <a:lstStyle xmlns:a="http://schemas.openxmlformats.org/drawingml/2006/main"/>
-          <a:p xmlns:a="http://schemas.openxmlformats.org/drawingml/2006/main">
+          <a:bodyPr/>
+          <a:lstStyle/>
+          <a:p>
             <a:endParaRPr lang="en-US">
               <a:solidFill>
                 <a:srgbClr val="F5A623"/>
@@ -1388,27 +1852,47 @@
           <p:nvPr/>
         </p:nvSpPr>
         <p:spPr>
-          <a:xfrm xmlns:a="http://schemas.openxmlformats.org/drawingml/2006/main">
-            <a:off x="540000" y="720000"/>
+          <a:xfrm>
+            <a:off x="1840163" y="594000"/>
             <a:ext cx="10800000" cy="1080000"/>
           </a:xfrm>
-          <a:prstGeom xmlns:a="http://schemas.openxmlformats.org/drawingml/2006/main" prst="rect">
-            <a:avLst/>
-          </a:prstGeom>
-        </p:spPr>
-        <p:txBody>
-          <a:bodyPr xmlns:a="http://schemas.openxmlformats.org/drawingml/2006/main"/>
-          <a:lstStyle xmlns:a="http://schemas.openxmlformats.org/drawingml/2006/main"/>
-          <a:p xmlns:a="http://schemas.openxmlformats.org/drawingml/2006/main">
-            <a:r>
-              <a:rPr lang="en-US" sz="3600" b="1">
+          <a:prstGeom prst="rect">
+            <a:avLst/>
+          </a:prstGeom>
+        </p:spPr>
+        <p:txBody>
+          <a:bodyPr/>
+          <a:lstStyle/>
+          <a:p>
+            <a:r>
+              <a:rPr lang="en-US" sz="3600" b="1" dirty="0">
                 <a:solidFill>
                   <a:srgbClr val="FFFFFF"/>
                 </a:solidFill>
                 <a:latin typeface="Calibri"/>
                 <a:ea typeface="Calibri"/>
               </a:rPr>
-              <a:t>🚦 Smart Urban Traffic Forecestion System</a:t>
+              <a:t>🚦 Smart Urban Traffic </a:t>
+            </a:r>
+            <a:r>
+              <a:rPr lang="en-US" sz="3600" b="1" dirty="0" err="1">
+                <a:solidFill>
+                  <a:srgbClr val="FFFFFF"/>
+                </a:solidFill>
+                <a:latin typeface="Calibri"/>
+                <a:ea typeface="Calibri"/>
+              </a:rPr>
+              <a:t>Forecestion</a:t>
+            </a:r>
+            <a:r>
+              <a:rPr lang="en-US" sz="3600" b="1" dirty="0">
+                <a:solidFill>
+                  <a:srgbClr val="FFFFFF"/>
+                </a:solidFill>
+                <a:latin typeface="Calibri"/>
+                <a:ea typeface="Calibri"/>
+              </a:rPr>
+              <a:t> System</a:t>
             </a:r>
           </a:p>
         </p:txBody>
@@ -1420,25 +1904,27 @@
           <p:nvPr/>
         </p:nvSpPr>
         <p:spPr>
-          <a:xfrm xmlns:a="http://schemas.openxmlformats.org/drawingml/2006/main">
-            <a:off x="540000" y="1980000"/>
+          <a:xfrm>
+            <a:off x="696000" y="2015999"/>
             <a:ext cx="10800000" cy="540000"/>
           </a:xfrm>
-          <a:prstGeom xmlns:a="http://schemas.openxmlformats.org/drawingml/2006/main" prst="rect">
-            <a:avLst/>
-          </a:prstGeom>
-        </p:spPr>
-        <p:txBody>
-          <a:bodyPr xmlns:a="http://schemas.openxmlformats.org/drawingml/2006/main"/>
-          <a:lstStyle xmlns:a="http://schemas.openxmlformats.org/drawingml/2006/main"/>
-          <a:p xmlns:a="http://schemas.openxmlformats.org/drawingml/2006/main">
-            <a:r>
-              <a:rPr lang="en-US" sz="2000" b="0">
+          <a:prstGeom prst="rect">
+            <a:avLst/>
+          </a:prstGeom>
+        </p:spPr>
+        <p:txBody>
+          <a:bodyPr/>
+          <a:lstStyle/>
+          <a:p>
+            <a:pPr algn="ctr"/>
+            <a:r>
+              <a:rPr lang="en-US" sz="2000" b="0" dirty="0">
                 <a:solidFill>
                   <a:srgbClr val="F5A623"/>
                 </a:solidFill>
-                <a:latin typeface="Calibri"/>
-                <a:ea typeface="Calibri"/>
+                <a:latin typeface="Times New Roman" panose="02020603050405020304" pitchFamily="18" charset="0"/>
+                <a:ea typeface="Calibri"/>
+                <a:cs typeface="Times New Roman" panose="02020603050405020304" pitchFamily="18" charset="0"/>
               </a:rPr>
               <a:t>Congestion &amp; Resource Demand Forecasting with ML + Deep Learning</a:t>
             </a:r>
@@ -1447,64 +1933,55 @@
       </p:sp>
       <p:sp>
         <p:nvSpPr>
-          <p:cNvPr id="100003" name="SDG"/>
-          <p:cNvSpPr txBox="1"/>
-          <p:nvPr/>
-        </p:nvSpPr>
-        <p:spPr>
-          <a:xfrm xmlns:a="http://schemas.openxmlformats.org/drawingml/2006/main">
-            <a:off x="540000" y="2700000"/>
-            <a:ext cx="10800000" cy="360000"/>
-          </a:xfrm>
-          <a:prstGeom xmlns:a="http://schemas.openxmlformats.org/drawingml/2006/main" prst="rect">
-            <a:avLst/>
-          </a:prstGeom>
-        </p:spPr>
-        <p:txBody>
-          <a:bodyPr xmlns:a="http://schemas.openxmlformats.org/drawingml/2006/main"/>
-          <a:lstStyle xmlns:a="http://schemas.openxmlformats.org/drawingml/2006/main"/>
-          <a:p xmlns:a="http://schemas.openxmlformats.org/drawingml/2006/main">
-            <a:r>
-              <a:rPr lang="en-US" sz="1600" b="0">
-                <a:solidFill>
-                  <a:srgbClr val="A0B4D0"/>
-                </a:solidFill>
-                <a:latin typeface="Calibri"/>
-                <a:ea typeface="Calibri"/>
-              </a:rPr>
-              <a:t>SDG 11 — Sustainable Cities &amp; Communities</a:t>
-            </a:r>
-          </a:p>
-        </p:txBody>
-      </p:sp>
-      <p:sp>
-        <p:nvSpPr>
           <p:cNvPr id="100004" name="Dev"/>
           <p:cNvSpPr txBox="1"/>
           <p:nvPr/>
         </p:nvSpPr>
         <p:spPr>
-          <a:xfrm xmlns:a="http://schemas.openxmlformats.org/drawingml/2006/main">
-            <a:off x="540000" y="3240000"/>
-            <a:ext cx="10800000" cy="288000"/>
-          </a:xfrm>
-          <a:prstGeom xmlns:a="http://schemas.openxmlformats.org/drawingml/2006/main" prst="rect">
-            <a:avLst/>
-          </a:prstGeom>
-        </p:spPr>
-        <p:txBody>
-          <a:bodyPr xmlns:a="http://schemas.openxmlformats.org/drawingml/2006/main"/>
-          <a:lstStyle xmlns:a="http://schemas.openxmlformats.org/drawingml/2006/main"/>
-          <a:p xmlns:a="http://schemas.openxmlformats.org/drawingml/2006/main">
-            <a:r>
-              <a:rPr lang="en-US" sz="1400" b="0">
+          <a:xfrm>
+            <a:off x="797175" y="4356001"/>
+            <a:ext cx="11532938" cy="1080001"/>
+          </a:xfrm>
+          <a:prstGeom prst="rect">
+            <a:avLst/>
+          </a:prstGeom>
+        </p:spPr>
+        <p:txBody>
+          <a:bodyPr/>
+          <a:lstStyle/>
+          <a:p>
+            <a:r>
+              <a:rPr lang="en-US" sz="2400" b="0" dirty="0">
                 <a:solidFill>
                   <a:srgbClr val="7A9CBF"/>
                 </a:solidFill>
-                <a:latin typeface="Calibri"/>
-                <a:ea typeface="Calibri"/>
-              </a:rPr>
-              <a:t>Developer: Mohini (@mohinibuilds)  |  Domain: Applied ML &amp; Predictive Analytics</a:t>
+                <a:latin typeface="Times New Roman" panose="02020603050405020304" pitchFamily="18" charset="0"/>
+                <a:ea typeface="Calibri"/>
+                <a:cs typeface="Times New Roman" panose="02020603050405020304" pitchFamily="18" charset="0"/>
+              </a:rPr>
+              <a:t>Developer: Mohini (@</a:t>
+            </a:r>
+            <a:r>
+              <a:rPr lang="en-US" sz="2400" b="0" dirty="0" err="1">
+                <a:solidFill>
+                  <a:srgbClr val="7A9CBF"/>
+                </a:solidFill>
+                <a:latin typeface="Times New Roman" panose="02020603050405020304" pitchFamily="18" charset="0"/>
+                <a:ea typeface="Calibri"/>
+                <a:cs typeface="Times New Roman" panose="02020603050405020304" pitchFamily="18" charset="0"/>
+              </a:rPr>
+              <a:t>mohinibuilds</a:t>
+            </a:r>
+            <a:r>
+              <a:rPr lang="en-US" sz="2400" b="0" dirty="0">
+                <a:solidFill>
+                  <a:srgbClr val="7A9CBF"/>
+                </a:solidFill>
+                <a:latin typeface="Times New Roman" panose="02020603050405020304" pitchFamily="18" charset="0"/>
+                <a:ea typeface="Calibri"/>
+                <a:cs typeface="Times New Roman" panose="02020603050405020304" pitchFamily="18" charset="0"/>
+              </a:rPr>
+              <a:t>)  |  Domain: Applied ML &amp; Predictive Analytics</a:t>
             </a:r>
           </a:p>
         </p:txBody>
@@ -1516,21 +1993,21 @@
           <p:nvPr/>
         </p:nvSpPr>
         <p:spPr>
-          <a:xfrm xmlns:a="http://schemas.openxmlformats.org/drawingml/2006/main">
+          <a:xfrm>
             <a:off x="0" y="6660000"/>
             <a:ext cx="12193200" cy="216000"/>
           </a:xfrm>
-          <a:prstGeom xmlns:a="http://schemas.openxmlformats.org/drawingml/2006/main" prst="rect">
-            <a:avLst/>
-          </a:prstGeom>
-          <a:solidFill xmlns:a="http://schemas.openxmlformats.org/drawingml/2006/main">
+          <a:prstGeom prst="rect">
+            <a:avLst/>
+          </a:prstGeom>
+          <a:solidFill>
             <a:srgbClr val="1A2540"/>
           </a:solidFill>
         </p:spPr>
         <p:txBody>
-          <a:bodyPr xmlns:a="http://schemas.openxmlformats.org/drawingml/2006/main"/>
-          <a:lstStyle xmlns:a="http://schemas.openxmlformats.org/drawingml/2006/main"/>
-          <a:p xmlns:a="http://schemas.openxmlformats.org/drawingml/2006/main">
+          <a:bodyPr/>
+          <a:lstStyle/>
+          <a:p>
             <a:endParaRPr lang="en-US">
               <a:solidFill>
                 <a:srgbClr val="1A2540"/>
@@ -1541,17 +2018,21 @@
       </p:sp>
     </p:spTree>
   </p:cSld>
+  <p:clrMapOvr>
+    <a:masterClrMapping/>
+  </p:clrMapOvr>
 </p:sld>
 </file>
 
 <file path=ppt/slides/slide10.xml><?xml version="1.0" encoding="utf-8"?>
-<p:sld xmlns:p="http://schemas.openxmlformats.org/presentationml/2006/main">
+<p:sld xmlns:a="http://schemas.openxmlformats.org/drawingml/2006/main" xmlns:r="http://schemas.openxmlformats.org/officeDocument/2006/relationships" xmlns:p="http://schemas.openxmlformats.org/presentationml/2006/main">
   <p:cSld>
     <p:bg>
       <p:bgPr>
-        <a:solidFill xmlns:a="http://schemas.openxmlformats.org/drawingml/2006/main">
+        <a:solidFill>
           <a:srgbClr val="FFFFFF"/>
         </a:solidFill>
+        <a:effectLst/>
       </p:bgPr>
     </p:bg>
     <p:spTree>
@@ -1560,7 +2041,14 @@
         <p:cNvGrpSpPr/>
         <p:nvPr/>
       </p:nvGrpSpPr>
-      <p:grpSpPr/>
+      <p:grpSpPr>
+        <a:xfrm>
+          <a:off x="0" y="0"/>
+          <a:ext cx="0" cy="0"/>
+          <a:chOff x="0" y="0"/>
+          <a:chExt cx="0" cy="0"/>
+        </a:xfrm>
+      </p:grpSpPr>
       <p:sp>
         <p:nvSpPr>
           <p:cNvPr id="100095" name="TopBar"/>
@@ -1568,21 +2056,21 @@
           <p:nvPr/>
         </p:nvSpPr>
         <p:spPr>
-          <a:xfrm xmlns:a="http://schemas.openxmlformats.org/drawingml/2006/main">
+          <a:xfrm>
             <a:off x="0" y="0"/>
             <a:ext cx="12193200" cy="180000"/>
           </a:xfrm>
-          <a:prstGeom xmlns:a="http://schemas.openxmlformats.org/drawingml/2006/main" prst="rect">
-            <a:avLst/>
-          </a:prstGeom>
-          <a:solidFill xmlns:a="http://schemas.openxmlformats.org/drawingml/2006/main">
+          <a:prstGeom prst="rect">
+            <a:avLst/>
+          </a:prstGeom>
+          <a:solidFill>
             <a:srgbClr val="F5A623"/>
           </a:solidFill>
         </p:spPr>
         <p:txBody>
-          <a:bodyPr xmlns:a="http://schemas.openxmlformats.org/drawingml/2006/main"/>
-          <a:lstStyle xmlns:a="http://schemas.openxmlformats.org/drawingml/2006/main"/>
-          <a:p xmlns:a="http://schemas.openxmlformats.org/drawingml/2006/main">
+          <a:bodyPr/>
+          <a:lstStyle/>
+          <a:p>
             <a:endParaRPr lang="en-US">
               <a:solidFill>
                 <a:srgbClr val="F5A623"/>
@@ -1598,18 +2086,18 @@
           <p:nvPr/>
         </p:nvSpPr>
         <p:spPr>
-          <a:xfrm xmlns:a="http://schemas.openxmlformats.org/drawingml/2006/main">
+          <a:xfrm>
             <a:off x="540000" y="360000"/>
             <a:ext cx="10080000" cy="540000"/>
           </a:xfrm>
-          <a:prstGeom xmlns:a="http://schemas.openxmlformats.org/drawingml/2006/main" prst="rect">
-            <a:avLst/>
-          </a:prstGeom>
-        </p:spPr>
-        <p:txBody>
-          <a:bodyPr xmlns:a="http://schemas.openxmlformats.org/drawingml/2006/main"/>
-          <a:lstStyle xmlns:a="http://schemas.openxmlformats.org/drawingml/2006/main"/>
-          <a:p xmlns:a="http://schemas.openxmlformats.org/drawingml/2006/main">
+          <a:prstGeom prst="rect">
+            <a:avLst/>
+          </a:prstGeom>
+        </p:spPr>
+        <p:txBody>
+          <a:bodyPr/>
+          <a:lstStyle/>
+          <a:p>
             <a:r>
               <a:rPr lang="en-US" sz="3200" b="1">
                 <a:solidFill>
@@ -1630,21 +2118,21 @@
           <p:nvPr/>
         </p:nvSpPr>
         <p:spPr>
-          <a:xfrm xmlns:a="http://schemas.openxmlformats.org/drawingml/2006/main">
+          <a:xfrm>
             <a:off x="540000" y="1008000"/>
             <a:ext cx="10440000" cy="396000"/>
           </a:xfrm>
-          <a:prstGeom xmlns:a="http://schemas.openxmlformats.org/drawingml/2006/main" prst="rect">
-            <a:avLst/>
-          </a:prstGeom>
-          <a:solidFill xmlns:a="http://schemas.openxmlformats.org/drawingml/2006/main">
+          <a:prstGeom prst="rect">
+            <a:avLst/>
+          </a:prstGeom>
+          <a:solidFill>
             <a:srgbClr val="0A6640"/>
           </a:solidFill>
         </p:spPr>
         <p:txBody>
-          <a:bodyPr xmlns:a="http://schemas.openxmlformats.org/drawingml/2006/main"/>
-          <a:lstStyle xmlns:a="http://schemas.openxmlformats.org/drawingml/2006/main"/>
-          <a:p xmlns:a="http://schemas.openxmlformats.org/drawingml/2006/main">
+          <a:bodyPr/>
+          <a:lstStyle/>
+          <a:p>
             <a:r>
               <a:rPr lang="en-US" sz="2000" b="1">
                 <a:solidFill>
@@ -1665,18 +2153,18 @@
           <p:nvPr/>
         </p:nvSpPr>
         <p:spPr>
-          <a:xfrm xmlns:a="http://schemas.openxmlformats.org/drawingml/2006/main">
+          <a:xfrm>
             <a:off x="540000" y="1584000"/>
             <a:ext cx="10440000" cy="288000"/>
           </a:xfrm>
-          <a:prstGeom xmlns:a="http://schemas.openxmlformats.org/drawingml/2006/main" prst="rect">
-            <a:avLst/>
-          </a:prstGeom>
-        </p:spPr>
-        <p:txBody>
-          <a:bodyPr xmlns:a="http://schemas.openxmlformats.org/drawingml/2006/main"/>
-          <a:lstStyle xmlns:a="http://schemas.openxmlformats.org/drawingml/2006/main"/>
-          <a:p xmlns:a="http://schemas.openxmlformats.org/drawingml/2006/main">
+          <a:prstGeom prst="rect">
+            <a:avLst/>
+          </a:prstGeom>
+        </p:spPr>
+        <p:txBody>
+          <a:bodyPr/>
+          <a:lstStyle/>
+          <a:p>
             <a:r>
               <a:rPr lang="en-US" sz="1700" b="1">
                 <a:solidFill>
@@ -1697,18 +2185,18 @@
           <p:nvPr/>
         </p:nvSpPr>
         <p:spPr>
-          <a:xfrm xmlns:a="http://schemas.openxmlformats.org/drawingml/2006/main">
+          <a:xfrm>
             <a:off x="720000" y="1908000"/>
             <a:ext cx="10080000" cy="540000"/>
           </a:xfrm>
-          <a:prstGeom xmlns:a="http://schemas.openxmlformats.org/drawingml/2006/main" prst="rect">
-            <a:avLst/>
-          </a:prstGeom>
-        </p:spPr>
-        <p:txBody>
-          <a:bodyPr xmlns:a="http://schemas.openxmlformats.org/drawingml/2006/main"/>
-          <a:lstStyle xmlns:a="http://schemas.openxmlformats.org/drawingml/2006/main"/>
-          <a:p xmlns:a="http://schemas.openxmlformats.org/drawingml/2006/main">
+          <a:prstGeom prst="rect">
+            <a:avLst/>
+          </a:prstGeom>
+        </p:spPr>
+        <p:txBody>
+          <a:bodyPr/>
+          <a:lstStyle/>
+          <a:p>
             <a:r>
               <a:rPr lang="en-US" sz="1500">
                 <a:solidFill>
@@ -1729,18 +2217,18 @@
           <p:nvPr/>
         </p:nvSpPr>
         <p:spPr>
-          <a:xfrm xmlns:a="http://schemas.openxmlformats.org/drawingml/2006/main">
+          <a:xfrm>
             <a:off x="540000" y="2628000"/>
             <a:ext cx="10440000" cy="288000"/>
           </a:xfrm>
-          <a:prstGeom xmlns:a="http://schemas.openxmlformats.org/drawingml/2006/main" prst="rect">
-            <a:avLst/>
-          </a:prstGeom>
-        </p:spPr>
-        <p:txBody>
-          <a:bodyPr xmlns:a="http://schemas.openxmlformats.org/drawingml/2006/main"/>
-          <a:lstStyle xmlns:a="http://schemas.openxmlformats.org/drawingml/2006/main"/>
-          <a:p xmlns:a="http://schemas.openxmlformats.org/drawingml/2006/main">
+          <a:prstGeom prst="rect">
+            <a:avLst/>
+          </a:prstGeom>
+        </p:spPr>
+        <p:txBody>
+          <a:bodyPr/>
+          <a:lstStyle/>
+          <a:p>
             <a:r>
               <a:rPr lang="en-US" sz="1700" b="1">
                 <a:solidFill>
@@ -1761,18 +2249,18 @@
           <p:nvPr/>
         </p:nvSpPr>
         <p:spPr>
-          <a:xfrm xmlns:a="http://schemas.openxmlformats.org/drawingml/2006/main">
+          <a:xfrm>
             <a:off x="720000" y="2952000"/>
             <a:ext cx="10080000" cy="540000"/>
           </a:xfrm>
-          <a:prstGeom xmlns:a="http://schemas.openxmlformats.org/drawingml/2006/main" prst="rect">
-            <a:avLst/>
-          </a:prstGeom>
-        </p:spPr>
-        <p:txBody>
-          <a:bodyPr xmlns:a="http://schemas.openxmlformats.org/drawingml/2006/main"/>
-          <a:lstStyle xmlns:a="http://schemas.openxmlformats.org/drawingml/2006/main"/>
-          <a:p xmlns:a="http://schemas.openxmlformats.org/drawingml/2006/main">
+          <a:prstGeom prst="rect">
+            <a:avLst/>
+          </a:prstGeom>
+        </p:spPr>
+        <p:txBody>
+          <a:bodyPr/>
+          <a:lstStyle/>
+          <a:p>
             <a:r>
               <a:rPr lang="en-US" sz="1500">
                 <a:solidFill>
@@ -1793,18 +2281,18 @@
           <p:nvPr/>
         </p:nvSpPr>
         <p:spPr>
-          <a:xfrm xmlns:a="http://schemas.openxmlformats.org/drawingml/2006/main">
+          <a:xfrm>
             <a:off x="540000" y="3672000"/>
             <a:ext cx="10440000" cy="288000"/>
           </a:xfrm>
-          <a:prstGeom xmlns:a="http://schemas.openxmlformats.org/drawingml/2006/main" prst="rect">
-            <a:avLst/>
-          </a:prstGeom>
-        </p:spPr>
-        <p:txBody>
-          <a:bodyPr xmlns:a="http://schemas.openxmlformats.org/drawingml/2006/main"/>
-          <a:lstStyle xmlns:a="http://schemas.openxmlformats.org/drawingml/2006/main"/>
-          <a:p xmlns:a="http://schemas.openxmlformats.org/drawingml/2006/main">
+          <a:prstGeom prst="rect">
+            <a:avLst/>
+          </a:prstGeom>
+        </p:spPr>
+        <p:txBody>
+          <a:bodyPr/>
+          <a:lstStyle/>
+          <a:p>
             <a:r>
               <a:rPr lang="en-US" sz="1700" b="1">
                 <a:solidFill>
@@ -1825,18 +2313,18 @@
           <p:nvPr/>
         </p:nvSpPr>
         <p:spPr>
-          <a:xfrm xmlns:a="http://schemas.openxmlformats.org/drawingml/2006/main">
+          <a:xfrm>
             <a:off x="720000" y="3996000"/>
             <a:ext cx="10080000" cy="540000"/>
           </a:xfrm>
-          <a:prstGeom xmlns:a="http://schemas.openxmlformats.org/drawingml/2006/main" prst="rect">
-            <a:avLst/>
-          </a:prstGeom>
-        </p:spPr>
-        <p:txBody>
-          <a:bodyPr xmlns:a="http://schemas.openxmlformats.org/drawingml/2006/main"/>
-          <a:lstStyle xmlns:a="http://schemas.openxmlformats.org/drawingml/2006/main"/>
-          <a:p xmlns:a="http://schemas.openxmlformats.org/drawingml/2006/main">
+          <a:prstGeom prst="rect">
+            <a:avLst/>
+          </a:prstGeom>
+        </p:spPr>
+        <p:txBody>
+          <a:bodyPr/>
+          <a:lstStyle/>
+          <a:p>
             <a:r>
               <a:rPr lang="en-US" sz="1500">
                 <a:solidFill>
@@ -1857,21 +2345,21 @@
           <p:nvPr/>
         </p:nvSpPr>
         <p:spPr>
-          <a:xfrm xmlns:a="http://schemas.openxmlformats.org/drawingml/2006/main">
+          <a:xfrm>
             <a:off x="0" y="6660000"/>
             <a:ext cx="12193200" cy="216000"/>
           </a:xfrm>
-          <a:prstGeom xmlns:a="http://schemas.openxmlformats.org/drawingml/2006/main" prst="rect">
-            <a:avLst/>
-          </a:prstGeom>
-          <a:solidFill xmlns:a="http://schemas.openxmlformats.org/drawingml/2006/main">
+          <a:prstGeom prst="rect">
+            <a:avLst/>
+          </a:prstGeom>
+          <a:solidFill>
             <a:srgbClr val="0A0E2A"/>
           </a:solidFill>
         </p:spPr>
         <p:txBody>
-          <a:bodyPr xmlns:a="http://schemas.openxmlformats.org/drawingml/2006/main"/>
-          <a:lstStyle xmlns:a="http://schemas.openxmlformats.org/drawingml/2006/main"/>
-          <a:p xmlns:a="http://schemas.openxmlformats.org/drawingml/2006/main">
+          <a:bodyPr/>
+          <a:lstStyle/>
+          <a:p>
             <a:r>
               <a:rPr lang="en-US" sz="1100">
                 <a:solidFill>
@@ -1887,17 +2375,21 @@
       </p:sp>
     </p:spTree>
   </p:cSld>
+  <p:clrMapOvr>
+    <a:masterClrMapping/>
+  </p:clrMapOvr>
 </p:sld>
 </file>
 
 <file path=ppt/slides/slide11.xml><?xml version="1.0" encoding="utf-8"?>
-<p:sld xmlns:p="http://schemas.openxmlformats.org/presentationml/2006/main">
+<p:sld xmlns:a="http://schemas.openxmlformats.org/drawingml/2006/main" xmlns:r="http://schemas.openxmlformats.org/officeDocument/2006/relationships" xmlns:p="http://schemas.openxmlformats.org/presentationml/2006/main">
   <p:cSld>
     <p:bg>
       <p:bgPr>
-        <a:solidFill xmlns:a="http://schemas.openxmlformats.org/drawingml/2006/main">
+        <a:solidFill>
           <a:srgbClr val="0A0E2A"/>
         </a:solidFill>
+        <a:effectLst/>
       </p:bgPr>
     </p:bg>
     <p:spTree>
@@ -1906,7 +2398,14 @@
         <p:cNvGrpSpPr/>
         <p:nvPr/>
       </p:nvGrpSpPr>
-      <p:grpSpPr/>
+      <p:grpSpPr>
+        <a:xfrm>
+          <a:off x="0" y="0"/>
+          <a:ext cx="0" cy="0"/>
+          <a:chOff x="0" y="0"/>
+          <a:chExt cx="0" cy="0"/>
+        </a:xfrm>
+      </p:grpSpPr>
       <p:sp>
         <p:nvSpPr>
           <p:cNvPr id="100105" name="TopBar"/>
@@ -1914,21 +2413,21 @@
           <p:nvPr/>
         </p:nvSpPr>
         <p:spPr>
-          <a:xfrm xmlns:a="http://schemas.openxmlformats.org/drawingml/2006/main">
+          <a:xfrm>
             <a:off x="0" y="0"/>
             <a:ext cx="12193200" cy="180000"/>
           </a:xfrm>
-          <a:prstGeom xmlns:a="http://schemas.openxmlformats.org/drawingml/2006/main" prst="rect">
-            <a:avLst/>
-          </a:prstGeom>
-          <a:solidFill xmlns:a="http://schemas.openxmlformats.org/drawingml/2006/main">
+          <a:prstGeom prst="rect">
+            <a:avLst/>
+          </a:prstGeom>
+          <a:solidFill>
             <a:srgbClr val="F5A623"/>
           </a:solidFill>
         </p:spPr>
         <p:txBody>
-          <a:bodyPr xmlns:a="http://schemas.openxmlformats.org/drawingml/2006/main"/>
-          <a:lstStyle xmlns:a="http://schemas.openxmlformats.org/drawingml/2006/main"/>
-          <a:p xmlns:a="http://schemas.openxmlformats.org/drawingml/2006/main">
+          <a:bodyPr/>
+          <a:lstStyle/>
+          <a:p>
             <a:endParaRPr lang="en-US">
               <a:solidFill>
                 <a:srgbClr val="F5A623"/>
@@ -1944,18 +2443,18 @@
           <p:nvPr/>
         </p:nvSpPr>
         <p:spPr>
-          <a:xfrm xmlns:a="http://schemas.openxmlformats.org/drawingml/2006/main">
+          <a:xfrm>
             <a:off x="540000" y="900000"/>
             <a:ext cx="10800000" cy="1080000"/>
           </a:xfrm>
-          <a:prstGeom xmlns:a="http://schemas.openxmlformats.org/drawingml/2006/main" prst="rect">
-            <a:avLst/>
-          </a:prstGeom>
-        </p:spPr>
-        <p:txBody>
-          <a:bodyPr xmlns:a="http://schemas.openxmlformats.org/drawingml/2006/main"/>
-          <a:lstStyle xmlns:a="http://schemas.openxmlformats.org/drawingml/2006/main"/>
-          <a:p xmlns:a="http://schemas.openxmlformats.org/drawingml/2006/main">
+          <a:prstGeom prst="rect">
+            <a:avLst/>
+          </a:prstGeom>
+        </p:spPr>
+        <p:txBody>
+          <a:bodyPr/>
+          <a:lstStyle/>
+          <a:p>
             <a:r>
               <a:rPr lang="en-US" sz="4800" b="1">
                 <a:solidFill>
@@ -1976,18 +2475,18 @@
           <p:nvPr/>
         </p:nvSpPr>
         <p:spPr>
-          <a:xfrm xmlns:a="http://schemas.openxmlformats.org/drawingml/2006/main">
+          <a:xfrm>
             <a:off x="540000" y="2088000"/>
             <a:ext cx="10800000" cy="540000"/>
           </a:xfrm>
-          <a:prstGeom xmlns:a="http://schemas.openxmlformats.org/drawingml/2006/main" prst="rect">
-            <a:avLst/>
-          </a:prstGeom>
-        </p:spPr>
-        <p:txBody>
-          <a:bodyPr xmlns:a="http://schemas.openxmlformats.org/drawingml/2006/main"/>
-          <a:lstStyle xmlns:a="http://schemas.openxmlformats.org/drawingml/2006/main"/>
-          <a:p xmlns:a="http://schemas.openxmlformats.org/drawingml/2006/main">
+          <a:prstGeom prst="rect">
+            <a:avLst/>
+          </a:prstGeom>
+        </p:spPr>
+        <p:txBody>
+          <a:bodyPr/>
+          <a:lstStyle/>
+          <a:p>
             <a:r>
               <a:rPr lang="en-US" sz="2000" b="0">
                 <a:solidFill>
@@ -2008,18 +2507,18 @@
           <p:nvPr/>
         </p:nvSpPr>
         <p:spPr>
-          <a:xfrm xmlns:a="http://schemas.openxmlformats.org/drawingml/2006/main">
+          <a:xfrm>
             <a:off x="540000" y="2880000"/>
             <a:ext cx="10800000" cy="360000"/>
           </a:xfrm>
-          <a:prstGeom xmlns:a="http://schemas.openxmlformats.org/drawingml/2006/main" prst="rect">
-            <a:avLst/>
-          </a:prstGeom>
-        </p:spPr>
-        <p:txBody>
-          <a:bodyPr xmlns:a="http://schemas.openxmlformats.org/drawingml/2006/main"/>
-          <a:lstStyle xmlns:a="http://schemas.openxmlformats.org/drawingml/2006/main"/>
-          <a:p xmlns:a="http://schemas.openxmlformats.org/drawingml/2006/main">
+          <a:prstGeom prst="rect">
+            <a:avLst/>
+          </a:prstGeom>
+        </p:spPr>
+        <p:txBody>
+          <a:bodyPr/>
+          <a:lstStyle/>
+          <a:p>
             <a:r>
               <a:rPr lang="en-US" sz="1700" b="0">
                 <a:solidFill>
@@ -2040,18 +2539,18 @@
           <p:nvPr/>
         </p:nvSpPr>
         <p:spPr>
-          <a:xfrm xmlns:a="http://schemas.openxmlformats.org/drawingml/2006/main">
+          <a:xfrm>
             <a:off x="540000" y="3420000"/>
             <a:ext cx="10800000" cy="360000"/>
           </a:xfrm>
-          <a:prstGeom xmlns:a="http://schemas.openxmlformats.org/drawingml/2006/main" prst="rect">
-            <a:avLst/>
-          </a:prstGeom>
-        </p:spPr>
-        <p:txBody>
-          <a:bodyPr xmlns:a="http://schemas.openxmlformats.org/drawingml/2006/main"/>
-          <a:lstStyle xmlns:a="http://schemas.openxmlformats.org/drawingml/2006/main"/>
-          <a:p xmlns:a="http://schemas.openxmlformats.org/drawingml/2006/main">
+          <a:prstGeom prst="rect">
+            <a:avLst/>
+          </a:prstGeom>
+        </p:spPr>
+        <p:txBody>
+          <a:bodyPr/>
+          <a:lstStyle/>
+          <a:p>
             <a:r>
               <a:rPr lang="en-US" sz="1700" b="0">
                 <a:solidFill>
@@ -2072,28 +2571,25 @@
           <p:nvPr/>
         </p:nvSpPr>
         <p:spPr>
-          <a:xfrm xmlns:a="http://schemas.openxmlformats.org/drawingml/2006/main">
+          <a:xfrm>
             <a:off x="540000" y="3960000"/>
             <a:ext cx="10800000" cy="360000"/>
           </a:xfrm>
-          <a:prstGeom xmlns:a="http://schemas.openxmlformats.org/drawingml/2006/main" prst="rect">
-            <a:avLst/>
-          </a:prstGeom>
-        </p:spPr>
-        <p:txBody>
-          <a:bodyPr xmlns:a="http://schemas.openxmlformats.org/drawingml/2006/main"/>
-          <a:lstStyle xmlns:a="http://schemas.openxmlformats.org/drawingml/2006/main"/>
-          <a:p xmlns:a="http://schemas.openxmlformats.org/drawingml/2006/main">
-            <a:r>
-              <a:rPr lang="en-US" sz="1700" b="0">
-                <a:solidFill>
-                  <a:srgbClr val="A0C4E0"/>
-                </a:solidFill>
-                <a:latin typeface="Calibri"/>
-                <a:ea typeface="Calibri"/>
-              </a:rPr>
-              <a:t>🌍 SDG 11 — Sustainable Cities &amp; Communities</a:t>
-            </a:r>
+          <a:prstGeom prst="rect">
+            <a:avLst/>
+          </a:prstGeom>
+        </p:spPr>
+        <p:txBody>
+          <a:bodyPr/>
+          <a:lstStyle/>
+          <a:p>
+            <a:endParaRPr lang="en-US" sz="1700" b="0" dirty="0">
+              <a:solidFill>
+                <a:srgbClr val="A0C4E0"/>
+              </a:solidFill>
+              <a:latin typeface="Calibri"/>
+              <a:ea typeface="Calibri"/>
+            </a:endParaRPr>
           </a:p>
         </p:txBody>
       </p:sp>
@@ -2104,27 +2600,47 @@
           <p:nvPr/>
         </p:nvSpPr>
         <p:spPr>
-          <a:xfrm xmlns:a="http://schemas.openxmlformats.org/drawingml/2006/main">
+          <a:xfrm>
             <a:off x="540000" y="4500000"/>
             <a:ext cx="10800000" cy="360000"/>
           </a:xfrm>
-          <a:prstGeom xmlns:a="http://schemas.openxmlformats.org/drawingml/2006/main" prst="rect">
-            <a:avLst/>
-          </a:prstGeom>
-        </p:spPr>
-        <p:txBody>
-          <a:bodyPr xmlns:a="http://schemas.openxmlformats.org/drawingml/2006/main"/>
-          <a:lstStyle xmlns:a="http://schemas.openxmlformats.org/drawingml/2006/main"/>
-          <a:p xmlns:a="http://schemas.openxmlformats.org/drawingml/2006/main">
-            <a:r>
-              <a:rPr lang="en-US" sz="1600" b="1">
+          <a:prstGeom prst="rect">
+            <a:avLst/>
+          </a:prstGeom>
+        </p:spPr>
+        <p:txBody>
+          <a:bodyPr/>
+          <a:lstStyle/>
+          <a:p>
+            <a:r>
+              <a:rPr lang="en-US" sz="1600" b="1" dirty="0">
                 <a:solidFill>
                   <a:srgbClr val="F5A623"/>
                 </a:solidFill>
                 <a:latin typeface="Calibri"/>
                 <a:ea typeface="Calibri"/>
               </a:rPr>
-              <a:t>📊 XGBoost R²= 0.9670  |  Random Forest R²= 0.9647  |  LSTM Stacked (128→64)</a:t>
+              <a:t>📊 </a:t>
+            </a:r>
+            <a:r>
+              <a:rPr lang="en-US" sz="1600" b="1" dirty="0" err="1">
+                <a:solidFill>
+                  <a:srgbClr val="F5A623"/>
+                </a:solidFill>
+                <a:latin typeface="Calibri"/>
+                <a:ea typeface="Calibri"/>
+              </a:rPr>
+              <a:t>XGBoost</a:t>
+            </a:r>
+            <a:r>
+              <a:rPr lang="en-US" sz="1600" b="1" dirty="0">
+                <a:solidFill>
+                  <a:srgbClr val="F5A623"/>
+                </a:solidFill>
+                <a:latin typeface="Calibri"/>
+                <a:ea typeface="Calibri"/>
+              </a:rPr>
+              <a:t> R²= 0.9670  |  Random Forest R²= 0.9647  |  LSTM Stacked (128→64)</a:t>
             </a:r>
           </a:p>
         </p:txBody>
@@ -2136,21 +2652,21 @@
           <p:nvPr/>
         </p:nvSpPr>
         <p:spPr>
-          <a:xfrm xmlns:a="http://schemas.openxmlformats.org/drawingml/2006/main">
+          <a:xfrm>
             <a:off x="0" y="6660000"/>
             <a:ext cx="12193200" cy="216000"/>
           </a:xfrm>
-          <a:prstGeom xmlns:a="http://schemas.openxmlformats.org/drawingml/2006/main" prst="rect">
-            <a:avLst/>
-          </a:prstGeom>
-          <a:solidFill xmlns:a="http://schemas.openxmlformats.org/drawingml/2006/main">
+          <a:prstGeom prst="rect">
+            <a:avLst/>
+          </a:prstGeom>
+          <a:solidFill>
             <a:srgbClr val="1A2540"/>
           </a:solidFill>
         </p:spPr>
         <p:txBody>
-          <a:bodyPr xmlns:a="http://schemas.openxmlformats.org/drawingml/2006/main"/>
-          <a:lstStyle xmlns:a="http://schemas.openxmlformats.org/drawingml/2006/main"/>
-          <a:p xmlns:a="http://schemas.openxmlformats.org/drawingml/2006/main">
+          <a:bodyPr/>
+          <a:lstStyle/>
+          <a:p>
             <a:endParaRPr lang="en-US">
               <a:solidFill>
                 <a:srgbClr val="1A2540"/>
@@ -2161,17 +2677,21 @@
       </p:sp>
     </p:spTree>
   </p:cSld>
+  <p:clrMapOvr>
+    <a:masterClrMapping/>
+  </p:clrMapOvr>
 </p:sld>
 </file>
 
 <file path=ppt/slides/slide2.xml><?xml version="1.0" encoding="utf-8"?>
-<p:sld xmlns:p="http://schemas.openxmlformats.org/presentationml/2006/main">
+<p:sld xmlns:a="http://schemas.openxmlformats.org/drawingml/2006/main" xmlns:r="http://schemas.openxmlformats.org/officeDocument/2006/relationships" xmlns:p="http://schemas.openxmlformats.org/presentationml/2006/main">
   <p:cSld>
     <p:bg>
       <p:bgPr>
-        <a:solidFill xmlns:a="http://schemas.openxmlformats.org/drawingml/2006/main">
+        <a:solidFill>
           <a:srgbClr val="FFFFFF"/>
         </a:solidFill>
+        <a:effectLst/>
       </p:bgPr>
     </p:bg>
     <p:spTree>
@@ -2180,7 +2700,14 @@
         <p:cNvGrpSpPr/>
         <p:nvPr/>
       </p:nvGrpSpPr>
-      <p:grpSpPr/>
+      <p:grpSpPr>
+        <a:xfrm>
+          <a:off x="0" y="0"/>
+          <a:ext cx="0" cy="0"/>
+          <a:chOff x="0" y="0"/>
+          <a:chExt cx="0" cy="0"/>
+        </a:xfrm>
+      </p:grpSpPr>
       <p:sp>
         <p:nvSpPr>
           <p:cNvPr id="100006" name="TopBar"/>
@@ -2188,21 +2715,21 @@
           <p:nvPr/>
         </p:nvSpPr>
         <p:spPr>
-          <a:xfrm xmlns:a="http://schemas.openxmlformats.org/drawingml/2006/main">
+          <a:xfrm>
             <a:off x="0" y="0"/>
             <a:ext cx="12193200" cy="180000"/>
           </a:xfrm>
-          <a:prstGeom xmlns:a="http://schemas.openxmlformats.org/drawingml/2006/main" prst="rect">
-            <a:avLst/>
-          </a:prstGeom>
-          <a:solidFill xmlns:a="http://schemas.openxmlformats.org/drawingml/2006/main">
+          <a:prstGeom prst="rect">
+            <a:avLst/>
+          </a:prstGeom>
+          <a:solidFill>
             <a:srgbClr val="F5A623"/>
           </a:solidFill>
         </p:spPr>
         <p:txBody>
-          <a:bodyPr xmlns:a="http://schemas.openxmlformats.org/drawingml/2006/main"/>
-          <a:lstStyle xmlns:a="http://schemas.openxmlformats.org/drawingml/2006/main"/>
-          <a:p xmlns:a="http://schemas.openxmlformats.org/drawingml/2006/main">
+          <a:bodyPr/>
+          <a:lstStyle/>
+          <a:p>
             <a:endParaRPr lang="en-US">
               <a:solidFill>
                 <a:srgbClr val="F5A623"/>
@@ -2218,18 +2745,18 @@
           <p:nvPr/>
         </p:nvSpPr>
         <p:spPr>
-          <a:xfrm xmlns:a="http://schemas.openxmlformats.org/drawingml/2006/main">
+          <a:xfrm>
             <a:off x="10800000" y="288000"/>
             <a:ext cx="1080000" cy="288000"/>
           </a:xfrm>
-          <a:prstGeom xmlns:a="http://schemas.openxmlformats.org/drawingml/2006/main" prst="rect">
-            <a:avLst/>
-          </a:prstGeom>
-        </p:spPr>
-        <p:txBody>
-          <a:bodyPr xmlns:a="http://schemas.openxmlformats.org/drawingml/2006/main"/>
-          <a:lstStyle xmlns:a="http://schemas.openxmlformats.org/drawingml/2006/main"/>
-          <a:p xmlns:a="http://schemas.openxmlformats.org/drawingml/2006/main">
+          <a:prstGeom prst="rect">
+            <a:avLst/>
+          </a:prstGeom>
+        </p:spPr>
+        <p:txBody>
+          <a:bodyPr/>
+          <a:lstStyle/>
+          <a:p>
             <a:r>
               <a:rPr lang="en-US" sz="1400" b="1">
                 <a:solidFill>
@@ -2250,18 +2777,18 @@
           <p:nvPr/>
         </p:nvSpPr>
         <p:spPr>
-          <a:xfrm xmlns:a="http://schemas.openxmlformats.org/drawingml/2006/main">
+          <a:xfrm>
             <a:off x="540000" y="360000"/>
             <a:ext cx="10080000" cy="540000"/>
           </a:xfrm>
-          <a:prstGeom xmlns:a="http://schemas.openxmlformats.org/drawingml/2006/main" prst="rect">
-            <a:avLst/>
-          </a:prstGeom>
-        </p:spPr>
-        <p:txBody>
-          <a:bodyPr xmlns:a="http://schemas.openxmlformats.org/drawingml/2006/main"/>
-          <a:lstStyle xmlns:a="http://schemas.openxmlformats.org/drawingml/2006/main"/>
-          <a:p xmlns:a="http://schemas.openxmlformats.org/drawingml/2006/main">
+          <a:prstGeom prst="rect">
+            <a:avLst/>
+          </a:prstGeom>
+        </p:spPr>
+        <p:txBody>
+          <a:bodyPr/>
+          <a:lstStyle/>
+          <a:p>
             <a:r>
               <a:rPr lang="en-US" sz="3200" b="1">
                 <a:solidFill>
@@ -2282,21 +2809,21 @@
           <p:nvPr/>
         </p:nvSpPr>
         <p:spPr>
-          <a:xfrm xmlns:a="http://schemas.openxmlformats.org/drawingml/2006/main">
+          <a:xfrm>
             <a:off x="540000" y="972000"/>
             <a:ext cx="1800000" cy="54000"/>
           </a:xfrm>
-          <a:prstGeom xmlns:a="http://schemas.openxmlformats.org/drawingml/2006/main" prst="rect">
-            <a:avLst/>
-          </a:prstGeom>
-          <a:solidFill xmlns:a="http://schemas.openxmlformats.org/drawingml/2006/main">
+          <a:prstGeom prst="rect">
+            <a:avLst/>
+          </a:prstGeom>
+          <a:solidFill>
             <a:srgbClr val="F5A623"/>
           </a:solidFill>
         </p:spPr>
         <p:txBody>
-          <a:bodyPr xmlns:a="http://schemas.openxmlformats.org/drawingml/2006/main"/>
-          <a:lstStyle xmlns:a="http://schemas.openxmlformats.org/drawingml/2006/main"/>
-          <a:p xmlns:a="http://schemas.openxmlformats.org/drawingml/2006/main">
+          <a:bodyPr/>
+          <a:lstStyle/>
+          <a:p>
             <a:endParaRPr lang="en-US">
               <a:solidFill>
                 <a:srgbClr val="F5A623"/>
@@ -2312,18 +2839,18 @@
           <p:nvPr/>
         </p:nvSpPr>
         <p:spPr>
-          <a:xfrm xmlns:a="http://schemas.openxmlformats.org/drawingml/2006/main">
+          <a:xfrm>
             <a:off x="540000" y="1152000"/>
             <a:ext cx="10440000" cy="396000"/>
           </a:xfrm>
-          <a:prstGeom xmlns:a="http://schemas.openxmlformats.org/drawingml/2006/main" prst="rect">
-            <a:avLst/>
-          </a:prstGeom>
-        </p:spPr>
-        <p:txBody>
-          <a:bodyPr xmlns:a="http://schemas.openxmlformats.org/drawingml/2006/main"/>
-          <a:lstStyle xmlns:a="http://schemas.openxmlformats.org/drawingml/2006/main"/>
-          <a:p xmlns:a="http://schemas.openxmlformats.org/drawingml/2006/main">
+          <a:prstGeom prst="rect">
+            <a:avLst/>
+          </a:prstGeom>
+        </p:spPr>
+        <p:txBody>
+          <a:bodyPr/>
+          <a:lstStyle/>
+          <a:p>
             <a:r>
               <a:rPr lang="en-US" sz="1800" b="0">
                 <a:solidFill>
@@ -2344,18 +2871,18 @@
           <p:nvPr/>
         </p:nvSpPr>
         <p:spPr>
-          <a:xfrm xmlns:a="http://schemas.openxmlformats.org/drawingml/2006/main">
+          <a:xfrm>
             <a:off x="540000" y="1620000"/>
             <a:ext cx="10440000" cy="396000"/>
           </a:xfrm>
-          <a:prstGeom xmlns:a="http://schemas.openxmlformats.org/drawingml/2006/main" prst="rect">
-            <a:avLst/>
-          </a:prstGeom>
-        </p:spPr>
-        <p:txBody>
-          <a:bodyPr xmlns:a="http://schemas.openxmlformats.org/drawingml/2006/main"/>
-          <a:lstStyle xmlns:a="http://schemas.openxmlformats.org/drawingml/2006/main"/>
-          <a:p xmlns:a="http://schemas.openxmlformats.org/drawingml/2006/main">
+          <a:prstGeom prst="rect">
+            <a:avLst/>
+          </a:prstGeom>
+        </p:spPr>
+        <p:txBody>
+          <a:bodyPr/>
+          <a:lstStyle/>
+          <a:p>
             <a:r>
               <a:rPr lang="en-US" sz="1800" b="0">
                 <a:solidFill>
@@ -2376,18 +2903,18 @@
           <p:nvPr/>
         </p:nvSpPr>
         <p:spPr>
-          <a:xfrm xmlns:a="http://schemas.openxmlformats.org/drawingml/2006/main">
+          <a:xfrm>
             <a:off x="540000" y="2088000"/>
             <a:ext cx="10440000" cy="396000"/>
           </a:xfrm>
-          <a:prstGeom xmlns:a="http://schemas.openxmlformats.org/drawingml/2006/main" prst="rect">
-            <a:avLst/>
-          </a:prstGeom>
-        </p:spPr>
-        <p:txBody>
-          <a:bodyPr xmlns:a="http://schemas.openxmlformats.org/drawingml/2006/main"/>
-          <a:lstStyle xmlns:a="http://schemas.openxmlformats.org/drawingml/2006/main"/>
-          <a:p xmlns:a="http://schemas.openxmlformats.org/drawingml/2006/main">
+          <a:prstGeom prst="rect">
+            <a:avLst/>
+          </a:prstGeom>
+        </p:spPr>
+        <p:txBody>
+          <a:bodyPr/>
+          <a:lstStyle/>
+          <a:p>
             <a:r>
               <a:rPr lang="en-US" sz="1800" b="0">
                 <a:solidFill>
@@ -2408,18 +2935,18 @@
           <p:nvPr/>
         </p:nvSpPr>
         <p:spPr>
-          <a:xfrm xmlns:a="http://schemas.openxmlformats.org/drawingml/2006/main">
+          <a:xfrm>
             <a:off x="540000" y="2556000"/>
             <a:ext cx="10440000" cy="396000"/>
           </a:xfrm>
-          <a:prstGeom xmlns:a="http://schemas.openxmlformats.org/drawingml/2006/main" prst="rect">
-            <a:avLst/>
-          </a:prstGeom>
-        </p:spPr>
-        <p:txBody>
-          <a:bodyPr xmlns:a="http://schemas.openxmlformats.org/drawingml/2006/main"/>
-          <a:lstStyle xmlns:a="http://schemas.openxmlformats.org/drawingml/2006/main"/>
-          <a:p xmlns:a="http://schemas.openxmlformats.org/drawingml/2006/main">
+          <a:prstGeom prst="rect">
+            <a:avLst/>
+          </a:prstGeom>
+        </p:spPr>
+        <p:txBody>
+          <a:bodyPr/>
+          <a:lstStyle/>
+          <a:p>
             <a:r>
               <a:rPr lang="en-US" sz="1800" b="0">
                 <a:solidFill>
@@ -2440,18 +2967,18 @@
           <p:nvPr/>
         </p:nvSpPr>
         <p:spPr>
-          <a:xfrm xmlns:a="http://schemas.openxmlformats.org/drawingml/2006/main">
+          <a:xfrm>
             <a:off x="540000" y="3024000"/>
             <a:ext cx="10440000" cy="396000"/>
           </a:xfrm>
-          <a:prstGeom xmlns:a="http://schemas.openxmlformats.org/drawingml/2006/main" prst="rect">
-            <a:avLst/>
-          </a:prstGeom>
-        </p:spPr>
-        <p:txBody>
-          <a:bodyPr xmlns:a="http://schemas.openxmlformats.org/drawingml/2006/main"/>
-          <a:lstStyle xmlns:a="http://schemas.openxmlformats.org/drawingml/2006/main"/>
-          <a:p xmlns:a="http://schemas.openxmlformats.org/drawingml/2006/main">
+          <a:prstGeom prst="rect">
+            <a:avLst/>
+          </a:prstGeom>
+        </p:spPr>
+        <p:txBody>
+          <a:bodyPr/>
+          <a:lstStyle/>
+          <a:p>
             <a:r>
               <a:rPr lang="en-US" sz="1800" b="0">
                 <a:solidFill>
@@ -2472,21 +2999,21 @@
           <p:nvPr/>
         </p:nvSpPr>
         <p:spPr>
-          <a:xfrm xmlns:a="http://schemas.openxmlformats.org/drawingml/2006/main">
+          <a:xfrm>
             <a:off x="0" y="6660000"/>
             <a:ext cx="12193200" cy="216000"/>
           </a:xfrm>
-          <a:prstGeom xmlns:a="http://schemas.openxmlformats.org/drawingml/2006/main" prst="rect">
-            <a:avLst/>
-          </a:prstGeom>
-          <a:solidFill xmlns:a="http://schemas.openxmlformats.org/drawingml/2006/main">
+          <a:prstGeom prst="rect">
+            <a:avLst/>
+          </a:prstGeom>
+          <a:solidFill>
             <a:srgbClr val="0A0E2A"/>
           </a:solidFill>
         </p:spPr>
         <p:txBody>
-          <a:bodyPr xmlns:a="http://schemas.openxmlformats.org/drawingml/2006/main"/>
-          <a:lstStyle xmlns:a="http://schemas.openxmlformats.org/drawingml/2006/main"/>
-          <a:p xmlns:a="http://schemas.openxmlformats.org/drawingml/2006/main">
+          <a:bodyPr/>
+          <a:lstStyle/>
+          <a:p>
             <a:r>
               <a:rPr lang="en-US" sz="1100">
                 <a:solidFill>
@@ -2502,17 +3029,21 @@
       </p:sp>
     </p:spTree>
   </p:cSld>
+  <p:clrMapOvr>
+    <a:masterClrMapping/>
+  </p:clrMapOvr>
 </p:sld>
 </file>
 
 <file path=ppt/slides/slide3.xml><?xml version="1.0" encoding="utf-8"?>
-<p:sld xmlns:p="http://schemas.openxmlformats.org/presentationml/2006/main">
+<p:sld xmlns:a="http://schemas.openxmlformats.org/drawingml/2006/main" xmlns:r="http://schemas.openxmlformats.org/officeDocument/2006/relationships" xmlns:p="http://schemas.openxmlformats.org/presentationml/2006/main">
   <p:cSld>
     <p:bg>
       <p:bgPr>
-        <a:solidFill xmlns:a="http://schemas.openxmlformats.org/drawingml/2006/main">
+        <a:solidFill>
           <a:srgbClr val="0A0E2A"/>
         </a:solidFill>
+        <a:effectLst/>
       </p:bgPr>
     </p:bg>
     <p:spTree>
@@ -2521,7 +3052,14 @@
         <p:cNvGrpSpPr/>
         <p:nvPr/>
       </p:nvGrpSpPr>
-      <p:grpSpPr/>
+      <p:grpSpPr>
+        <a:xfrm>
+          <a:off x="0" y="0"/>
+          <a:ext cx="0" cy="0"/>
+          <a:chOff x="0" y="0"/>
+          <a:chExt cx="0" cy="0"/>
+        </a:xfrm>
+      </p:grpSpPr>
       <p:sp>
         <p:nvSpPr>
           <p:cNvPr id="100016" name="TopBar"/>
@@ -2529,21 +3067,21 @@
           <p:nvPr/>
         </p:nvSpPr>
         <p:spPr>
-          <a:xfrm xmlns:a="http://schemas.openxmlformats.org/drawingml/2006/main">
+          <a:xfrm>
             <a:off x="0" y="0"/>
             <a:ext cx="12193200" cy="180000"/>
           </a:xfrm>
-          <a:prstGeom xmlns:a="http://schemas.openxmlformats.org/drawingml/2006/main" prst="rect">
-            <a:avLst/>
-          </a:prstGeom>
-          <a:solidFill xmlns:a="http://schemas.openxmlformats.org/drawingml/2006/main">
+          <a:prstGeom prst="rect">
+            <a:avLst/>
+          </a:prstGeom>
+          <a:solidFill>
             <a:srgbClr val="F5A623"/>
           </a:solidFill>
         </p:spPr>
         <p:txBody>
-          <a:bodyPr xmlns:a="http://schemas.openxmlformats.org/drawingml/2006/main"/>
-          <a:lstStyle xmlns:a="http://schemas.openxmlformats.org/drawingml/2006/main"/>
-          <a:p xmlns:a="http://schemas.openxmlformats.org/drawingml/2006/main">
+          <a:bodyPr/>
+          <a:lstStyle/>
+          <a:p>
             <a:endParaRPr lang="en-US">
               <a:solidFill>
                 <a:srgbClr val="F5A623"/>
@@ -2559,18 +3097,18 @@
           <p:nvPr/>
         </p:nvSpPr>
         <p:spPr>
-          <a:xfrm xmlns:a="http://schemas.openxmlformats.org/drawingml/2006/main">
+          <a:xfrm>
             <a:off x="10800000" y="288000"/>
             <a:ext cx="1080000" cy="288000"/>
           </a:xfrm>
-          <a:prstGeom xmlns:a="http://schemas.openxmlformats.org/drawingml/2006/main" prst="rect">
-            <a:avLst/>
-          </a:prstGeom>
-        </p:spPr>
-        <p:txBody>
-          <a:bodyPr xmlns:a="http://schemas.openxmlformats.org/drawingml/2006/main"/>
-          <a:lstStyle xmlns:a="http://schemas.openxmlformats.org/drawingml/2006/main"/>
-          <a:p xmlns:a="http://schemas.openxmlformats.org/drawingml/2006/main">
+          <a:prstGeom prst="rect">
+            <a:avLst/>
+          </a:prstGeom>
+        </p:spPr>
+        <p:txBody>
+          <a:bodyPr/>
+          <a:lstStyle/>
+          <a:p>
             <a:r>
               <a:rPr lang="en-US" sz="1400" b="1">
                 <a:solidFill>
@@ -2591,18 +3129,18 @@
           <p:nvPr/>
         </p:nvSpPr>
         <p:spPr>
-          <a:xfrm xmlns:a="http://schemas.openxmlformats.org/drawingml/2006/main">
+          <a:xfrm>
             <a:off x="540000" y="360000"/>
             <a:ext cx="10080000" cy="540000"/>
           </a:xfrm>
-          <a:prstGeom xmlns:a="http://schemas.openxmlformats.org/drawingml/2006/main" prst="rect">
-            <a:avLst/>
-          </a:prstGeom>
-        </p:spPr>
-        <p:txBody>
-          <a:bodyPr xmlns:a="http://schemas.openxmlformats.org/drawingml/2006/main"/>
-          <a:lstStyle xmlns:a="http://schemas.openxmlformats.org/drawingml/2006/main"/>
-          <a:p xmlns:a="http://schemas.openxmlformats.org/drawingml/2006/main">
+          <a:prstGeom prst="rect">
+            <a:avLst/>
+          </a:prstGeom>
+        </p:spPr>
+        <p:txBody>
+          <a:bodyPr/>
+          <a:lstStyle/>
+          <a:p>
             <a:r>
               <a:rPr lang="en-US" sz="3200" b="1">
                 <a:solidFill>
@@ -2623,21 +3161,21 @@
           <p:nvPr/>
         </p:nvSpPr>
         <p:spPr>
-          <a:xfrm xmlns:a="http://schemas.openxmlformats.org/drawingml/2006/main">
+          <a:xfrm>
             <a:off x="540000" y="972000"/>
             <a:ext cx="1800000" cy="54000"/>
           </a:xfrm>
-          <a:prstGeom xmlns:a="http://schemas.openxmlformats.org/drawingml/2006/main" prst="rect">
-            <a:avLst/>
-          </a:prstGeom>
-          <a:solidFill xmlns:a="http://schemas.openxmlformats.org/drawingml/2006/main">
+          <a:prstGeom prst="rect">
+            <a:avLst/>
+          </a:prstGeom>
+          <a:solidFill>
             <a:srgbClr val="F5A623"/>
           </a:solidFill>
         </p:spPr>
         <p:txBody>
-          <a:bodyPr xmlns:a="http://schemas.openxmlformats.org/drawingml/2006/main"/>
-          <a:lstStyle xmlns:a="http://schemas.openxmlformats.org/drawingml/2006/main"/>
-          <a:p xmlns:a="http://schemas.openxmlformats.org/drawingml/2006/main">
+          <a:bodyPr/>
+          <a:lstStyle/>
+          <a:p>
             <a:endParaRPr lang="en-US">
               <a:solidFill>
                 <a:srgbClr val="F5A623"/>
@@ -2653,18 +3191,18 @@
           <p:nvPr/>
         </p:nvSpPr>
         <p:spPr>
-          <a:xfrm xmlns:a="http://schemas.openxmlformats.org/drawingml/2006/main">
+          <a:xfrm>
             <a:off x="540000" y="1152000"/>
             <a:ext cx="10440000" cy="396000"/>
           </a:xfrm>
-          <a:prstGeom xmlns:a="http://schemas.openxmlformats.org/drawingml/2006/main" prst="rect">
-            <a:avLst/>
-          </a:prstGeom>
-        </p:spPr>
-        <p:txBody>
-          <a:bodyPr xmlns:a="http://schemas.openxmlformats.org/drawingml/2006/main"/>
-          <a:lstStyle xmlns:a="http://schemas.openxmlformats.org/drawingml/2006/main"/>
-          <a:p xmlns:a="http://schemas.openxmlformats.org/drawingml/2006/main">
+          <a:prstGeom prst="rect">
+            <a:avLst/>
+          </a:prstGeom>
+        </p:spPr>
+        <p:txBody>
+          <a:bodyPr/>
+          <a:lstStyle/>
+          <a:p>
             <a:r>
               <a:rPr lang="en-US" sz="1800">
                 <a:solidFill>
@@ -2685,18 +3223,18 @@
           <p:nvPr/>
         </p:nvSpPr>
         <p:spPr>
-          <a:xfrm xmlns:a="http://schemas.openxmlformats.org/drawingml/2006/main">
+          <a:xfrm>
             <a:off x="540000" y="1620000"/>
             <a:ext cx="10440000" cy="396000"/>
           </a:xfrm>
-          <a:prstGeom xmlns:a="http://schemas.openxmlformats.org/drawingml/2006/main" prst="rect">
-            <a:avLst/>
-          </a:prstGeom>
-        </p:spPr>
-        <p:txBody>
-          <a:bodyPr xmlns:a="http://schemas.openxmlformats.org/drawingml/2006/main"/>
-          <a:lstStyle xmlns:a="http://schemas.openxmlformats.org/drawingml/2006/main"/>
-          <a:p xmlns:a="http://schemas.openxmlformats.org/drawingml/2006/main">
+          <a:prstGeom prst="rect">
+            <a:avLst/>
+          </a:prstGeom>
+        </p:spPr>
+        <p:txBody>
+          <a:bodyPr/>
+          <a:lstStyle/>
+          <a:p>
             <a:r>
               <a:rPr lang="en-US" sz="1800">
                 <a:solidFill>
@@ -2717,18 +3255,18 @@
           <p:nvPr/>
         </p:nvSpPr>
         <p:spPr>
-          <a:xfrm xmlns:a="http://schemas.openxmlformats.org/drawingml/2006/main">
+          <a:xfrm>
             <a:off x="540000" y="2088000"/>
             <a:ext cx="10440000" cy="396000"/>
           </a:xfrm>
-          <a:prstGeom xmlns:a="http://schemas.openxmlformats.org/drawingml/2006/main" prst="rect">
-            <a:avLst/>
-          </a:prstGeom>
-        </p:spPr>
-        <p:txBody>
-          <a:bodyPr xmlns:a="http://schemas.openxmlformats.org/drawingml/2006/main"/>
-          <a:lstStyle xmlns:a="http://schemas.openxmlformats.org/drawingml/2006/main"/>
-          <a:p xmlns:a="http://schemas.openxmlformats.org/drawingml/2006/main">
+          <a:prstGeom prst="rect">
+            <a:avLst/>
+          </a:prstGeom>
+        </p:spPr>
+        <p:txBody>
+          <a:bodyPr/>
+          <a:lstStyle/>
+          <a:p>
             <a:r>
               <a:rPr lang="en-US" sz="1800">
                 <a:solidFill>
@@ -2749,18 +3287,18 @@
           <p:nvPr/>
         </p:nvSpPr>
         <p:spPr>
-          <a:xfrm xmlns:a="http://schemas.openxmlformats.org/drawingml/2006/main">
+          <a:xfrm>
             <a:off x="540000" y="2556000"/>
             <a:ext cx="10440000" cy="396000"/>
           </a:xfrm>
-          <a:prstGeom xmlns:a="http://schemas.openxmlformats.org/drawingml/2006/main" prst="rect">
-            <a:avLst/>
-          </a:prstGeom>
-        </p:spPr>
-        <p:txBody>
-          <a:bodyPr xmlns:a="http://schemas.openxmlformats.org/drawingml/2006/main"/>
-          <a:lstStyle xmlns:a="http://schemas.openxmlformats.org/drawingml/2006/main"/>
-          <a:p xmlns:a="http://schemas.openxmlformats.org/drawingml/2006/main">
+          <a:prstGeom prst="rect">
+            <a:avLst/>
+          </a:prstGeom>
+        </p:spPr>
+        <p:txBody>
+          <a:bodyPr/>
+          <a:lstStyle/>
+          <a:p>
             <a:r>
               <a:rPr lang="en-US" sz="1800">
                 <a:solidFill>
@@ -2781,18 +3319,18 @@
           <p:nvPr/>
         </p:nvSpPr>
         <p:spPr>
-          <a:xfrm xmlns:a="http://schemas.openxmlformats.org/drawingml/2006/main">
+          <a:xfrm>
             <a:off x="540000" y="3024000"/>
             <a:ext cx="10440000" cy="396000"/>
           </a:xfrm>
-          <a:prstGeom xmlns:a="http://schemas.openxmlformats.org/drawingml/2006/main" prst="rect">
-            <a:avLst/>
-          </a:prstGeom>
-        </p:spPr>
-        <p:txBody>
-          <a:bodyPr xmlns:a="http://schemas.openxmlformats.org/drawingml/2006/main"/>
-          <a:lstStyle xmlns:a="http://schemas.openxmlformats.org/drawingml/2006/main"/>
-          <a:p xmlns:a="http://schemas.openxmlformats.org/drawingml/2006/main">
+          <a:prstGeom prst="rect">
+            <a:avLst/>
+          </a:prstGeom>
+        </p:spPr>
+        <p:txBody>
+          <a:bodyPr/>
+          <a:lstStyle/>
+          <a:p>
             <a:r>
               <a:rPr lang="en-US" sz="1800">
                 <a:solidFill>
@@ -2813,18 +3351,18 @@
           <p:nvPr/>
         </p:nvSpPr>
         <p:spPr>
-          <a:xfrm xmlns:a="http://schemas.openxmlformats.org/drawingml/2006/main">
+          <a:xfrm>
             <a:off x="540000" y="3492000"/>
             <a:ext cx="10440000" cy="396000"/>
           </a:xfrm>
-          <a:prstGeom xmlns:a="http://schemas.openxmlformats.org/drawingml/2006/main" prst="rect">
-            <a:avLst/>
-          </a:prstGeom>
-        </p:spPr>
-        <p:txBody>
-          <a:bodyPr xmlns:a="http://schemas.openxmlformats.org/drawingml/2006/main"/>
-          <a:lstStyle xmlns:a="http://schemas.openxmlformats.org/drawingml/2006/main"/>
-          <a:p xmlns:a="http://schemas.openxmlformats.org/drawingml/2006/main">
+          <a:prstGeom prst="rect">
+            <a:avLst/>
+          </a:prstGeom>
+        </p:spPr>
+        <p:txBody>
+          <a:bodyPr/>
+          <a:lstStyle/>
+          <a:p>
             <a:r>
               <a:rPr lang="en-US" sz="1800">
                 <a:solidFill>
@@ -2845,21 +3383,21 @@
           <p:nvPr/>
         </p:nvSpPr>
         <p:spPr>
-          <a:xfrm xmlns:a="http://schemas.openxmlformats.org/drawingml/2006/main">
+          <a:xfrm>
             <a:off x="0" y="6660000"/>
             <a:ext cx="12193200" cy="216000"/>
           </a:xfrm>
-          <a:prstGeom xmlns:a="http://schemas.openxmlformats.org/drawingml/2006/main" prst="rect">
-            <a:avLst/>
-          </a:prstGeom>
-          <a:solidFill xmlns:a="http://schemas.openxmlformats.org/drawingml/2006/main">
+          <a:prstGeom prst="rect">
+            <a:avLst/>
+          </a:prstGeom>
+          <a:solidFill>
             <a:srgbClr val="1A2540"/>
           </a:solidFill>
         </p:spPr>
         <p:txBody>
-          <a:bodyPr xmlns:a="http://schemas.openxmlformats.org/drawingml/2006/main"/>
-          <a:lstStyle xmlns:a="http://schemas.openxmlformats.org/drawingml/2006/main"/>
-          <a:p xmlns:a="http://schemas.openxmlformats.org/drawingml/2006/main">
+          <a:bodyPr/>
+          <a:lstStyle/>
+          <a:p>
             <a:r>
               <a:rPr lang="en-US" sz="1100">
                 <a:solidFill>
@@ -2875,17 +3413,21 @@
       </p:sp>
     </p:spTree>
   </p:cSld>
+  <p:clrMapOvr>
+    <a:masterClrMapping/>
+  </p:clrMapOvr>
 </p:sld>
 </file>
 
 <file path=ppt/slides/slide4.xml><?xml version="1.0" encoding="utf-8"?>
-<p:sld xmlns:p="http://schemas.openxmlformats.org/presentationml/2006/main">
+<p:sld xmlns:a="http://schemas.openxmlformats.org/drawingml/2006/main" xmlns:r="http://schemas.openxmlformats.org/officeDocument/2006/relationships" xmlns:p="http://schemas.openxmlformats.org/presentationml/2006/main">
   <p:cSld>
     <p:bg>
       <p:bgPr>
-        <a:solidFill xmlns:a="http://schemas.openxmlformats.org/drawingml/2006/main">
+        <a:solidFill>
           <a:srgbClr val="FFFFFF"/>
         </a:solidFill>
+        <a:effectLst/>
       </p:bgPr>
     </p:bg>
     <p:spTree>
@@ -2894,7 +3436,14 @@
         <p:cNvGrpSpPr/>
         <p:nvPr/>
       </p:nvGrpSpPr>
-      <p:grpSpPr/>
+      <p:grpSpPr>
+        <a:xfrm>
+          <a:off x="0" y="0"/>
+          <a:ext cx="0" cy="0"/>
+          <a:chOff x="0" y="0"/>
+          <a:chExt cx="0" cy="0"/>
+        </a:xfrm>
+      </p:grpSpPr>
       <p:sp>
         <p:nvSpPr>
           <p:cNvPr id="100027" name="TopBar"/>
@@ -2902,21 +3451,21 @@
           <p:nvPr/>
         </p:nvSpPr>
         <p:spPr>
-          <a:xfrm xmlns:a="http://schemas.openxmlformats.org/drawingml/2006/main">
+          <a:xfrm>
             <a:off x="0" y="0"/>
             <a:ext cx="12193200" cy="180000"/>
           </a:xfrm>
-          <a:prstGeom xmlns:a="http://schemas.openxmlformats.org/drawingml/2006/main" prst="rect">
-            <a:avLst/>
-          </a:prstGeom>
-          <a:solidFill xmlns:a="http://schemas.openxmlformats.org/drawingml/2006/main">
+          <a:prstGeom prst="rect">
+            <a:avLst/>
+          </a:prstGeom>
+          <a:solidFill>
             <a:srgbClr val="F5A623"/>
           </a:solidFill>
         </p:spPr>
         <p:txBody>
-          <a:bodyPr xmlns:a="http://schemas.openxmlformats.org/drawingml/2006/main"/>
-          <a:lstStyle xmlns:a="http://schemas.openxmlformats.org/drawingml/2006/main"/>
-          <a:p xmlns:a="http://schemas.openxmlformats.org/drawingml/2006/main">
+          <a:bodyPr/>
+          <a:lstStyle/>
+          <a:p>
             <a:endParaRPr lang="en-US">
               <a:solidFill>
                 <a:srgbClr val="F5A623"/>
@@ -2932,20 +3481,20 @@
           <p:nvPr/>
         </p:nvSpPr>
         <p:spPr>
-          <a:xfrm xmlns:a="http://schemas.openxmlformats.org/drawingml/2006/main">
+          <a:xfrm>
             <a:off x="540000" y="360000"/>
             <a:ext cx="10080000" cy="540000"/>
           </a:xfrm>
-          <a:prstGeom xmlns:a="http://schemas.openxmlformats.org/drawingml/2006/main" prst="rect">
-            <a:avLst/>
-          </a:prstGeom>
-        </p:spPr>
-        <p:txBody>
-          <a:bodyPr xmlns:a="http://schemas.openxmlformats.org/drawingml/2006/main"/>
-          <a:lstStyle xmlns:a="http://schemas.openxmlformats.org/drawingml/2006/main"/>
-          <a:p xmlns:a="http://schemas.openxmlformats.org/drawingml/2006/main">
-            <a:r>
-              <a:rPr lang="en-US" sz="3200" b="1">
+          <a:prstGeom prst="rect">
+            <a:avLst/>
+          </a:prstGeom>
+        </p:spPr>
+        <p:txBody>
+          <a:bodyPr/>
+          <a:lstStyle/>
+          <a:p>
+            <a:r>
+              <a:rPr lang="en-US" sz="3200" b="1" dirty="0">
                 <a:solidFill>
                   <a:srgbClr val="0A0E2A"/>
                 </a:solidFill>
@@ -2964,21 +3513,21 @@
           <p:nvPr/>
         </p:nvSpPr>
         <p:spPr>
-          <a:xfrm xmlns:a="http://schemas.openxmlformats.org/drawingml/2006/main">
+          <a:xfrm>
             <a:off x="540000" y="972000"/>
             <a:ext cx="1800000" cy="54000"/>
           </a:xfrm>
-          <a:prstGeom xmlns:a="http://schemas.openxmlformats.org/drawingml/2006/main" prst="rect">
-            <a:avLst/>
-          </a:prstGeom>
-          <a:solidFill xmlns:a="http://schemas.openxmlformats.org/drawingml/2006/main">
+          <a:prstGeom prst="rect">
+            <a:avLst/>
+          </a:prstGeom>
+          <a:solidFill>
             <a:srgbClr val="F5A623"/>
           </a:solidFill>
         </p:spPr>
         <p:txBody>
-          <a:bodyPr xmlns:a="http://schemas.openxmlformats.org/drawingml/2006/main"/>
-          <a:lstStyle xmlns:a="http://schemas.openxmlformats.org/drawingml/2006/main"/>
-          <a:p xmlns:a="http://schemas.openxmlformats.org/drawingml/2006/main">
+          <a:bodyPr/>
+          <a:lstStyle/>
+          <a:p>
             <a:endParaRPr lang="en-US">
               <a:solidFill>
                 <a:srgbClr val="F5A623"/>
@@ -2994,21 +3543,21 @@
           <p:nvPr/>
         </p:nvSpPr>
         <p:spPr>
-          <a:xfrm xmlns:a="http://schemas.openxmlformats.org/drawingml/2006/main">
+          <a:xfrm>
             <a:off x="540000" y="1152000"/>
             <a:ext cx="2700000" cy="900000"/>
           </a:xfrm>
-          <a:prstGeom xmlns:a="http://schemas.openxmlformats.org/drawingml/2006/main" prst="rect">
-            <a:avLst/>
-          </a:prstGeom>
-          <a:solidFill xmlns:a="http://schemas.openxmlformats.org/drawingml/2006/main">
+          <a:prstGeom prst="rect">
+            <a:avLst/>
+          </a:prstGeom>
+          <a:solidFill>
             <a:srgbClr val="EEF2FF"/>
           </a:solidFill>
         </p:spPr>
         <p:txBody>
-          <a:bodyPr xmlns:a="http://schemas.openxmlformats.org/drawingml/2006/main"/>
-          <a:lstStyle xmlns:a="http://schemas.openxmlformats.org/drawingml/2006/main"/>
-          <a:p xmlns:a="http://schemas.openxmlformats.org/drawingml/2006/main">
+          <a:bodyPr/>
+          <a:lstStyle/>
+          <a:p>
             <a:r>
               <a:rPr lang="en-US" sz="1600" b="0">
                 <a:solidFill>
@@ -3020,7 +3569,7 @@
               <a:t>🐍 Language</a:t>
             </a:r>
           </a:p>
-          <a:p xmlns:a="http://schemas.openxmlformats.org/drawingml/2006/main">
+          <a:p>
             <a:r>
               <a:rPr lang="en-US" sz="1600" b="0">
                 <a:solidFill>
@@ -3041,21 +3590,21 @@
           <p:nvPr/>
         </p:nvSpPr>
         <p:spPr>
-          <a:xfrm xmlns:a="http://schemas.openxmlformats.org/drawingml/2006/main">
+          <a:xfrm>
             <a:off x="3600000" y="1152000"/>
             <a:ext cx="2700000" cy="900000"/>
           </a:xfrm>
-          <a:prstGeom xmlns:a="http://schemas.openxmlformats.org/drawingml/2006/main" prst="rect">
-            <a:avLst/>
-          </a:prstGeom>
-          <a:solidFill xmlns:a="http://schemas.openxmlformats.org/drawingml/2006/main">
+          <a:prstGeom prst="rect">
+            <a:avLst/>
+          </a:prstGeom>
+          <a:solidFill>
             <a:srgbClr val="EEF2FF"/>
           </a:solidFill>
         </p:spPr>
         <p:txBody>
-          <a:bodyPr xmlns:a="http://schemas.openxmlformats.org/drawingml/2006/main"/>
-          <a:lstStyle xmlns:a="http://schemas.openxmlformats.org/drawingml/2006/main"/>
-          <a:p xmlns:a="http://schemas.openxmlformats.org/drawingml/2006/main">
+          <a:bodyPr/>
+          <a:lstStyle/>
+          <a:p>
             <a:r>
               <a:rPr lang="en-US" sz="1600" b="0">
                 <a:solidFill>
@@ -3067,7 +3616,7 @@
               <a:t>📊 Data Processing</a:t>
             </a:r>
           </a:p>
-          <a:p xmlns:a="http://schemas.openxmlformats.org/drawingml/2006/main">
+          <a:p>
             <a:r>
               <a:rPr lang="en-US" sz="1600" b="0">
                 <a:solidFill>
@@ -3088,21 +3637,21 @@
           <p:nvPr/>
         </p:nvSpPr>
         <p:spPr>
-          <a:xfrm xmlns:a="http://schemas.openxmlformats.org/drawingml/2006/main">
+          <a:xfrm>
             <a:off x="6660000" y="1152000"/>
             <a:ext cx="2700000" cy="900000"/>
           </a:xfrm>
-          <a:prstGeom xmlns:a="http://schemas.openxmlformats.org/drawingml/2006/main" prst="rect">
-            <a:avLst/>
-          </a:prstGeom>
-          <a:solidFill xmlns:a="http://schemas.openxmlformats.org/drawingml/2006/main">
+          <a:prstGeom prst="rect">
+            <a:avLst/>
+          </a:prstGeom>
+          <a:solidFill>
             <a:srgbClr val="EEF2FF"/>
           </a:solidFill>
         </p:spPr>
         <p:txBody>
-          <a:bodyPr xmlns:a="http://schemas.openxmlformats.org/drawingml/2006/main"/>
-          <a:lstStyle xmlns:a="http://schemas.openxmlformats.org/drawingml/2006/main"/>
-          <a:p xmlns:a="http://schemas.openxmlformats.org/drawingml/2006/main">
+          <a:bodyPr/>
+          <a:lstStyle/>
+          <a:p>
             <a:r>
               <a:rPr lang="en-US" sz="1600" b="0">
                 <a:solidFill>
@@ -3114,7 +3663,7 @@
               <a:t>🤖 Machine Learning</a:t>
             </a:r>
           </a:p>
-          <a:p xmlns:a="http://schemas.openxmlformats.org/drawingml/2006/main">
+          <a:p>
             <a:r>
               <a:rPr lang="en-US" sz="1600" b="0">
                 <a:solidFill>
@@ -3126,7 +3675,7 @@
               <a:t>scikit-learn  |  XGBoost</a:t>
             </a:r>
           </a:p>
-          <a:p xmlns:a="http://schemas.openxmlformats.org/drawingml/2006/main">
+          <a:p>
             <a:r>
               <a:rPr lang="en-US" sz="1600" b="0">
                 <a:solidFill>
@@ -3147,21 +3696,21 @@
           <p:nvPr/>
         </p:nvSpPr>
         <p:spPr>
-          <a:xfrm xmlns:a="http://schemas.openxmlformats.org/drawingml/2006/main">
+          <a:xfrm>
             <a:off x="540000" y="2340000"/>
             <a:ext cx="2700000" cy="900000"/>
           </a:xfrm>
-          <a:prstGeom xmlns:a="http://schemas.openxmlformats.org/drawingml/2006/main" prst="rect">
-            <a:avLst/>
-          </a:prstGeom>
-          <a:solidFill xmlns:a="http://schemas.openxmlformats.org/drawingml/2006/main">
+          <a:prstGeom prst="rect">
+            <a:avLst/>
+          </a:prstGeom>
+          <a:solidFill>
             <a:srgbClr val="FFF4E5"/>
           </a:solidFill>
         </p:spPr>
         <p:txBody>
-          <a:bodyPr xmlns:a="http://schemas.openxmlformats.org/drawingml/2006/main"/>
-          <a:lstStyle xmlns:a="http://schemas.openxmlformats.org/drawingml/2006/main"/>
-          <a:p xmlns:a="http://schemas.openxmlformats.org/drawingml/2006/main">
+          <a:bodyPr/>
+          <a:lstStyle/>
+          <a:p>
             <a:r>
               <a:rPr lang="en-US" sz="1600" b="0">
                 <a:solidFill>
@@ -3173,7 +3722,7 @@
               <a:t>🧠 Deep Learning</a:t>
             </a:r>
           </a:p>
-          <a:p xmlns:a="http://schemas.openxmlformats.org/drawingml/2006/main">
+          <a:p>
             <a:r>
               <a:rPr lang="en-US" sz="1600" b="0">
                 <a:solidFill>
@@ -3194,21 +3743,21 @@
           <p:nvPr/>
         </p:nvSpPr>
         <p:spPr>
-          <a:xfrm xmlns:a="http://schemas.openxmlformats.org/drawingml/2006/main">
+          <a:xfrm>
             <a:off x="3600000" y="2340000"/>
             <a:ext cx="2700000" cy="900000"/>
           </a:xfrm>
-          <a:prstGeom xmlns:a="http://schemas.openxmlformats.org/drawingml/2006/main" prst="rect">
-            <a:avLst/>
-          </a:prstGeom>
-          <a:solidFill xmlns:a="http://schemas.openxmlformats.org/drawingml/2006/main">
+          <a:prstGeom prst="rect">
+            <a:avLst/>
+          </a:prstGeom>
+          <a:solidFill>
             <a:srgbClr val="FFF4E5"/>
           </a:solidFill>
         </p:spPr>
         <p:txBody>
-          <a:bodyPr xmlns:a="http://schemas.openxmlformats.org/drawingml/2006/main"/>
-          <a:lstStyle xmlns:a="http://schemas.openxmlformats.org/drawingml/2006/main"/>
-          <a:p xmlns:a="http://schemas.openxmlformats.org/drawingml/2006/main">
+          <a:bodyPr/>
+          <a:lstStyle/>
+          <a:p>
             <a:r>
               <a:rPr lang="en-US" sz="1600" b="0">
                 <a:solidFill>
@@ -3220,7 +3769,7 @@
               <a:t>📈 Visualization</a:t>
             </a:r>
           </a:p>
-          <a:p xmlns:a="http://schemas.openxmlformats.org/drawingml/2006/main">
+          <a:p>
             <a:r>
               <a:rPr lang="en-US" sz="1600" b="0">
                 <a:solidFill>
@@ -3241,21 +3790,21 @@
           <p:nvPr/>
         </p:nvSpPr>
         <p:spPr>
-          <a:xfrm xmlns:a="http://schemas.openxmlformats.org/drawingml/2006/main">
+          <a:xfrm>
             <a:off x="6660000" y="2340000"/>
             <a:ext cx="2700000" cy="900000"/>
           </a:xfrm>
-          <a:prstGeom xmlns:a="http://schemas.openxmlformats.org/drawingml/2006/main" prst="rect">
-            <a:avLst/>
-          </a:prstGeom>
-          <a:solidFill xmlns:a="http://schemas.openxmlformats.org/drawingml/2006/main">
+          <a:prstGeom prst="rect">
+            <a:avLst/>
+          </a:prstGeom>
+          <a:solidFill>
             <a:srgbClr val="FFF4E5"/>
           </a:solidFill>
         </p:spPr>
         <p:txBody>
-          <a:bodyPr xmlns:a="http://schemas.openxmlformats.org/drawingml/2006/main"/>
-          <a:lstStyle xmlns:a="http://schemas.openxmlformats.org/drawingml/2006/main"/>
-          <a:p xmlns:a="http://schemas.openxmlformats.org/drawingml/2006/main">
+          <a:bodyPr/>
+          <a:lstStyle/>
+          <a:p>
             <a:r>
               <a:rPr lang="en-US" sz="1600" b="0">
                 <a:solidFill>
@@ -3267,7 +3816,7 @@
               <a:t>🗺️ Mapping</a:t>
             </a:r>
           </a:p>
-          <a:p xmlns:a="http://schemas.openxmlformats.org/drawingml/2006/main">
+          <a:p>
             <a:r>
               <a:rPr lang="en-US" sz="1600" b="0">
                 <a:solidFill>
@@ -3288,21 +3837,21 @@
           <p:nvPr/>
         </p:nvSpPr>
         <p:spPr>
-          <a:xfrm xmlns:a="http://schemas.openxmlformats.org/drawingml/2006/main">
+          <a:xfrm>
             <a:off x="540000" y="3528000"/>
             <a:ext cx="2700000" cy="900000"/>
           </a:xfrm>
-          <a:prstGeom xmlns:a="http://schemas.openxmlformats.org/drawingml/2006/main" prst="rect">
-            <a:avLst/>
-          </a:prstGeom>
-          <a:solidFill xmlns:a="http://schemas.openxmlformats.org/drawingml/2006/main">
+          <a:prstGeom prst="rect">
+            <a:avLst/>
+          </a:prstGeom>
+          <a:solidFill>
             <a:srgbClr val="E8F5E9"/>
           </a:solidFill>
         </p:spPr>
         <p:txBody>
-          <a:bodyPr xmlns:a="http://schemas.openxmlformats.org/drawingml/2006/main"/>
-          <a:lstStyle xmlns:a="http://schemas.openxmlformats.org/drawingml/2006/main"/>
-          <a:p xmlns:a="http://schemas.openxmlformats.org/drawingml/2006/main">
+          <a:bodyPr/>
+          <a:lstStyle/>
+          <a:p>
             <a:r>
               <a:rPr lang="en-US" sz="1600" b="0">
                 <a:solidFill>
@@ -3314,7 +3863,7 @@
               <a:t>🌐 Dashboard</a:t>
             </a:r>
           </a:p>
-          <a:p xmlns:a="http://schemas.openxmlformats.org/drawingml/2006/main">
+          <a:p>
             <a:r>
               <a:rPr lang="en-US" sz="1600" b="0">
                 <a:solidFill>
@@ -3335,21 +3884,21 @@
           <p:nvPr/>
         </p:nvSpPr>
         <p:spPr>
-          <a:xfrm xmlns:a="http://schemas.openxmlformats.org/drawingml/2006/main">
+          <a:xfrm>
             <a:off x="3600000" y="3528000"/>
             <a:ext cx="2700000" cy="900000"/>
           </a:xfrm>
-          <a:prstGeom xmlns:a="http://schemas.openxmlformats.org/drawingml/2006/main" prst="rect">
-            <a:avLst/>
-          </a:prstGeom>
-          <a:solidFill xmlns:a="http://schemas.openxmlformats.org/drawingml/2006/main">
+          <a:prstGeom prst="rect">
+            <a:avLst/>
+          </a:prstGeom>
+          <a:solidFill>
             <a:srgbClr val="E8F5E9"/>
           </a:solidFill>
         </p:spPr>
         <p:txBody>
-          <a:bodyPr xmlns:a="http://schemas.openxmlformats.org/drawingml/2006/main"/>
-          <a:lstStyle xmlns:a="http://schemas.openxmlformats.org/drawingml/2006/main"/>
-          <a:p xmlns:a="http://schemas.openxmlformats.org/drawingml/2006/main">
+          <a:bodyPr/>
+          <a:lstStyle/>
+          <a:p>
             <a:r>
               <a:rPr lang="en-US" sz="1600" b="0">
                 <a:solidFill>
@@ -3361,7 +3910,7 @@
               <a:t>💾 Model Saving</a:t>
             </a:r>
           </a:p>
-          <a:p xmlns:a="http://schemas.openxmlformats.org/drawingml/2006/main">
+          <a:p>
             <a:r>
               <a:rPr lang="en-US" sz="1600" b="0">
                 <a:solidFill>
@@ -3382,21 +3931,21 @@
           <p:nvPr/>
         </p:nvSpPr>
         <p:spPr>
-          <a:xfrm xmlns:a="http://schemas.openxmlformats.org/drawingml/2006/main">
+          <a:xfrm>
             <a:off x="6660000" y="3528000"/>
             <a:ext cx="2700000" cy="900000"/>
           </a:xfrm>
-          <a:prstGeom xmlns:a="http://schemas.openxmlformats.org/drawingml/2006/main" prst="rect">
-            <a:avLst/>
-          </a:prstGeom>
-          <a:solidFill xmlns:a="http://schemas.openxmlformats.org/drawingml/2006/main">
+          <a:prstGeom prst="rect">
+            <a:avLst/>
+          </a:prstGeom>
+          <a:solidFill>
             <a:srgbClr val="E8F5E9"/>
           </a:solidFill>
         </p:spPr>
         <p:txBody>
-          <a:bodyPr xmlns:a="http://schemas.openxmlformats.org/drawingml/2006/main"/>
-          <a:lstStyle xmlns:a="http://schemas.openxmlformats.org/drawingml/2006/main"/>
-          <a:p xmlns:a="http://schemas.openxmlformats.org/drawingml/2006/main">
+          <a:bodyPr/>
+          <a:lstStyle/>
+          <a:p>
             <a:r>
               <a:rPr lang="en-US" sz="1600" b="0">
                 <a:solidFill>
@@ -3408,7 +3957,7 @@
               <a:t>📂 Version Control</a:t>
             </a:r>
           </a:p>
-          <a:p xmlns:a="http://schemas.openxmlformats.org/drawingml/2006/main">
+          <a:p>
             <a:r>
               <a:rPr lang="en-US" sz="1600" b="0">
                 <a:solidFill>
@@ -3429,21 +3978,21 @@
           <p:nvPr/>
         </p:nvSpPr>
         <p:spPr>
-          <a:xfrm xmlns:a="http://schemas.openxmlformats.org/drawingml/2006/main">
+          <a:xfrm>
             <a:off x="0" y="6660000"/>
             <a:ext cx="12193200" cy="216000"/>
           </a:xfrm>
-          <a:prstGeom xmlns:a="http://schemas.openxmlformats.org/drawingml/2006/main" prst="rect">
-            <a:avLst/>
-          </a:prstGeom>
-          <a:solidFill xmlns:a="http://schemas.openxmlformats.org/drawingml/2006/main">
+          <a:prstGeom prst="rect">
+            <a:avLst/>
+          </a:prstGeom>
+          <a:solidFill>
             <a:srgbClr val="0A0E2A"/>
           </a:solidFill>
         </p:spPr>
         <p:txBody>
-          <a:bodyPr xmlns:a="http://schemas.openxmlformats.org/drawingml/2006/main"/>
-          <a:lstStyle xmlns:a="http://schemas.openxmlformats.org/drawingml/2006/main"/>
-          <a:p xmlns:a="http://schemas.openxmlformats.org/drawingml/2006/main">
+          <a:bodyPr/>
+          <a:lstStyle/>
+          <a:p>
             <a:r>
               <a:rPr lang="en-US" sz="1100">
                 <a:solidFill>
@@ -3459,17 +4008,21 @@
       </p:sp>
     </p:spTree>
   </p:cSld>
+  <p:clrMapOvr>
+    <a:masterClrMapping/>
+  </p:clrMapOvr>
 </p:sld>
 </file>
 
 <file path=ppt/slides/slide5.xml><?xml version="1.0" encoding="utf-8"?>
-<p:sld xmlns:p="http://schemas.openxmlformats.org/presentationml/2006/main">
+<p:sld xmlns:a="http://schemas.openxmlformats.org/drawingml/2006/main" xmlns:r="http://schemas.openxmlformats.org/officeDocument/2006/relationships" xmlns:p="http://schemas.openxmlformats.org/presentationml/2006/main">
   <p:cSld>
     <p:bg>
       <p:bgPr>
-        <a:solidFill xmlns:a="http://schemas.openxmlformats.org/drawingml/2006/main">
+        <a:solidFill>
           <a:srgbClr val="0A0E2A"/>
         </a:solidFill>
+        <a:effectLst/>
       </p:bgPr>
     </p:bg>
     <p:spTree>
@@ -3478,7 +4031,14 @@
         <p:cNvGrpSpPr/>
         <p:nvPr/>
       </p:nvGrpSpPr>
-      <p:grpSpPr/>
+      <p:grpSpPr>
+        <a:xfrm>
+          <a:off x="0" y="0"/>
+          <a:ext cx="0" cy="0"/>
+          <a:chOff x="0" y="0"/>
+          <a:chExt cx="0" cy="0"/>
+        </a:xfrm>
+      </p:grpSpPr>
       <p:sp>
         <p:nvSpPr>
           <p:cNvPr id="100040" name="TopBar"/>
@@ -3486,21 +4046,21 @@
           <p:nvPr/>
         </p:nvSpPr>
         <p:spPr>
-          <a:xfrm xmlns:a="http://schemas.openxmlformats.org/drawingml/2006/main">
+          <a:xfrm>
             <a:off x="0" y="0"/>
             <a:ext cx="12193200" cy="180000"/>
           </a:xfrm>
-          <a:prstGeom xmlns:a="http://schemas.openxmlformats.org/drawingml/2006/main" prst="rect">
-            <a:avLst/>
-          </a:prstGeom>
-          <a:solidFill xmlns:a="http://schemas.openxmlformats.org/drawingml/2006/main">
+          <a:prstGeom prst="rect">
+            <a:avLst/>
+          </a:prstGeom>
+          <a:solidFill>
             <a:srgbClr val="F5A623"/>
           </a:solidFill>
         </p:spPr>
         <p:txBody>
-          <a:bodyPr xmlns:a="http://schemas.openxmlformats.org/drawingml/2006/main"/>
-          <a:lstStyle xmlns:a="http://schemas.openxmlformats.org/drawingml/2006/main"/>
-          <a:p xmlns:a="http://schemas.openxmlformats.org/drawingml/2006/main">
+          <a:bodyPr/>
+          <a:lstStyle/>
+          <a:p>
             <a:endParaRPr lang="en-US">
               <a:solidFill>
                 <a:srgbClr val="F5A623"/>
@@ -3516,18 +4076,18 @@
           <p:nvPr/>
         </p:nvSpPr>
         <p:spPr>
-          <a:xfrm xmlns:a="http://schemas.openxmlformats.org/drawingml/2006/main">
+          <a:xfrm>
             <a:off x="540000" y="360000"/>
             <a:ext cx="10080000" cy="540000"/>
           </a:xfrm>
-          <a:prstGeom xmlns:a="http://schemas.openxmlformats.org/drawingml/2006/main" prst="rect">
-            <a:avLst/>
-          </a:prstGeom>
-        </p:spPr>
-        <p:txBody>
-          <a:bodyPr xmlns:a="http://schemas.openxmlformats.org/drawingml/2006/main"/>
-          <a:lstStyle xmlns:a="http://schemas.openxmlformats.org/drawingml/2006/main"/>
-          <a:p xmlns:a="http://schemas.openxmlformats.org/drawingml/2006/main">
+          <a:prstGeom prst="rect">
+            <a:avLst/>
+          </a:prstGeom>
+        </p:spPr>
+        <p:txBody>
+          <a:bodyPr/>
+          <a:lstStyle/>
+          <a:p>
             <a:r>
               <a:rPr lang="en-US" sz="3200" b="1">
                 <a:solidFill>
@@ -3548,21 +4108,21 @@
           <p:nvPr/>
         </p:nvSpPr>
         <p:spPr>
-          <a:xfrm xmlns:a="http://schemas.openxmlformats.org/drawingml/2006/main">
+          <a:xfrm>
             <a:off x="540000" y="972000"/>
             <a:ext cx="1800000" cy="54000"/>
           </a:xfrm>
-          <a:prstGeom xmlns:a="http://schemas.openxmlformats.org/drawingml/2006/main" prst="rect">
-            <a:avLst/>
-          </a:prstGeom>
-          <a:solidFill xmlns:a="http://schemas.openxmlformats.org/drawingml/2006/main">
+          <a:prstGeom prst="rect">
+            <a:avLst/>
+          </a:prstGeom>
+          <a:solidFill>
             <a:srgbClr val="F5A623"/>
           </a:solidFill>
         </p:spPr>
         <p:txBody>
-          <a:bodyPr xmlns:a="http://schemas.openxmlformats.org/drawingml/2006/main"/>
-          <a:lstStyle xmlns:a="http://schemas.openxmlformats.org/drawingml/2006/main"/>
-          <a:p xmlns:a="http://schemas.openxmlformats.org/drawingml/2006/main">
+          <a:bodyPr/>
+          <a:lstStyle/>
+          <a:p>
             <a:endParaRPr lang="en-US">
               <a:solidFill>
                 <a:srgbClr val="F5A623"/>
@@ -3578,21 +4138,21 @@
           <p:nvPr/>
         </p:nvSpPr>
         <p:spPr>
-          <a:xfrm xmlns:a="http://schemas.openxmlformats.org/drawingml/2006/main">
+          <a:xfrm>
             <a:off x="360000" y="1260000"/>
             <a:ext cx="1980000" cy="2160000"/>
           </a:xfrm>
-          <a:prstGeom xmlns:a="http://schemas.openxmlformats.org/drawingml/2006/main" prst="rect">
-            <a:avLst/>
-          </a:prstGeom>
-          <a:solidFill xmlns:a="http://schemas.openxmlformats.org/drawingml/2006/main">
+          <a:prstGeom prst="rect">
+            <a:avLst/>
+          </a:prstGeom>
+          <a:solidFill>
             <a:srgbClr val="F5A623"/>
           </a:solidFill>
         </p:spPr>
         <p:txBody>
-          <a:bodyPr xmlns:a="http://schemas.openxmlformats.org/drawingml/2006/main"/>
-          <a:lstStyle xmlns:a="http://schemas.openxmlformats.org/drawingml/2006/main"/>
-          <a:p xmlns:a="http://schemas.openxmlformats.org/drawingml/2006/main">
+          <a:bodyPr/>
+          <a:lstStyle/>
+          <a:p>
             <a:r>
               <a:rPr lang="en-US" sz="1400" b="0">
                 <a:solidFill>
@@ -3604,7 +4164,7 @@
               <a:t>1️⃣</a:t>
             </a:r>
           </a:p>
-          <a:p xmlns:a="http://schemas.openxmlformats.org/drawingml/2006/main">
+          <a:p>
             <a:r>
               <a:rPr lang="en-US" sz="1400" b="0">
                 <a:solidFill>
@@ -3616,7 +4176,7 @@
               <a:t>DATA</a:t>
             </a:r>
           </a:p>
-          <a:p xmlns:a="http://schemas.openxmlformats.org/drawingml/2006/main">
+          <a:p>
             <a:r>
               <a:rPr lang="en-US" sz="1400" b="0">
                 <a:solidFill>
@@ -3628,7 +4188,7 @@
               <a:t>COLLECTION</a:t>
             </a:r>
           </a:p>
-          <a:p xmlns:a="http://schemas.openxmlformats.org/drawingml/2006/main">
+          <a:p>
             <a:r>
               <a:rPr lang="en-US" sz="1400" b="0">
                 <a:solidFill>
@@ -3640,7 +4200,7 @@
               <a:t>87,600 rows</a:t>
             </a:r>
           </a:p>
-          <a:p xmlns:a="http://schemas.openxmlformats.org/drawingml/2006/main">
+          <a:p>
             <a:r>
               <a:rPr lang="en-US" sz="1400" b="0">
                 <a:solidFill>
@@ -3652,7 +4212,7 @@
               <a:t>10 segments</a:t>
             </a:r>
           </a:p>
-          <a:p xmlns:a="http://schemas.openxmlformats.org/drawingml/2006/main">
+          <a:p>
             <a:r>
               <a:rPr lang="en-US" sz="1400" b="0">
                 <a:solidFill>
@@ -3673,18 +4233,18 @@
           <p:nvPr/>
         </p:nvSpPr>
         <p:spPr>
-          <a:xfrm xmlns:a="http://schemas.openxmlformats.org/drawingml/2006/main">
+          <a:xfrm>
             <a:off x="2520000" y="2088000"/>
             <a:ext cx="540000" cy="540000"/>
           </a:xfrm>
-          <a:prstGeom xmlns:a="http://schemas.openxmlformats.org/drawingml/2006/main" prst="rect">
-            <a:avLst/>
-          </a:prstGeom>
-        </p:spPr>
-        <p:txBody>
-          <a:bodyPr xmlns:a="http://schemas.openxmlformats.org/drawingml/2006/main"/>
-          <a:lstStyle xmlns:a="http://schemas.openxmlformats.org/drawingml/2006/main"/>
-          <a:p xmlns:a="http://schemas.openxmlformats.org/drawingml/2006/main">
+          <a:prstGeom prst="rect">
+            <a:avLst/>
+          </a:prstGeom>
+        </p:spPr>
+        <p:txBody>
+          <a:bodyPr/>
+          <a:lstStyle/>
+          <a:p>
             <a:r>
               <a:rPr lang="en-US" sz="2800" b="1">
                 <a:solidFill>
@@ -3705,21 +4265,21 @@
           <p:nvPr/>
         </p:nvSpPr>
         <p:spPr>
-          <a:xfrm xmlns:a="http://schemas.openxmlformats.org/drawingml/2006/main">
+          <a:xfrm>
             <a:off x="3168000" y="1260000"/>
             <a:ext cx="1980000" cy="2160000"/>
           </a:xfrm>
-          <a:prstGeom xmlns:a="http://schemas.openxmlformats.org/drawingml/2006/main" prst="rect">
-            <a:avLst/>
-          </a:prstGeom>
-          <a:solidFill xmlns:a="http://schemas.openxmlformats.org/drawingml/2006/main">
+          <a:prstGeom prst="rect">
+            <a:avLst/>
+          </a:prstGeom>
+          <a:solidFill>
             <a:srgbClr val="1A3A6A"/>
           </a:solidFill>
         </p:spPr>
         <p:txBody>
-          <a:bodyPr xmlns:a="http://schemas.openxmlformats.org/drawingml/2006/main"/>
-          <a:lstStyle xmlns:a="http://schemas.openxmlformats.org/drawingml/2006/main"/>
-          <a:p xmlns:a="http://schemas.openxmlformats.org/drawingml/2006/main">
+          <a:bodyPr/>
+          <a:lstStyle/>
+          <a:p>
             <a:r>
               <a:rPr lang="en-US" sz="1400" b="0">
                 <a:solidFill>
@@ -3731,7 +4291,7 @@
               <a:t>2️⃣</a:t>
             </a:r>
           </a:p>
-          <a:p xmlns:a="http://schemas.openxmlformats.org/drawingml/2006/main">
+          <a:p>
             <a:r>
               <a:rPr lang="en-US" sz="1400" b="0">
                 <a:solidFill>
@@ -3743,7 +4303,7 @@
               <a:t>PRE-</a:t>
             </a:r>
           </a:p>
-          <a:p xmlns:a="http://schemas.openxmlformats.org/drawingml/2006/main">
+          <a:p>
             <a:r>
               <a:rPr lang="en-US" sz="1400" b="0">
                 <a:solidFill>
@@ -3755,7 +4315,7 @@
               <a:t>PROCESSING</a:t>
             </a:r>
           </a:p>
-          <a:p xmlns:a="http://schemas.openxmlformats.org/drawingml/2006/main">
+          <a:p>
             <a:r>
               <a:rPr lang="en-US" sz="1400" b="0">
                 <a:solidFill>
@@ -3767,7 +4327,7 @@
               <a:t>Interpolation</a:t>
             </a:r>
           </a:p>
-          <a:p xmlns:a="http://schemas.openxmlformats.org/drawingml/2006/main">
+          <a:p>
             <a:r>
               <a:rPr lang="en-US" sz="1400" b="0">
                 <a:solidFill>
@@ -3779,7 +4339,7 @@
               <a:t>Cyclical Enc.</a:t>
             </a:r>
           </a:p>
-          <a:p xmlns:a="http://schemas.openxmlformats.org/drawingml/2006/main">
+          <a:p>
             <a:r>
               <a:rPr lang="en-US" sz="1400" b="0">
                 <a:solidFill>
@@ -3800,18 +4360,18 @@
           <p:nvPr/>
         </p:nvSpPr>
         <p:spPr>
-          <a:xfrm xmlns:a="http://schemas.openxmlformats.org/drawingml/2006/main">
+          <a:xfrm>
             <a:off x="5328000" y="2088000"/>
             <a:ext cx="540000" cy="540000"/>
           </a:xfrm>
-          <a:prstGeom xmlns:a="http://schemas.openxmlformats.org/drawingml/2006/main" prst="rect">
-            <a:avLst/>
-          </a:prstGeom>
-        </p:spPr>
-        <p:txBody>
-          <a:bodyPr xmlns:a="http://schemas.openxmlformats.org/drawingml/2006/main"/>
-          <a:lstStyle xmlns:a="http://schemas.openxmlformats.org/drawingml/2006/main"/>
-          <a:p xmlns:a="http://schemas.openxmlformats.org/drawingml/2006/main">
+          <a:prstGeom prst="rect">
+            <a:avLst/>
+          </a:prstGeom>
+        </p:spPr>
+        <p:txBody>
+          <a:bodyPr/>
+          <a:lstStyle/>
+          <a:p>
             <a:r>
               <a:rPr lang="en-US" sz="2800" b="1">
                 <a:solidFill>
@@ -3832,21 +4392,21 @@
           <p:nvPr/>
         </p:nvSpPr>
         <p:spPr>
-          <a:xfrm xmlns:a="http://schemas.openxmlformats.org/drawingml/2006/main">
+          <a:xfrm>
             <a:off x="5940000" y="1260000"/>
             <a:ext cx="1980000" cy="2160000"/>
           </a:xfrm>
-          <a:prstGeom xmlns:a="http://schemas.openxmlformats.org/drawingml/2006/main" prst="rect">
-            <a:avLst/>
-          </a:prstGeom>
-          <a:solidFill xmlns:a="http://schemas.openxmlformats.org/drawingml/2006/main">
+          <a:prstGeom prst="rect">
+            <a:avLst/>
+          </a:prstGeom>
+          <a:solidFill>
             <a:srgbClr val="F5A623"/>
           </a:solidFill>
         </p:spPr>
         <p:txBody>
-          <a:bodyPr xmlns:a="http://schemas.openxmlformats.org/drawingml/2006/main"/>
-          <a:lstStyle xmlns:a="http://schemas.openxmlformats.org/drawingml/2006/main"/>
-          <a:p xmlns:a="http://schemas.openxmlformats.org/drawingml/2006/main">
+          <a:bodyPr/>
+          <a:lstStyle/>
+          <a:p>
             <a:r>
               <a:rPr lang="en-US" sz="1400" b="0">
                 <a:solidFill>
@@ -3858,7 +4418,7 @@
               <a:t>3️⃣</a:t>
             </a:r>
           </a:p>
-          <a:p xmlns:a="http://schemas.openxmlformats.org/drawingml/2006/main">
+          <a:p>
             <a:r>
               <a:rPr lang="en-US" sz="1400" b="0">
                 <a:solidFill>
@@ -3870,7 +4430,7 @@
               <a:t>FEATURE</a:t>
             </a:r>
           </a:p>
-          <a:p xmlns:a="http://schemas.openxmlformats.org/drawingml/2006/main">
+          <a:p>
             <a:r>
               <a:rPr lang="en-US" sz="1400" b="0">
                 <a:solidFill>
@@ -3882,7 +4442,7 @@
               <a:t>ENGINEERING</a:t>
             </a:r>
           </a:p>
-          <a:p xmlns:a="http://schemas.openxmlformats.org/drawingml/2006/main">
+          <a:p>
             <a:r>
               <a:rPr lang="en-US" sz="1400" b="0">
                 <a:solidFill>
@@ -3894,7 +4454,7 @@
               <a:t>Lag Features</a:t>
             </a:r>
           </a:p>
-          <a:p xmlns:a="http://schemas.openxmlformats.org/drawingml/2006/main">
+          <a:p>
             <a:r>
               <a:rPr lang="en-US" sz="1400" b="0">
                 <a:solidFill>
@@ -3906,7 +4466,7 @@
               <a:t>Rolling Stats</a:t>
             </a:r>
           </a:p>
-          <a:p xmlns:a="http://schemas.openxmlformats.org/drawingml/2006/main">
+          <a:p>
             <a:r>
               <a:rPr lang="en-US" sz="1400" b="0">
                 <a:solidFill>
@@ -3927,18 +4487,18 @@
           <p:nvPr/>
         </p:nvSpPr>
         <p:spPr>
-          <a:xfrm xmlns:a="http://schemas.openxmlformats.org/drawingml/2006/main">
+          <a:xfrm>
             <a:off x="8100000" y="2088000"/>
             <a:ext cx="540000" cy="540000"/>
           </a:xfrm>
-          <a:prstGeom xmlns:a="http://schemas.openxmlformats.org/drawingml/2006/main" prst="rect">
-            <a:avLst/>
-          </a:prstGeom>
-        </p:spPr>
-        <p:txBody>
-          <a:bodyPr xmlns:a="http://schemas.openxmlformats.org/drawingml/2006/main"/>
-          <a:lstStyle xmlns:a="http://schemas.openxmlformats.org/drawingml/2006/main"/>
-          <a:p xmlns:a="http://schemas.openxmlformats.org/drawingml/2006/main">
+          <a:prstGeom prst="rect">
+            <a:avLst/>
+          </a:prstGeom>
+        </p:spPr>
+        <p:txBody>
+          <a:bodyPr/>
+          <a:lstStyle/>
+          <a:p>
             <a:r>
               <a:rPr lang="en-US" sz="2800" b="1">
                 <a:solidFill>
@@ -3959,21 +4519,21 @@
           <p:nvPr/>
         </p:nvSpPr>
         <p:spPr>
-          <a:xfrm xmlns:a="http://schemas.openxmlformats.org/drawingml/2006/main">
+          <a:xfrm>
             <a:off x="8712000" y="1260000"/>
             <a:ext cx="1980000" cy="2160000"/>
           </a:xfrm>
-          <a:prstGeom xmlns:a="http://schemas.openxmlformats.org/drawingml/2006/main" prst="rect">
-            <a:avLst/>
-          </a:prstGeom>
-          <a:solidFill xmlns:a="http://schemas.openxmlformats.org/drawingml/2006/main">
+          <a:prstGeom prst="rect">
+            <a:avLst/>
+          </a:prstGeom>
+          <a:solidFill>
             <a:srgbClr val="1A3A6A"/>
           </a:solidFill>
         </p:spPr>
         <p:txBody>
-          <a:bodyPr xmlns:a="http://schemas.openxmlformats.org/drawingml/2006/main"/>
-          <a:lstStyle xmlns:a="http://schemas.openxmlformats.org/drawingml/2006/main"/>
-          <a:p xmlns:a="http://schemas.openxmlformats.org/drawingml/2006/main">
+          <a:bodyPr/>
+          <a:lstStyle/>
+          <a:p>
             <a:r>
               <a:rPr lang="en-US" sz="1400" b="0">
                 <a:solidFill>
@@ -3985,7 +4545,7 @@
               <a:t>4️⃣</a:t>
             </a:r>
           </a:p>
-          <a:p xmlns:a="http://schemas.openxmlformats.org/drawingml/2006/main">
+          <a:p>
             <a:r>
               <a:rPr lang="en-US" sz="1400" b="0">
                 <a:solidFill>
@@ -3997,7 +4557,7 @@
               <a:t>ML MODELS</a:t>
             </a:r>
           </a:p>
-          <a:p xmlns:a="http://schemas.openxmlformats.org/drawingml/2006/main">
+          <a:p>
             <a:r>
               <a:rPr lang="en-US" sz="1400" b="0">
                 <a:solidFill>
@@ -4009,7 +4569,7 @@
               <a:t>Random Forest</a:t>
             </a:r>
           </a:p>
-          <a:p xmlns:a="http://schemas.openxmlformats.org/drawingml/2006/main">
+          <a:p>
             <a:r>
               <a:rPr lang="en-US" sz="1400" b="0">
                 <a:solidFill>
@@ -4021,7 +4581,7 @@
               <a:t>XGBoost</a:t>
             </a:r>
           </a:p>
-          <a:p xmlns:a="http://schemas.openxmlformats.org/drawingml/2006/main">
+          <a:p>
             <a:r>
               <a:rPr lang="en-US" sz="1400" b="0">
                 <a:solidFill>
@@ -4042,18 +4602,18 @@
           <p:nvPr/>
         </p:nvSpPr>
         <p:spPr>
-          <a:xfrm xmlns:a="http://schemas.openxmlformats.org/drawingml/2006/main">
+          <a:xfrm>
             <a:off x="10872000" y="2088000"/>
             <a:ext cx="540000" cy="540000"/>
           </a:xfrm>
-          <a:prstGeom xmlns:a="http://schemas.openxmlformats.org/drawingml/2006/main" prst="rect">
-            <a:avLst/>
-          </a:prstGeom>
-        </p:spPr>
-        <p:txBody>
-          <a:bodyPr xmlns:a="http://schemas.openxmlformats.org/drawingml/2006/main"/>
-          <a:lstStyle xmlns:a="http://schemas.openxmlformats.org/drawingml/2006/main"/>
-          <a:p xmlns:a="http://schemas.openxmlformats.org/drawingml/2006/main">
+          <a:prstGeom prst="rect">
+            <a:avLst/>
+          </a:prstGeom>
+        </p:spPr>
+        <p:txBody>
+          <a:bodyPr/>
+          <a:lstStyle/>
+          <a:p>
             <a:r>
               <a:rPr lang="en-US" sz="2800" b="1">
                 <a:solidFill>
@@ -4074,21 +4634,21 @@
           <p:nvPr/>
         </p:nvSpPr>
         <p:spPr>
-          <a:xfrm xmlns:a="http://schemas.openxmlformats.org/drawingml/2006/main">
+          <a:xfrm>
             <a:off x="11520000" y="1260000"/>
             <a:ext cx="540000" cy="2160000"/>
           </a:xfrm>
-          <a:prstGeom xmlns:a="http://schemas.openxmlformats.org/drawingml/2006/main" prst="rect">
-            <a:avLst/>
-          </a:prstGeom>
-          <a:solidFill xmlns:a="http://schemas.openxmlformats.org/drawingml/2006/main">
+          <a:prstGeom prst="rect">
+            <a:avLst/>
+          </a:prstGeom>
+          <a:solidFill>
             <a:srgbClr val="F5A623"/>
           </a:solidFill>
         </p:spPr>
         <p:txBody>
-          <a:bodyPr xmlns:a="http://schemas.openxmlformats.org/drawingml/2006/main"/>
-          <a:lstStyle xmlns:a="http://schemas.openxmlformats.org/drawingml/2006/main"/>
-          <a:p xmlns:a="http://schemas.openxmlformats.org/drawingml/2006/main">
+          <a:bodyPr/>
+          <a:lstStyle/>
+          <a:p>
             <a:r>
               <a:rPr lang="en-US" sz="1000" b="0">
                 <a:solidFill>
@@ -4100,7 +4660,7 @@
               <a:t>5️⃣</a:t>
             </a:r>
           </a:p>
-          <a:p xmlns:a="http://schemas.openxmlformats.org/drawingml/2006/main">
+          <a:p>
             <a:r>
               <a:rPr lang="en-US" sz="1000" b="0">
                 <a:solidFill>
@@ -4112,7 +4672,7 @@
               <a:t>DASHBOARD</a:t>
             </a:r>
           </a:p>
-          <a:p xmlns:a="http://schemas.openxmlformats.org/drawingml/2006/main">
+          <a:p>
             <a:r>
               <a:rPr lang="en-US" sz="1000" b="0">
                 <a:solidFill>
@@ -4124,7 +4684,7 @@
               <a:t>&amp; ALERTS</a:t>
             </a:r>
           </a:p>
-          <a:p xmlns:a="http://schemas.openxmlformats.org/drawingml/2006/main">
+          <a:p>
             <a:r>
               <a:rPr lang="en-US" sz="1000" b="0">
                 <a:solidFill>
@@ -4136,7 +4696,7 @@
               <a:t>Forecasts</a:t>
             </a:r>
           </a:p>
-          <a:p xmlns:a="http://schemas.openxmlformats.org/drawingml/2006/main">
+          <a:p>
             <a:r>
               <a:rPr lang="en-US" sz="1000" b="0">
                 <a:solidFill>
@@ -4148,7 +4708,7 @@
               <a:t>Heatmap</a:t>
             </a:r>
           </a:p>
-          <a:p xmlns:a="http://schemas.openxmlformats.org/drawingml/2006/main">
+          <a:p>
             <a:r>
               <a:rPr lang="en-US" sz="1000" b="0">
                 <a:solidFill>
@@ -4169,21 +4729,21 @@
           <p:nvPr/>
         </p:nvSpPr>
         <p:spPr>
-          <a:xfrm xmlns:a="http://schemas.openxmlformats.org/drawingml/2006/main">
+          <a:xfrm>
             <a:off x="0" y="6660000"/>
             <a:ext cx="12193200" cy="216000"/>
           </a:xfrm>
-          <a:prstGeom xmlns:a="http://schemas.openxmlformats.org/drawingml/2006/main" prst="rect">
-            <a:avLst/>
-          </a:prstGeom>
-          <a:solidFill xmlns:a="http://schemas.openxmlformats.org/drawingml/2006/main">
+          <a:prstGeom prst="rect">
+            <a:avLst/>
+          </a:prstGeom>
+          <a:solidFill>
             <a:srgbClr val="1A2540"/>
           </a:solidFill>
         </p:spPr>
         <p:txBody>
-          <a:bodyPr xmlns:a="http://schemas.openxmlformats.org/drawingml/2006/main"/>
-          <a:lstStyle xmlns:a="http://schemas.openxmlformats.org/drawingml/2006/main"/>
-          <a:p xmlns:a="http://schemas.openxmlformats.org/drawingml/2006/main">
+          <a:bodyPr/>
+          <a:lstStyle/>
+          <a:p>
             <a:r>
               <a:rPr lang="en-US" sz="1100">
                 <a:solidFill>
@@ -4199,17 +4759,21 @@
       </p:sp>
     </p:spTree>
   </p:cSld>
+  <p:clrMapOvr>
+    <a:masterClrMapping/>
+  </p:clrMapOvr>
 </p:sld>
 </file>
 
 <file path=ppt/slides/slide6.xml><?xml version="1.0" encoding="utf-8"?>
-<p:sld xmlns:p="http://schemas.openxmlformats.org/presentationml/2006/main">
+<p:sld xmlns:a="http://schemas.openxmlformats.org/drawingml/2006/main" xmlns:r="http://schemas.openxmlformats.org/officeDocument/2006/relationships" xmlns:p="http://schemas.openxmlformats.org/presentationml/2006/main">
   <p:cSld>
     <p:bg>
       <p:bgPr>
-        <a:solidFill xmlns:a="http://schemas.openxmlformats.org/drawingml/2006/main">
+        <a:solidFill>
           <a:srgbClr val="FFFFFF"/>
         </a:solidFill>
+        <a:effectLst/>
       </p:bgPr>
     </p:bg>
     <p:spTree>
@@ -4218,7 +4782,14 @@
         <p:cNvGrpSpPr/>
         <p:nvPr/>
       </p:nvGrpSpPr>
-      <p:grpSpPr/>
+      <p:grpSpPr>
+        <a:xfrm>
+          <a:off x="0" y="0"/>
+          <a:ext cx="0" cy="0"/>
+          <a:chOff x="0" y="0"/>
+          <a:chExt cx="0" cy="0"/>
+        </a:xfrm>
+      </p:grpSpPr>
       <p:sp>
         <p:nvSpPr>
           <p:cNvPr id="100053" name="TopBar"/>
@@ -4226,21 +4797,21 @@
           <p:nvPr/>
         </p:nvSpPr>
         <p:spPr>
-          <a:xfrm xmlns:a="http://schemas.openxmlformats.org/drawingml/2006/main">
+          <a:xfrm>
             <a:off x="0" y="0"/>
             <a:ext cx="12193200" cy="180000"/>
           </a:xfrm>
-          <a:prstGeom xmlns:a="http://schemas.openxmlformats.org/drawingml/2006/main" prst="rect">
-            <a:avLst/>
-          </a:prstGeom>
-          <a:solidFill xmlns:a="http://schemas.openxmlformats.org/drawingml/2006/main">
+          <a:prstGeom prst="rect">
+            <a:avLst/>
+          </a:prstGeom>
+          <a:solidFill>
             <a:srgbClr val="F5A623"/>
           </a:solidFill>
         </p:spPr>
         <p:txBody>
-          <a:bodyPr xmlns:a="http://schemas.openxmlformats.org/drawingml/2006/main"/>
-          <a:lstStyle xmlns:a="http://schemas.openxmlformats.org/drawingml/2006/main"/>
-          <a:p xmlns:a="http://schemas.openxmlformats.org/drawingml/2006/main">
+          <a:bodyPr/>
+          <a:lstStyle/>
+          <a:p>
             <a:endParaRPr lang="en-US">
               <a:solidFill>
                 <a:srgbClr val="F5A623"/>
@@ -4256,18 +4827,18 @@
           <p:nvPr/>
         </p:nvSpPr>
         <p:spPr>
-          <a:xfrm xmlns:a="http://schemas.openxmlformats.org/drawingml/2006/main">
+          <a:xfrm>
             <a:off x="540000" y="360000"/>
             <a:ext cx="10080000" cy="540000"/>
           </a:xfrm>
-          <a:prstGeom xmlns:a="http://schemas.openxmlformats.org/drawingml/2006/main" prst="rect">
-            <a:avLst/>
-          </a:prstGeom>
-        </p:spPr>
-        <p:txBody>
-          <a:bodyPr xmlns:a="http://schemas.openxmlformats.org/drawingml/2006/main"/>
-          <a:lstStyle xmlns:a="http://schemas.openxmlformats.org/drawingml/2006/main"/>
-          <a:p xmlns:a="http://schemas.openxmlformats.org/drawingml/2006/main">
+          <a:prstGeom prst="rect">
+            <a:avLst/>
+          </a:prstGeom>
+        </p:spPr>
+        <p:txBody>
+          <a:bodyPr/>
+          <a:lstStyle/>
+          <a:p>
             <a:r>
               <a:rPr lang="en-US" sz="3200" b="1">
                 <a:solidFill>
@@ -4288,21 +4859,21 @@
           <p:nvPr/>
         </p:nvSpPr>
         <p:spPr>
-          <a:xfrm xmlns:a="http://schemas.openxmlformats.org/drawingml/2006/main">
+          <a:xfrm>
             <a:off x="540000" y="972000"/>
             <a:ext cx="1800000" cy="54000"/>
           </a:xfrm>
-          <a:prstGeom xmlns:a="http://schemas.openxmlformats.org/drawingml/2006/main" prst="rect">
-            <a:avLst/>
-          </a:prstGeom>
-          <a:solidFill xmlns:a="http://schemas.openxmlformats.org/drawingml/2006/main">
+          <a:prstGeom prst="rect">
+            <a:avLst/>
+          </a:prstGeom>
+          <a:solidFill>
             <a:srgbClr val="F5A623"/>
           </a:solidFill>
         </p:spPr>
         <p:txBody>
-          <a:bodyPr xmlns:a="http://schemas.openxmlformats.org/drawingml/2006/main"/>
-          <a:lstStyle xmlns:a="http://schemas.openxmlformats.org/drawingml/2006/main"/>
-          <a:p xmlns:a="http://schemas.openxmlformats.org/drawingml/2006/main">
+          <a:bodyPr/>
+          <a:lstStyle/>
+          <a:p>
             <a:endParaRPr lang="en-US">
               <a:solidFill>
                 <a:srgbClr val="F5A623"/>
@@ -4318,18 +4889,18 @@
           <p:nvPr/>
         </p:nvSpPr>
         <p:spPr>
-          <a:xfrm xmlns:a="http://schemas.openxmlformats.org/drawingml/2006/main">
+          <a:xfrm>
             <a:off x="540000" y="1152000"/>
             <a:ext cx="10440000" cy="324000"/>
           </a:xfrm>
-          <a:prstGeom xmlns:a="http://schemas.openxmlformats.org/drawingml/2006/main" prst="rect">
-            <a:avLst/>
-          </a:prstGeom>
-        </p:spPr>
-        <p:txBody>
-          <a:bodyPr xmlns:a="http://schemas.openxmlformats.org/drawingml/2006/main"/>
-          <a:lstStyle xmlns:a="http://schemas.openxmlformats.org/drawingml/2006/main"/>
-          <a:p xmlns:a="http://schemas.openxmlformats.org/drawingml/2006/main">
+          <a:prstGeom prst="rect">
+            <a:avLst/>
+          </a:prstGeom>
+        </p:spPr>
+        <p:txBody>
+          <a:bodyPr/>
+          <a:lstStyle/>
+          <a:p>
             <a:r>
               <a:rPr lang="en-US" sz="1800" b="1">
                 <a:solidFill>
@@ -4350,18 +4921,18 @@
           <p:nvPr/>
         </p:nvSpPr>
         <p:spPr>
-          <a:xfrm xmlns:a="http://schemas.openxmlformats.org/drawingml/2006/main">
+          <a:xfrm>
             <a:off x="720000" y="1512000"/>
             <a:ext cx="10080000" cy="540000"/>
           </a:xfrm>
-          <a:prstGeom xmlns:a="http://schemas.openxmlformats.org/drawingml/2006/main" prst="rect">
-            <a:avLst/>
-          </a:prstGeom>
-        </p:spPr>
-        <p:txBody>
-          <a:bodyPr xmlns:a="http://schemas.openxmlformats.org/drawingml/2006/main"/>
-          <a:lstStyle xmlns:a="http://schemas.openxmlformats.org/drawingml/2006/main"/>
-          <a:p xmlns:a="http://schemas.openxmlformats.org/drawingml/2006/main">
+          <a:prstGeom prst="rect">
+            <a:avLst/>
+          </a:prstGeom>
+        </p:spPr>
+        <p:txBody>
+          <a:bodyPr/>
+          <a:lstStyle/>
+          <a:p>
             <a:r>
               <a:rPr lang="en-US" sz="1600">
                 <a:solidFill>
@@ -4373,7 +4944,7 @@
               <a:t>• Vehicle volume at t-1, t-2, t-3 hours</a:t>
             </a:r>
           </a:p>
-          <a:p xmlns:a="http://schemas.openxmlformats.org/drawingml/2006/main">
+          <a:p>
             <a:r>
               <a:rPr lang="en-US" sz="1600">
                 <a:solidFill>
@@ -4394,18 +4965,18 @@
           <p:nvPr/>
         </p:nvSpPr>
         <p:spPr>
-          <a:xfrm xmlns:a="http://schemas.openxmlformats.org/drawingml/2006/main">
+          <a:xfrm>
             <a:off x="540000" y="2160000"/>
             <a:ext cx="10440000" cy="324000"/>
           </a:xfrm>
-          <a:prstGeom xmlns:a="http://schemas.openxmlformats.org/drawingml/2006/main" prst="rect">
-            <a:avLst/>
-          </a:prstGeom>
-        </p:spPr>
-        <p:txBody>
-          <a:bodyPr xmlns:a="http://schemas.openxmlformats.org/drawingml/2006/main"/>
-          <a:lstStyle xmlns:a="http://schemas.openxmlformats.org/drawingml/2006/main"/>
-          <a:p xmlns:a="http://schemas.openxmlformats.org/drawingml/2006/main">
+          <a:prstGeom prst="rect">
+            <a:avLst/>
+          </a:prstGeom>
+        </p:spPr>
+        <p:txBody>
+          <a:bodyPr/>
+          <a:lstStyle/>
+          <a:p>
             <a:r>
               <a:rPr lang="en-US" sz="1800" b="1">
                 <a:solidFill>
@@ -4426,18 +4997,18 @@
           <p:nvPr/>
         </p:nvSpPr>
         <p:spPr>
-          <a:xfrm xmlns:a="http://schemas.openxmlformats.org/drawingml/2006/main">
+          <a:xfrm>
             <a:off x="720000" y="2520000"/>
             <a:ext cx="10080000" cy="540000"/>
           </a:xfrm>
-          <a:prstGeom xmlns:a="http://schemas.openxmlformats.org/drawingml/2006/main" prst="rect">
-            <a:avLst/>
-          </a:prstGeom>
-        </p:spPr>
-        <p:txBody>
-          <a:bodyPr xmlns:a="http://schemas.openxmlformats.org/drawingml/2006/main"/>
-          <a:lstStyle xmlns:a="http://schemas.openxmlformats.org/drawingml/2006/main"/>
-          <a:p xmlns:a="http://schemas.openxmlformats.org/drawingml/2006/main">
+          <a:prstGeom prst="rect">
+            <a:avLst/>
+          </a:prstGeom>
+        </p:spPr>
+        <p:txBody>
+          <a:bodyPr/>
+          <a:lstStyle/>
+          <a:p>
             <a:r>
               <a:rPr lang="en-US" sz="1600">
                 <a:solidFill>
@@ -4449,7 +5020,7 @@
               <a:t>• 3-hour, 6-hour, 24-hour moving average</a:t>
             </a:r>
           </a:p>
-          <a:p xmlns:a="http://schemas.openxmlformats.org/drawingml/2006/main">
+          <a:p>
             <a:r>
               <a:rPr lang="en-US" sz="1600">
                 <a:solidFill>
@@ -4470,18 +5041,18 @@
           <p:nvPr/>
         </p:nvSpPr>
         <p:spPr>
-          <a:xfrm xmlns:a="http://schemas.openxmlformats.org/drawingml/2006/main">
+          <a:xfrm>
             <a:off x="540000" y="3168000"/>
             <a:ext cx="10440000" cy="324000"/>
           </a:xfrm>
-          <a:prstGeom xmlns:a="http://schemas.openxmlformats.org/drawingml/2006/main" prst="rect">
-            <a:avLst/>
-          </a:prstGeom>
-        </p:spPr>
-        <p:txBody>
-          <a:bodyPr xmlns:a="http://schemas.openxmlformats.org/drawingml/2006/main"/>
-          <a:lstStyle xmlns:a="http://schemas.openxmlformats.org/drawingml/2006/main"/>
-          <a:p xmlns:a="http://schemas.openxmlformats.org/drawingml/2006/main">
+          <a:prstGeom prst="rect">
+            <a:avLst/>
+          </a:prstGeom>
+        </p:spPr>
+        <p:txBody>
+          <a:bodyPr/>
+          <a:lstStyle/>
+          <a:p>
             <a:r>
               <a:rPr lang="en-US" sz="1800" b="1">
                 <a:solidFill>
@@ -4502,18 +5073,18 @@
           <p:nvPr/>
         </p:nvSpPr>
         <p:spPr>
-          <a:xfrm xmlns:a="http://schemas.openxmlformats.org/drawingml/2006/main">
+          <a:xfrm>
             <a:off x="720000" y="3528000"/>
             <a:ext cx="10080000" cy="360000"/>
           </a:xfrm>
-          <a:prstGeom xmlns:a="http://schemas.openxmlformats.org/drawingml/2006/main" prst="rect">
-            <a:avLst/>
-          </a:prstGeom>
-        </p:spPr>
-        <p:txBody>
-          <a:bodyPr xmlns:a="http://schemas.openxmlformats.org/drawingml/2006/main"/>
-          <a:lstStyle xmlns:a="http://schemas.openxmlformats.org/drawingml/2006/main"/>
-          <a:p xmlns:a="http://schemas.openxmlformats.org/drawingml/2006/main">
+          <a:prstGeom prst="rect">
+            <a:avLst/>
+          </a:prstGeom>
+        </p:spPr>
+        <p:txBody>
+          <a:bodyPr/>
+          <a:lstStyle/>
+          <a:p>
             <a:r>
               <a:rPr lang="en-US" sz="1600">
                 <a:solidFill>
@@ -4534,18 +5105,18 @@
           <p:nvPr/>
         </p:nvSpPr>
         <p:spPr>
-          <a:xfrm xmlns:a="http://schemas.openxmlformats.org/drawingml/2006/main">
+          <a:xfrm>
             <a:off x="540000" y="4032000"/>
             <a:ext cx="10440000" cy="324000"/>
           </a:xfrm>
-          <a:prstGeom xmlns:a="http://schemas.openxmlformats.org/drawingml/2006/main" prst="rect">
-            <a:avLst/>
-          </a:prstGeom>
-        </p:spPr>
-        <p:txBody>
-          <a:bodyPr xmlns:a="http://schemas.openxmlformats.org/drawingml/2006/main"/>
-          <a:lstStyle xmlns:a="http://schemas.openxmlformats.org/drawingml/2006/main"/>
-          <a:p xmlns:a="http://schemas.openxmlformats.org/drawingml/2006/main">
+          <a:prstGeom prst="rect">
+            <a:avLst/>
+          </a:prstGeom>
+        </p:spPr>
+        <p:txBody>
+          <a:bodyPr/>
+          <a:lstStyle/>
+          <a:p>
             <a:r>
               <a:rPr lang="en-US" sz="1800" b="1">
                 <a:solidFill>
@@ -4566,18 +5137,18 @@
           <p:nvPr/>
         </p:nvSpPr>
         <p:spPr>
-          <a:xfrm xmlns:a="http://schemas.openxmlformats.org/drawingml/2006/main">
+          <a:xfrm>
             <a:off x="720000" y="4392000"/>
             <a:ext cx="10080000" cy="360000"/>
           </a:xfrm>
-          <a:prstGeom xmlns:a="http://schemas.openxmlformats.org/drawingml/2006/main" prst="rect">
-            <a:avLst/>
-          </a:prstGeom>
-        </p:spPr>
-        <p:txBody>
-          <a:bodyPr xmlns:a="http://schemas.openxmlformats.org/drawingml/2006/main"/>
-          <a:lstStyle xmlns:a="http://schemas.openxmlformats.org/drawingml/2006/main"/>
-          <a:p xmlns:a="http://schemas.openxmlformats.org/drawingml/2006/main">
+          <a:prstGeom prst="rect">
+            <a:avLst/>
+          </a:prstGeom>
+        </p:spPr>
+        <p:txBody>
+          <a:bodyPr/>
+          <a:lstStyle/>
+          <a:p>
             <a:r>
               <a:rPr lang="en-US" sz="1600">
                 <a:solidFill>
@@ -4598,21 +5169,21 @@
           <p:nvPr/>
         </p:nvSpPr>
         <p:spPr>
-          <a:xfrm xmlns:a="http://schemas.openxmlformats.org/drawingml/2006/main">
+          <a:xfrm>
             <a:off x="0" y="6660000"/>
             <a:ext cx="12193200" cy="216000"/>
           </a:xfrm>
-          <a:prstGeom xmlns:a="http://schemas.openxmlformats.org/drawingml/2006/main" prst="rect">
-            <a:avLst/>
-          </a:prstGeom>
-          <a:solidFill xmlns:a="http://schemas.openxmlformats.org/drawingml/2006/main">
+          <a:prstGeom prst="rect">
+            <a:avLst/>
+          </a:prstGeom>
+          <a:solidFill>
             <a:srgbClr val="0A0E2A"/>
           </a:solidFill>
         </p:spPr>
         <p:txBody>
-          <a:bodyPr xmlns:a="http://schemas.openxmlformats.org/drawingml/2006/main"/>
-          <a:lstStyle xmlns:a="http://schemas.openxmlformats.org/drawingml/2006/main"/>
-          <a:p xmlns:a="http://schemas.openxmlformats.org/drawingml/2006/main">
+          <a:bodyPr/>
+          <a:lstStyle/>
+          <a:p>
             <a:r>
               <a:rPr lang="en-US" sz="1100">
                 <a:solidFill>
@@ -4628,17 +5199,21 @@
       </p:sp>
     </p:spTree>
   </p:cSld>
+  <p:clrMapOvr>
+    <a:masterClrMapping/>
+  </p:clrMapOvr>
 </p:sld>
 </file>
 
 <file path=ppt/slides/slide7.xml><?xml version="1.0" encoding="utf-8"?>
-<p:sld xmlns:p="http://schemas.openxmlformats.org/presentationml/2006/main">
+<p:sld xmlns:a="http://schemas.openxmlformats.org/drawingml/2006/main" xmlns:r="http://schemas.openxmlformats.org/officeDocument/2006/relationships" xmlns:p="http://schemas.openxmlformats.org/presentationml/2006/main">
   <p:cSld>
     <p:bg>
       <p:bgPr>
-        <a:solidFill xmlns:a="http://schemas.openxmlformats.org/drawingml/2006/main">
+        <a:solidFill>
           <a:srgbClr val="0A0E2A"/>
         </a:solidFill>
+        <a:effectLst/>
       </p:bgPr>
     </p:bg>
     <p:spTree>
@@ -4647,7 +5222,14 @@
         <p:cNvGrpSpPr/>
         <p:nvPr/>
       </p:nvGrpSpPr>
-      <p:grpSpPr/>
+      <p:grpSpPr>
+        <a:xfrm>
+          <a:off x="0" y="0"/>
+          <a:ext cx="0" cy="0"/>
+          <a:chOff x="0" y="0"/>
+          <a:chExt cx="0" cy="0"/>
+        </a:xfrm>
+      </p:grpSpPr>
       <p:sp>
         <p:nvSpPr>
           <p:cNvPr id="100065" name="TopBar"/>
@@ -4655,21 +5237,21 @@
           <p:nvPr/>
         </p:nvSpPr>
         <p:spPr>
-          <a:xfrm xmlns:a="http://schemas.openxmlformats.org/drawingml/2006/main">
+          <a:xfrm>
             <a:off x="0" y="0"/>
             <a:ext cx="12193200" cy="180000"/>
           </a:xfrm>
-          <a:prstGeom xmlns:a="http://schemas.openxmlformats.org/drawingml/2006/main" prst="rect">
-            <a:avLst/>
-          </a:prstGeom>
-          <a:solidFill xmlns:a="http://schemas.openxmlformats.org/drawingml/2006/main">
+          <a:prstGeom prst="rect">
+            <a:avLst/>
+          </a:prstGeom>
+          <a:solidFill>
             <a:srgbClr val="F5A623"/>
           </a:solidFill>
         </p:spPr>
         <p:txBody>
-          <a:bodyPr xmlns:a="http://schemas.openxmlformats.org/drawingml/2006/main"/>
-          <a:lstStyle xmlns:a="http://schemas.openxmlformats.org/drawingml/2006/main"/>
-          <a:p xmlns:a="http://schemas.openxmlformats.org/drawingml/2006/main">
+          <a:bodyPr/>
+          <a:lstStyle/>
+          <a:p>
             <a:endParaRPr lang="en-US">
               <a:solidFill>
                 <a:srgbClr val="F5A623"/>
@@ -4685,18 +5267,18 @@
           <p:nvPr/>
         </p:nvSpPr>
         <p:spPr>
-          <a:xfrm xmlns:a="http://schemas.openxmlformats.org/drawingml/2006/main">
+          <a:xfrm>
             <a:off x="540000" y="360000"/>
             <a:ext cx="10080000" cy="540000"/>
           </a:xfrm>
-          <a:prstGeom xmlns:a="http://schemas.openxmlformats.org/drawingml/2006/main" prst="rect">
-            <a:avLst/>
-          </a:prstGeom>
-        </p:spPr>
-        <p:txBody>
-          <a:bodyPr xmlns:a="http://schemas.openxmlformats.org/drawingml/2006/main"/>
-          <a:lstStyle xmlns:a="http://schemas.openxmlformats.org/drawingml/2006/main"/>
-          <a:p xmlns:a="http://schemas.openxmlformats.org/drawingml/2006/main">
+          <a:prstGeom prst="rect">
+            <a:avLst/>
+          </a:prstGeom>
+        </p:spPr>
+        <p:txBody>
+          <a:bodyPr/>
+          <a:lstStyle/>
+          <a:p>
             <a:r>
               <a:rPr lang="en-US" sz="3200" b="1">
                 <a:solidFill>
@@ -4717,21 +5299,21 @@
           <p:nvPr/>
         </p:nvSpPr>
         <p:spPr>
-          <a:xfrm xmlns:a="http://schemas.openxmlformats.org/drawingml/2006/main">
+          <a:xfrm>
             <a:off x="540000" y="972000"/>
             <a:ext cx="1800000" cy="54000"/>
           </a:xfrm>
-          <a:prstGeom xmlns:a="http://schemas.openxmlformats.org/drawingml/2006/main" prst="rect">
-            <a:avLst/>
-          </a:prstGeom>
-          <a:solidFill xmlns:a="http://schemas.openxmlformats.org/drawingml/2006/main">
+          <a:prstGeom prst="rect">
+            <a:avLst/>
+          </a:prstGeom>
+          <a:solidFill>
             <a:srgbClr val="F5A623"/>
           </a:solidFill>
         </p:spPr>
         <p:txBody>
-          <a:bodyPr xmlns:a="http://schemas.openxmlformats.org/drawingml/2006/main"/>
-          <a:lstStyle xmlns:a="http://schemas.openxmlformats.org/drawingml/2006/main"/>
-          <a:p xmlns:a="http://schemas.openxmlformats.org/drawingml/2006/main">
+          <a:bodyPr/>
+          <a:lstStyle/>
+          <a:p>
             <a:endParaRPr lang="en-US">
               <a:solidFill>
                 <a:srgbClr val="F5A623"/>
@@ -4747,21 +5329,21 @@
           <p:nvPr/>
         </p:nvSpPr>
         <p:spPr>
-          <a:xfrm xmlns:a="http://schemas.openxmlformats.org/drawingml/2006/main">
+          <a:xfrm>
             <a:off x="540000" y="1152000"/>
             <a:ext cx="3420000" cy="3240000"/>
           </a:xfrm>
-          <a:prstGeom xmlns:a="http://schemas.openxmlformats.org/drawingml/2006/main" prst="rect">
-            <a:avLst/>
-          </a:prstGeom>
-          <a:solidFill xmlns:a="http://schemas.openxmlformats.org/drawingml/2006/main">
+          <a:prstGeom prst="rect">
+            <a:avLst/>
+          </a:prstGeom>
+          <a:solidFill>
             <a:srgbClr val="1A3A6A"/>
           </a:solidFill>
         </p:spPr>
         <p:txBody>
-          <a:bodyPr xmlns:a="http://schemas.openxmlformats.org/drawingml/2006/main"/>
-          <a:lstStyle xmlns:a="http://schemas.openxmlformats.org/drawingml/2006/main"/>
-          <a:p xmlns:a="http://schemas.openxmlformats.org/drawingml/2006/main">
+          <a:bodyPr/>
+          <a:lstStyle/>
+          <a:p>
             <a:r>
               <a:rPr lang="en-US" sz="1600" b="0">
                 <a:solidFill>
@@ -4773,7 +5355,16 @@
               <a:t>🌲 RANDOM FOREST</a:t>
             </a:r>
           </a:p>
-          <a:p xmlns:a="http://schemas.openxmlformats.org/drawingml/2006/main">
+          <a:p>
+            <a:endParaRPr lang="en-US" sz="1600" b="0">
+              <a:solidFill>
+                <a:srgbClr val="FFFFFF"/>
+              </a:solidFill>
+              <a:latin typeface="Calibri"/>
+              <a:ea typeface="Calibri"/>
+            </a:endParaRPr>
+          </a:p>
+          <a:p>
             <a:r>
               <a:rPr lang="en-US" sz="1600" b="0">
                 <a:solidFill>
@@ -4782,10 +5373,10 @@
                 <a:latin typeface="Calibri"/>
                 <a:ea typeface="Calibri"/>
               </a:rPr>
-              <a:t/>
-            </a:r>
-          </a:p>
-          <a:p xmlns:a="http://schemas.openxmlformats.org/drawingml/2006/main">
+              <a:t>Type: Ensemble (200 trees)</a:t>
+            </a:r>
+          </a:p>
+          <a:p>
             <a:r>
               <a:rPr lang="en-US" sz="1600" b="0">
                 <a:solidFill>
@@ -4794,10 +5385,10 @@
                 <a:latin typeface="Calibri"/>
                 <a:ea typeface="Calibri"/>
               </a:rPr>
-              <a:t>Type: Ensemble (200 trees)</a:t>
-            </a:r>
-          </a:p>
-          <a:p xmlns:a="http://schemas.openxmlformats.org/drawingml/2006/main">
+              <a:t>MAE: 135.39 vehicles/hr</a:t>
+            </a:r>
+          </a:p>
+          <a:p>
             <a:r>
               <a:rPr lang="en-US" sz="1600" b="0">
                 <a:solidFill>
@@ -4806,10 +5397,10 @@
                 <a:latin typeface="Calibri"/>
                 <a:ea typeface="Calibri"/>
               </a:rPr>
-              <a:t>MAE: 135.39 vehicles/hr</a:t>
-            </a:r>
-          </a:p>
-          <a:p xmlns:a="http://schemas.openxmlformats.org/drawingml/2006/main">
+              <a:t>RMSE: 190.92 vehicles/hr</a:t>
+            </a:r>
+          </a:p>
+          <a:p>
             <a:r>
               <a:rPr lang="en-US" sz="1600" b="0">
                 <a:solidFill>
@@ -4818,10 +5409,19 @@
                 <a:latin typeface="Calibri"/>
                 <a:ea typeface="Calibri"/>
               </a:rPr>
-              <a:t>RMSE: 190.92 vehicles/hr</a:t>
-            </a:r>
-          </a:p>
-          <a:p xmlns:a="http://schemas.openxmlformats.org/drawingml/2006/main">
+              <a:t>R² Score: 0.9647</a:t>
+            </a:r>
+          </a:p>
+          <a:p>
+            <a:endParaRPr lang="en-US" sz="1600" b="0">
+              <a:solidFill>
+                <a:srgbClr val="FFFFFF"/>
+              </a:solidFill>
+              <a:latin typeface="Calibri"/>
+              <a:ea typeface="Calibri"/>
+            </a:endParaRPr>
+          </a:p>
+          <a:p>
             <a:r>
               <a:rPr lang="en-US" sz="1600" b="0">
                 <a:solidFill>
@@ -4830,30 +5430,6 @@
                 <a:latin typeface="Calibri"/>
                 <a:ea typeface="Calibri"/>
               </a:rPr>
-              <a:t>R² Score: 0.9647</a:t>
-            </a:r>
-          </a:p>
-          <a:p xmlns:a="http://schemas.openxmlformats.org/drawingml/2006/main">
-            <a:r>
-              <a:rPr lang="en-US" sz="1600" b="0">
-                <a:solidFill>
-                  <a:srgbClr val="FFFFFF"/>
-                </a:solidFill>
-                <a:latin typeface="Calibri"/>
-                <a:ea typeface="Calibri"/>
-              </a:rPr>
-              <a:t/>
-            </a:r>
-          </a:p>
-          <a:p xmlns:a="http://schemas.openxmlformats.org/drawingml/2006/main">
-            <a:r>
-              <a:rPr lang="en-US" sz="1600" b="0">
-                <a:solidFill>
-                  <a:srgbClr val="FFFFFF"/>
-                </a:solidFill>
-                <a:latin typeface="Calibri"/>
-                <a:ea typeface="Calibri"/>
-              </a:rPr>
               <a:t>Best for: Short-term tabular forecasting</a:t>
             </a:r>
           </a:p>
@@ -4866,21 +5442,21 @@
           <p:nvPr/>
         </p:nvSpPr>
         <p:spPr>
-          <a:xfrm xmlns:a="http://schemas.openxmlformats.org/drawingml/2006/main">
+          <a:xfrm>
             <a:off x="4320000" y="1152000"/>
             <a:ext cx="3420000" cy="3240000"/>
           </a:xfrm>
-          <a:prstGeom xmlns:a="http://schemas.openxmlformats.org/drawingml/2006/main" prst="rect">
-            <a:avLst/>
-          </a:prstGeom>
-          <a:solidFill xmlns:a="http://schemas.openxmlformats.org/drawingml/2006/main">
+          <a:prstGeom prst="rect">
+            <a:avLst/>
+          </a:prstGeom>
+          <a:solidFill>
             <a:srgbClr val="F5A623"/>
           </a:solidFill>
         </p:spPr>
         <p:txBody>
-          <a:bodyPr xmlns:a="http://schemas.openxmlformats.org/drawingml/2006/main"/>
-          <a:lstStyle xmlns:a="http://schemas.openxmlformats.org/drawingml/2006/main"/>
-          <a:p xmlns:a="http://schemas.openxmlformats.org/drawingml/2006/main">
+          <a:bodyPr/>
+          <a:lstStyle/>
+          <a:p>
             <a:r>
               <a:rPr lang="en-US" sz="1600" b="0">
                 <a:solidFill>
@@ -4892,7 +5468,16 @@
               <a:t>⚡ XGBOOST</a:t>
             </a:r>
           </a:p>
-          <a:p xmlns:a="http://schemas.openxmlformats.org/drawingml/2006/main">
+          <a:p>
+            <a:endParaRPr lang="en-US" sz="1600" b="0">
+              <a:solidFill>
+                <a:srgbClr val="0A0E2A"/>
+              </a:solidFill>
+              <a:latin typeface="Calibri"/>
+              <a:ea typeface="Calibri"/>
+            </a:endParaRPr>
+          </a:p>
+          <a:p>
             <a:r>
               <a:rPr lang="en-US" sz="1600" b="0">
                 <a:solidFill>
@@ -4901,10 +5486,10 @@
                 <a:latin typeface="Calibri"/>
                 <a:ea typeface="Calibri"/>
               </a:rPr>
-              <a:t/>
-            </a:r>
-          </a:p>
-          <a:p xmlns:a="http://schemas.openxmlformats.org/drawingml/2006/main">
+              <a:t>Type: Gradient Boosting</a:t>
+            </a:r>
+          </a:p>
+          <a:p>
             <a:r>
               <a:rPr lang="en-US" sz="1600" b="0">
                 <a:solidFill>
@@ -4913,10 +5498,10 @@
                 <a:latin typeface="Calibri"/>
                 <a:ea typeface="Calibri"/>
               </a:rPr>
-              <a:t>Type: Gradient Boosting</a:t>
-            </a:r>
-          </a:p>
-          <a:p xmlns:a="http://schemas.openxmlformats.org/drawingml/2006/main">
+              <a:t>MAE: 134.30 vehicles/hr</a:t>
+            </a:r>
+          </a:p>
+          <a:p>
             <a:r>
               <a:rPr lang="en-US" sz="1600" b="0">
                 <a:solidFill>
@@ -4925,10 +5510,10 @@
                 <a:latin typeface="Calibri"/>
                 <a:ea typeface="Calibri"/>
               </a:rPr>
-              <a:t>MAE: 134.30 vehicles/hr</a:t>
-            </a:r>
-          </a:p>
-          <a:p xmlns:a="http://schemas.openxmlformats.org/drawingml/2006/main">
+              <a:t>RMSE: 184.60 vehicles/hr</a:t>
+            </a:r>
+          </a:p>
+          <a:p>
             <a:r>
               <a:rPr lang="en-US" sz="1600" b="0">
                 <a:solidFill>
@@ -4937,10 +5522,19 @@
                 <a:latin typeface="Calibri"/>
                 <a:ea typeface="Calibri"/>
               </a:rPr>
-              <a:t>RMSE: 184.60 vehicles/hr</a:t>
-            </a:r>
-          </a:p>
-          <a:p xmlns:a="http://schemas.openxmlformats.org/drawingml/2006/main">
+              <a:t>R² Score: 0.9670 ✅ BEST</a:t>
+            </a:r>
+          </a:p>
+          <a:p>
+            <a:endParaRPr lang="en-US" sz="1600" b="0">
+              <a:solidFill>
+                <a:srgbClr val="0A0E2A"/>
+              </a:solidFill>
+              <a:latin typeface="Calibri"/>
+              <a:ea typeface="Calibri"/>
+            </a:endParaRPr>
+          </a:p>
+          <a:p>
             <a:r>
               <a:rPr lang="en-US" sz="1600" b="0">
                 <a:solidFill>
@@ -4949,30 +5543,6 @@
                 <a:latin typeface="Calibri"/>
                 <a:ea typeface="Calibri"/>
               </a:rPr>
-              <a:t>R² Score: 0.9670 ✅ BEST</a:t>
-            </a:r>
-          </a:p>
-          <a:p xmlns:a="http://schemas.openxmlformats.org/drawingml/2006/main">
-            <a:r>
-              <a:rPr lang="en-US" sz="1600" b="0">
-                <a:solidFill>
-                  <a:srgbClr val="0A0E2A"/>
-                </a:solidFill>
-                <a:latin typeface="Calibri"/>
-                <a:ea typeface="Calibri"/>
-              </a:rPr>
-              <a:t/>
-            </a:r>
-          </a:p>
-          <a:p xmlns:a="http://schemas.openxmlformats.org/drawingml/2006/main">
-            <a:r>
-              <a:rPr lang="en-US" sz="1600" b="0">
-                <a:solidFill>
-                  <a:srgbClr val="0A0E2A"/>
-                </a:solidFill>
-                <a:latin typeface="Calibri"/>
-                <a:ea typeface="Calibri"/>
-              </a:rPr>
               <a:t>Best for: Accurate tabular forecasting</a:t>
             </a:r>
           </a:p>
@@ -4985,21 +5555,21 @@
           <p:nvPr/>
         </p:nvSpPr>
         <p:spPr>
-          <a:xfrm xmlns:a="http://schemas.openxmlformats.org/drawingml/2006/main">
+          <a:xfrm>
             <a:off x="8100000" y="1152000"/>
             <a:ext cx="3420000" cy="3240000"/>
           </a:xfrm>
-          <a:prstGeom xmlns:a="http://schemas.openxmlformats.org/drawingml/2006/main" prst="rect">
-            <a:avLst/>
-          </a:prstGeom>
-          <a:solidFill xmlns:a="http://schemas.openxmlformats.org/drawingml/2006/main">
+          <a:prstGeom prst="rect">
+            <a:avLst/>
+          </a:prstGeom>
+          <a:solidFill>
             <a:srgbClr val="1A3A6A"/>
           </a:solidFill>
         </p:spPr>
         <p:txBody>
-          <a:bodyPr xmlns:a="http://schemas.openxmlformats.org/drawingml/2006/main"/>
-          <a:lstStyle xmlns:a="http://schemas.openxmlformats.org/drawingml/2006/main"/>
-          <a:p xmlns:a="http://schemas.openxmlformats.org/drawingml/2006/main">
+          <a:bodyPr/>
+          <a:lstStyle/>
+          <a:p>
             <a:r>
               <a:rPr lang="en-US" sz="1600" b="0">
                 <a:solidFill>
@@ -5011,7 +5581,16 @@
               <a:t>🧠 LSTM NEURAL NET</a:t>
             </a:r>
           </a:p>
-          <a:p xmlns:a="http://schemas.openxmlformats.org/drawingml/2006/main">
+          <a:p>
+            <a:endParaRPr lang="en-US" sz="1600" b="0">
+              <a:solidFill>
+                <a:srgbClr val="FFFFFF"/>
+              </a:solidFill>
+              <a:latin typeface="Calibri"/>
+              <a:ea typeface="Calibri"/>
+            </a:endParaRPr>
+          </a:p>
+          <a:p>
             <a:r>
               <a:rPr lang="en-US" sz="1600" b="0">
                 <a:solidFill>
@@ -5020,10 +5599,10 @@
                 <a:latin typeface="Calibri"/>
                 <a:ea typeface="Calibri"/>
               </a:rPr>
-              <a:t/>
-            </a:r>
-          </a:p>
-          <a:p xmlns:a="http://schemas.openxmlformats.org/drawingml/2006/main">
+              <a:t>Type: Stacked LSTM (128→64)</a:t>
+            </a:r>
+          </a:p>
+          <a:p>
             <a:r>
               <a:rPr lang="en-US" sz="1600" b="0">
                 <a:solidFill>
@@ -5032,10 +5611,10 @@
                 <a:latin typeface="Calibri"/>
                 <a:ea typeface="Calibri"/>
               </a:rPr>
-              <a:t>Type: Stacked LSTM (128→64)</a:t>
-            </a:r>
-          </a:p>
-          <a:p xmlns:a="http://schemas.openxmlformats.org/drawingml/2006/main">
+              <a:t>Input: 24-hour sequences</a:t>
+            </a:r>
+          </a:p>
+          <a:p>
             <a:r>
               <a:rPr lang="en-US" sz="1600" b="0">
                 <a:solidFill>
@@ -5044,10 +5623,10 @@
                 <a:latin typeface="Calibri"/>
                 <a:ea typeface="Calibri"/>
               </a:rPr>
-              <a:t>Input: 24-hour sequences</a:t>
-            </a:r>
-          </a:p>
-          <a:p xmlns:a="http://schemas.openxmlformats.org/drawingml/2006/main">
+              <a:t>Layers: BatchNorm + Dropout</a:t>
+            </a:r>
+          </a:p>
+          <a:p>
             <a:r>
               <a:rPr lang="en-US" sz="1600" b="0">
                 <a:solidFill>
@@ -5056,10 +5635,19 @@
                 <a:latin typeface="Calibri"/>
                 <a:ea typeface="Calibri"/>
               </a:rPr>
-              <a:t>Layers: BatchNorm + Dropout</a:t>
-            </a:r>
-          </a:p>
-          <a:p xmlns:a="http://schemas.openxmlformats.org/drawingml/2006/main">
+              <a:t>Callbacks: EarlyStopping</a:t>
+            </a:r>
+          </a:p>
+          <a:p>
+            <a:endParaRPr lang="en-US" sz="1600" b="0">
+              <a:solidFill>
+                <a:srgbClr val="FFFFFF"/>
+              </a:solidFill>
+              <a:latin typeface="Calibri"/>
+              <a:ea typeface="Calibri"/>
+            </a:endParaRPr>
+          </a:p>
+          <a:p>
             <a:r>
               <a:rPr lang="en-US" sz="1600" b="0">
                 <a:solidFill>
@@ -5068,30 +5656,6 @@
                 <a:latin typeface="Calibri"/>
                 <a:ea typeface="Calibri"/>
               </a:rPr>
-              <a:t>Callbacks: EarlyStopping</a:t>
-            </a:r>
-          </a:p>
-          <a:p xmlns:a="http://schemas.openxmlformats.org/drawingml/2006/main">
-            <a:r>
-              <a:rPr lang="en-US" sz="1600" b="0">
-                <a:solidFill>
-                  <a:srgbClr val="FFFFFF"/>
-                </a:solidFill>
-                <a:latin typeface="Calibri"/>
-                <a:ea typeface="Calibri"/>
-              </a:rPr>
-              <a:t/>
-            </a:r>
-          </a:p>
-          <a:p xmlns:a="http://schemas.openxmlformats.org/drawingml/2006/main">
-            <a:r>
-              <a:rPr lang="en-US" sz="1600" b="0">
-                <a:solidFill>
-                  <a:srgbClr val="FFFFFF"/>
-                </a:solidFill>
-                <a:latin typeface="Calibri"/>
-                <a:ea typeface="Calibri"/>
-              </a:rPr>
               <a:t>Best for: Long-term sequential patterns</a:t>
             </a:r>
           </a:p>
@@ -5104,21 +5668,21 @@
           <p:nvPr/>
         </p:nvSpPr>
         <p:spPr>
-          <a:xfrm xmlns:a="http://schemas.openxmlformats.org/drawingml/2006/main">
+          <a:xfrm>
             <a:off x="2880000" y="4680000"/>
             <a:ext cx="6120000" cy="432000"/>
           </a:xfrm>
-          <a:prstGeom xmlns:a="http://schemas.openxmlformats.org/drawingml/2006/main" prst="rect">
-            <a:avLst/>
-          </a:prstGeom>
-          <a:solidFill xmlns:a="http://schemas.openxmlformats.org/drawingml/2006/main">
+          <a:prstGeom prst="rect">
+            <a:avLst/>
+          </a:prstGeom>
+          <a:solidFill>
             <a:srgbClr val="F5A623"/>
           </a:solidFill>
         </p:spPr>
         <p:txBody>
-          <a:bodyPr xmlns:a="http://schemas.openxmlformats.org/drawingml/2006/main"/>
-          <a:lstStyle xmlns:a="http://schemas.openxmlformats.org/drawingml/2006/main"/>
-          <a:p xmlns:a="http://schemas.openxmlformats.org/drawingml/2006/main">
+          <a:bodyPr/>
+          <a:lstStyle/>
+          <a:p>
             <a:r>
               <a:rPr lang="en-US" sz="1800" b="1">
                 <a:solidFill>
@@ -5139,21 +5703,21 @@
           <p:nvPr/>
         </p:nvSpPr>
         <p:spPr>
-          <a:xfrm xmlns:a="http://schemas.openxmlformats.org/drawingml/2006/main">
+          <a:xfrm>
             <a:off x="0" y="6660000"/>
             <a:ext cx="12193200" cy="216000"/>
           </a:xfrm>
-          <a:prstGeom xmlns:a="http://schemas.openxmlformats.org/drawingml/2006/main" prst="rect">
-            <a:avLst/>
-          </a:prstGeom>
-          <a:solidFill xmlns:a="http://schemas.openxmlformats.org/drawingml/2006/main">
+          <a:prstGeom prst="rect">
+            <a:avLst/>
+          </a:prstGeom>
+          <a:solidFill>
             <a:srgbClr val="1A2540"/>
           </a:solidFill>
         </p:spPr>
         <p:txBody>
-          <a:bodyPr xmlns:a="http://schemas.openxmlformats.org/drawingml/2006/main"/>
-          <a:lstStyle xmlns:a="http://schemas.openxmlformats.org/drawingml/2006/main"/>
-          <a:p xmlns:a="http://schemas.openxmlformats.org/drawingml/2006/main">
+          <a:bodyPr/>
+          <a:lstStyle/>
+          <a:p>
             <a:r>
               <a:rPr lang="en-US" sz="1100">
                 <a:solidFill>
@@ -5169,17 +5733,21 @@
       </p:sp>
     </p:spTree>
   </p:cSld>
+  <p:clrMapOvr>
+    <a:masterClrMapping/>
+  </p:clrMapOvr>
 </p:sld>
 </file>
 
 <file path=ppt/slides/slide8.xml><?xml version="1.0" encoding="utf-8"?>
-<p:sld xmlns:p="http://schemas.openxmlformats.org/presentationml/2006/main">
+<p:sld xmlns:a="http://schemas.openxmlformats.org/drawingml/2006/main" xmlns:r="http://schemas.openxmlformats.org/officeDocument/2006/relationships" xmlns:p="http://schemas.openxmlformats.org/presentationml/2006/main">
   <p:cSld>
     <p:bg>
       <p:bgPr>
-        <a:solidFill xmlns:a="http://schemas.openxmlformats.org/drawingml/2006/main">
+        <a:solidFill>
           <a:srgbClr val="FFFFFF"/>
         </a:solidFill>
+        <a:effectLst/>
       </p:bgPr>
     </p:bg>
     <p:spTree>
@@ -5188,7 +5756,14 @@
         <p:cNvGrpSpPr/>
         <p:nvPr/>
       </p:nvGrpSpPr>
-      <p:grpSpPr/>
+      <p:grpSpPr>
+        <a:xfrm>
+          <a:off x="0" y="0"/>
+          <a:ext cx="0" cy="0"/>
+          <a:chOff x="0" y="0"/>
+          <a:chExt cx="0" cy="0"/>
+        </a:xfrm>
+      </p:grpSpPr>
       <p:sp>
         <p:nvSpPr>
           <p:cNvPr id="100073" name="TopBar"/>
@@ -5196,21 +5771,21 @@
           <p:nvPr/>
         </p:nvSpPr>
         <p:spPr>
-          <a:xfrm xmlns:a="http://schemas.openxmlformats.org/drawingml/2006/main">
+          <a:xfrm>
             <a:off x="0" y="0"/>
             <a:ext cx="12193200" cy="180000"/>
           </a:xfrm>
-          <a:prstGeom xmlns:a="http://schemas.openxmlformats.org/drawingml/2006/main" prst="rect">
-            <a:avLst/>
-          </a:prstGeom>
-          <a:solidFill xmlns:a="http://schemas.openxmlformats.org/drawingml/2006/main">
+          <a:prstGeom prst="rect">
+            <a:avLst/>
+          </a:prstGeom>
+          <a:solidFill>
             <a:srgbClr val="F5A623"/>
           </a:solidFill>
         </p:spPr>
         <p:txBody>
-          <a:bodyPr xmlns:a="http://schemas.openxmlformats.org/drawingml/2006/main"/>
-          <a:lstStyle xmlns:a="http://schemas.openxmlformats.org/drawingml/2006/main"/>
-          <a:p xmlns:a="http://schemas.openxmlformats.org/drawingml/2006/main">
+          <a:bodyPr/>
+          <a:lstStyle/>
+          <a:p>
             <a:endParaRPr lang="en-US">
               <a:solidFill>
                 <a:srgbClr val="F5A623"/>
@@ -5226,18 +5801,18 @@
           <p:nvPr/>
         </p:nvSpPr>
         <p:spPr>
-          <a:xfrm xmlns:a="http://schemas.openxmlformats.org/drawingml/2006/main">
+          <a:xfrm>
             <a:off x="540000" y="360000"/>
             <a:ext cx="10080000" cy="540000"/>
           </a:xfrm>
-          <a:prstGeom xmlns:a="http://schemas.openxmlformats.org/drawingml/2006/main" prst="rect">
-            <a:avLst/>
-          </a:prstGeom>
-        </p:spPr>
-        <p:txBody>
-          <a:bodyPr xmlns:a="http://schemas.openxmlformats.org/drawingml/2006/main"/>
-          <a:lstStyle xmlns:a="http://schemas.openxmlformats.org/drawingml/2006/main"/>
-          <a:p xmlns:a="http://schemas.openxmlformats.org/drawingml/2006/main">
+          <a:prstGeom prst="rect">
+            <a:avLst/>
+          </a:prstGeom>
+        </p:spPr>
+        <p:txBody>
+          <a:bodyPr/>
+          <a:lstStyle/>
+          <a:p>
             <a:r>
               <a:rPr lang="en-US" sz="3200" b="1">
                 <a:solidFill>
@@ -5258,21 +5833,21 @@
           <p:nvPr/>
         </p:nvSpPr>
         <p:spPr>
-          <a:xfrm xmlns:a="http://schemas.openxmlformats.org/drawingml/2006/main">
+          <a:xfrm>
             <a:off x="540000" y="972000"/>
             <a:ext cx="1800000" cy="54000"/>
           </a:xfrm>
-          <a:prstGeom xmlns:a="http://schemas.openxmlformats.org/drawingml/2006/main" prst="rect">
-            <a:avLst/>
-          </a:prstGeom>
-          <a:solidFill xmlns:a="http://schemas.openxmlformats.org/drawingml/2006/main">
+          <a:prstGeom prst="rect">
+            <a:avLst/>
+          </a:prstGeom>
+          <a:solidFill>
             <a:srgbClr val="F5A623"/>
           </a:solidFill>
         </p:spPr>
         <p:txBody>
-          <a:bodyPr xmlns:a="http://schemas.openxmlformats.org/drawingml/2006/main"/>
-          <a:lstStyle xmlns:a="http://schemas.openxmlformats.org/drawingml/2006/main"/>
-          <a:p xmlns:a="http://schemas.openxmlformats.org/drawingml/2006/main">
+          <a:bodyPr/>
+          <a:lstStyle/>
+          <a:p>
             <a:endParaRPr lang="en-US">
               <a:solidFill>
                 <a:srgbClr val="F5A623"/>
@@ -5288,21 +5863,21 @@
           <p:nvPr/>
         </p:nvSpPr>
         <p:spPr>
-          <a:xfrm xmlns:a="http://schemas.openxmlformats.org/drawingml/2006/main">
+          <a:xfrm>
             <a:off x="360000" y="1152000"/>
             <a:ext cx="2160000" cy="3600000"/>
           </a:xfrm>
-          <a:prstGeom xmlns:a="http://schemas.openxmlformats.org/drawingml/2006/main" prst="rect">
-            <a:avLst/>
-          </a:prstGeom>
-          <a:solidFill xmlns:a="http://schemas.openxmlformats.org/drawingml/2006/main">
+          <a:prstGeom prst="rect">
+            <a:avLst/>
+          </a:prstGeom>
+          <a:solidFill>
             <a:srgbClr val="1A2540"/>
           </a:solidFill>
         </p:spPr>
         <p:txBody>
-          <a:bodyPr xmlns:a="http://schemas.openxmlformats.org/drawingml/2006/main"/>
-          <a:lstStyle xmlns:a="http://schemas.openxmlformats.org/drawingml/2006/main"/>
-          <a:p xmlns:a="http://schemas.openxmlformats.org/drawingml/2006/main">
+          <a:bodyPr/>
+          <a:lstStyle/>
+          <a:p>
             <a:r>
               <a:rPr lang="en-US" sz="1300" b="0">
                 <a:solidFill>
@@ -5314,7 +5889,16 @@
               <a:t>⚙️ SIDEBAR</a:t>
             </a:r>
           </a:p>
-          <a:p xmlns:a="http://schemas.openxmlformats.org/drawingml/2006/main">
+          <a:p>
+            <a:endParaRPr lang="en-US" sz="1300" b="0">
+              <a:solidFill>
+                <a:srgbClr val="FFFFFF"/>
+              </a:solidFill>
+              <a:latin typeface="Calibri"/>
+              <a:ea typeface="Calibri"/>
+            </a:endParaRPr>
+          </a:p>
+          <a:p>
             <a:r>
               <a:rPr lang="en-US" sz="1300" b="0">
                 <a:solidFill>
@@ -5323,10 +5907,10 @@
                 <a:latin typeface="Calibri"/>
                 <a:ea typeface="Calibri"/>
               </a:rPr>
-              <a:t/>
-            </a:r>
-          </a:p>
-          <a:p xmlns:a="http://schemas.openxmlformats.org/drawingml/2006/main">
+              <a:t>📍 Select Segment</a:t>
+            </a:r>
+          </a:p>
+          <a:p>
             <a:r>
               <a:rPr lang="en-US" sz="1300" b="0">
                 <a:solidFill>
@@ -5335,10 +5919,19 @@
                 <a:latin typeface="Calibri"/>
                 <a:ea typeface="Calibri"/>
               </a:rPr>
-              <a:t>📍 Select Segment</a:t>
-            </a:r>
-          </a:p>
-          <a:p xmlns:a="http://schemas.openxmlformats.org/drawingml/2006/main">
+              <a:t>[Segment 1 ▼]</a:t>
+            </a:r>
+          </a:p>
+          <a:p>
+            <a:endParaRPr lang="en-US" sz="1300" b="0">
+              <a:solidFill>
+                <a:srgbClr val="FFFFFF"/>
+              </a:solidFill>
+              <a:latin typeface="Calibri"/>
+              <a:ea typeface="Calibri"/>
+            </a:endParaRPr>
+          </a:p>
+          <a:p>
             <a:r>
               <a:rPr lang="en-US" sz="1300" b="0">
                 <a:solidFill>
@@ -5347,10 +5940,10 @@
                 <a:latin typeface="Calibri"/>
                 <a:ea typeface="Calibri"/>
               </a:rPr>
-              <a:t>[Segment 1 ▼]</a:t>
-            </a:r>
-          </a:p>
-          <a:p xmlns:a="http://schemas.openxmlformats.org/drawingml/2006/main">
+              <a:t>🔮 Forecast Horizon</a:t>
+            </a:r>
+          </a:p>
+          <a:p>
             <a:r>
               <a:rPr lang="en-US" sz="1300" b="0">
                 <a:solidFill>
@@ -5359,10 +5952,19 @@
                 <a:latin typeface="Calibri"/>
                 <a:ea typeface="Calibri"/>
               </a:rPr>
-              <a:t/>
-            </a:r>
-          </a:p>
-          <a:p xmlns:a="http://schemas.openxmlformats.org/drawingml/2006/main">
+              <a:t>[2 hours ▼]</a:t>
+            </a:r>
+          </a:p>
+          <a:p>
+            <a:endParaRPr lang="en-US" sz="1300" b="0">
+              <a:solidFill>
+                <a:srgbClr val="FFFFFF"/>
+              </a:solidFill>
+              <a:latin typeface="Calibri"/>
+              <a:ea typeface="Calibri"/>
+            </a:endParaRPr>
+          </a:p>
+          <a:p>
             <a:r>
               <a:rPr lang="en-US" sz="1300" b="0">
                 <a:solidFill>
@@ -5371,10 +5973,10 @@
                 <a:latin typeface="Calibri"/>
                 <a:ea typeface="Calibri"/>
               </a:rPr>
-              <a:t>🔮 Forecast Horizon</a:t>
-            </a:r>
-          </a:p>
-          <a:p xmlns:a="http://schemas.openxmlformats.org/drawingml/2006/main">
+              <a:t>🤖 Select Model</a:t>
+            </a:r>
+          </a:p>
+          <a:p>
             <a:r>
               <a:rPr lang="en-US" sz="1300" b="0">
                 <a:solidFill>
@@ -5383,10 +5985,19 @@
                 <a:latin typeface="Calibri"/>
                 <a:ea typeface="Calibri"/>
               </a:rPr>
-              <a:t>[2 hours ▼]</a:t>
-            </a:r>
-          </a:p>
-          <a:p xmlns:a="http://schemas.openxmlformats.org/drawingml/2006/main">
+              <a:t>[XGBoost ▼]</a:t>
+            </a:r>
+          </a:p>
+          <a:p>
+            <a:endParaRPr lang="en-US" sz="1300" b="0">
+              <a:solidFill>
+                <a:srgbClr val="FFFFFF"/>
+              </a:solidFill>
+              <a:latin typeface="Calibri"/>
+              <a:ea typeface="Calibri"/>
+            </a:endParaRPr>
+          </a:p>
+          <a:p>
             <a:r>
               <a:rPr lang="en-US" sz="1300" b="0">
                 <a:solidFill>
@@ -5395,54 +6006,6 @@
                 <a:latin typeface="Calibri"/>
                 <a:ea typeface="Calibri"/>
               </a:rPr>
-              <a:t/>
-            </a:r>
-          </a:p>
-          <a:p xmlns:a="http://schemas.openxmlformats.org/drawingml/2006/main">
-            <a:r>
-              <a:rPr lang="en-US" sz="1300" b="0">
-                <a:solidFill>
-                  <a:srgbClr val="FFFFFF"/>
-                </a:solidFill>
-                <a:latin typeface="Calibri"/>
-                <a:ea typeface="Calibri"/>
-              </a:rPr>
-              <a:t>🤖 Select Model</a:t>
-            </a:r>
-          </a:p>
-          <a:p xmlns:a="http://schemas.openxmlformats.org/drawingml/2006/main">
-            <a:r>
-              <a:rPr lang="en-US" sz="1300" b="0">
-                <a:solidFill>
-                  <a:srgbClr val="FFFFFF"/>
-                </a:solidFill>
-                <a:latin typeface="Calibri"/>
-                <a:ea typeface="Calibri"/>
-              </a:rPr>
-              <a:t>[XGBoost ▼]</a:t>
-            </a:r>
-          </a:p>
-          <a:p xmlns:a="http://schemas.openxmlformats.org/drawingml/2006/main">
-            <a:r>
-              <a:rPr lang="en-US" sz="1300" b="0">
-                <a:solidFill>
-                  <a:srgbClr val="FFFFFF"/>
-                </a:solidFill>
-                <a:latin typeface="Calibri"/>
-                <a:ea typeface="Calibri"/>
-              </a:rPr>
-              <a:t/>
-            </a:r>
-          </a:p>
-          <a:p xmlns:a="http://schemas.openxmlformats.org/drawingml/2006/main">
-            <a:r>
-              <a:rPr lang="en-US" sz="1300" b="0">
-                <a:solidFill>
-                  <a:srgbClr val="FFFFFF"/>
-                </a:solidFill>
-                <a:latin typeface="Calibri"/>
-                <a:ea typeface="Calibri"/>
-              </a:rPr>
               <a:t>[🚀 Run Forecast]</a:t>
             </a:r>
           </a:p>
@@ -5455,21 +6018,21 @@
           <p:nvPr/>
         </p:nvSpPr>
         <p:spPr>
-          <a:xfrm xmlns:a="http://schemas.openxmlformats.org/drawingml/2006/main">
+          <a:xfrm>
             <a:off x="2880000" y="1152000"/>
             <a:ext cx="1980000" cy="1080000"/>
           </a:xfrm>
-          <a:prstGeom xmlns:a="http://schemas.openxmlformats.org/drawingml/2006/main" prst="rect">
-            <a:avLst/>
-          </a:prstGeom>
-          <a:solidFill xmlns:a="http://schemas.openxmlformats.org/drawingml/2006/main">
+          <a:prstGeom prst="rect">
+            <a:avLst/>
+          </a:prstGeom>
+          <a:solidFill>
             <a:srgbClr val="0A0E2A"/>
           </a:solidFill>
         </p:spPr>
         <p:txBody>
-          <a:bodyPr xmlns:a="http://schemas.openxmlformats.org/drawingml/2006/main"/>
-          <a:lstStyle xmlns:a="http://schemas.openxmlformats.org/drawingml/2006/main"/>
-          <a:p xmlns:a="http://schemas.openxmlformats.org/drawingml/2006/main">
+          <a:bodyPr/>
+          <a:lstStyle/>
+          <a:p>
             <a:r>
               <a:rPr lang="en-US" sz="1500" b="0">
                 <a:solidFill>
@@ -5481,7 +6044,7 @@
               <a:t>🚗 Volume</a:t>
             </a:r>
           </a:p>
-          <a:p xmlns:a="http://schemas.openxmlformats.org/drawingml/2006/main">
+          <a:p>
             <a:r>
               <a:rPr lang="en-US" sz="1500" b="0">
                 <a:solidFill>
@@ -5493,7 +6056,7 @@
               <a:t>1,245</a:t>
             </a:r>
           </a:p>
-          <a:p xmlns:a="http://schemas.openxmlformats.org/drawingml/2006/main">
+          <a:p>
             <a:r>
               <a:rPr lang="en-US" sz="1500" b="0">
                 <a:solidFill>
@@ -5514,21 +6077,21 @@
           <p:nvPr/>
         </p:nvSpPr>
         <p:spPr>
-          <a:xfrm xmlns:a="http://schemas.openxmlformats.org/drawingml/2006/main">
+          <a:xfrm>
             <a:off x="5112000" y="1152000"/>
             <a:ext cx="1980000" cy="1080000"/>
           </a:xfrm>
-          <a:prstGeom xmlns:a="http://schemas.openxmlformats.org/drawingml/2006/main" prst="rect">
-            <a:avLst/>
-          </a:prstGeom>
-          <a:solidFill xmlns:a="http://schemas.openxmlformats.org/drawingml/2006/main">
+          <a:prstGeom prst="rect">
+            <a:avLst/>
+          </a:prstGeom>
+          <a:solidFill>
             <a:srgbClr val="1A3A6A"/>
           </a:solidFill>
         </p:spPr>
         <p:txBody>
-          <a:bodyPr xmlns:a="http://schemas.openxmlformats.org/drawingml/2006/main"/>
-          <a:lstStyle xmlns:a="http://schemas.openxmlformats.org/drawingml/2006/main"/>
-          <a:p xmlns:a="http://schemas.openxmlformats.org/drawingml/2006/main">
+          <a:bodyPr/>
+          <a:lstStyle/>
+          <a:p>
             <a:r>
               <a:rPr lang="en-US" sz="1500" b="0">
                 <a:solidFill>
@@ -5540,7 +6103,7 @@
               <a:t>⚡ Speed</a:t>
             </a:r>
           </a:p>
-          <a:p xmlns:a="http://schemas.openxmlformats.org/drawingml/2006/main">
+          <a:p>
             <a:r>
               <a:rPr lang="en-US" sz="1500" b="0">
                 <a:solidFill>
@@ -5561,21 +6124,21 @@
           <p:nvPr/>
         </p:nvSpPr>
         <p:spPr>
-          <a:xfrm xmlns:a="http://schemas.openxmlformats.org/drawingml/2006/main">
+          <a:xfrm>
             <a:off x="7344000" y="1152000"/>
             <a:ext cx="1980000" cy="1080000"/>
           </a:xfrm>
-          <a:prstGeom xmlns:a="http://schemas.openxmlformats.org/drawingml/2006/main" prst="rect">
-            <a:avLst/>
-          </a:prstGeom>
-          <a:solidFill xmlns:a="http://schemas.openxmlformats.org/drawingml/2006/main">
+          <a:prstGeom prst="rect">
+            <a:avLst/>
+          </a:prstGeom>
+          <a:solidFill>
             <a:srgbClr val="FFF4E5"/>
           </a:solidFill>
         </p:spPr>
         <p:txBody>
-          <a:bodyPr xmlns:a="http://schemas.openxmlformats.org/drawingml/2006/main"/>
-          <a:lstStyle xmlns:a="http://schemas.openxmlformats.org/drawingml/2006/main"/>
-          <a:p xmlns:a="http://schemas.openxmlformats.org/drawingml/2006/main">
+          <a:bodyPr/>
+          <a:lstStyle/>
+          <a:p>
             <a:r>
               <a:rPr lang="en-US" sz="1500" b="0">
                 <a:solidFill>
@@ -5587,7 +6150,7 @@
               <a:t>🌧️ Rain</a:t>
             </a:r>
           </a:p>
-          <a:p xmlns:a="http://schemas.openxmlformats.org/drawingml/2006/main">
+          <a:p>
             <a:r>
               <a:rPr lang="en-US" sz="1500" b="0">
                 <a:solidFill>
@@ -5608,21 +6171,21 @@
           <p:nvPr/>
         </p:nvSpPr>
         <p:spPr>
-          <a:xfrm xmlns:a="http://schemas.openxmlformats.org/drawingml/2006/main">
+          <a:xfrm>
             <a:off x="9576000" y="1152000"/>
             <a:ext cx="1980000" cy="1080000"/>
           </a:xfrm>
-          <a:prstGeom xmlns:a="http://schemas.openxmlformats.org/drawingml/2006/main" prst="rect">
-            <a:avLst/>
-          </a:prstGeom>
-          <a:solidFill xmlns:a="http://schemas.openxmlformats.org/drawingml/2006/main">
+          <a:prstGeom prst="rect">
+            <a:avLst/>
+          </a:prstGeom>
+          <a:solidFill>
             <a:srgbClr val="C0392B"/>
           </a:solidFill>
         </p:spPr>
         <p:txBody>
-          <a:bodyPr xmlns:a="http://schemas.openxmlformats.org/drawingml/2006/main"/>
-          <a:lstStyle xmlns:a="http://schemas.openxmlformats.org/drawingml/2006/main"/>
-          <a:p xmlns:a="http://schemas.openxmlformats.org/drawingml/2006/main">
+          <a:bodyPr/>
+          <a:lstStyle/>
+          <a:p>
             <a:r>
               <a:rPr lang="en-US" sz="1500" b="1">
                 <a:solidFill>
@@ -5634,7 +6197,7 @@
               <a:t>🔴 HIGH</a:t>
             </a:r>
           </a:p>
-          <a:p xmlns:a="http://schemas.openxmlformats.org/drawingml/2006/main">
+          <a:p>
             <a:r>
               <a:rPr lang="en-US" sz="1500" b="1">
                 <a:solidFill>
@@ -5655,21 +6218,21 @@
           <p:nvPr/>
         </p:nvSpPr>
         <p:spPr>
-          <a:xfrm xmlns:a="http://schemas.openxmlformats.org/drawingml/2006/main">
+          <a:xfrm>
             <a:off x="2880000" y="2520000"/>
             <a:ext cx="8640000" cy="432000"/>
           </a:xfrm>
-          <a:prstGeom xmlns:a="http://schemas.openxmlformats.org/drawingml/2006/main" prst="rect">
-            <a:avLst/>
-          </a:prstGeom>
-          <a:solidFill xmlns:a="http://schemas.openxmlformats.org/drawingml/2006/main">
+          <a:prstGeom prst="rect">
+            <a:avLst/>
+          </a:prstGeom>
+          <a:solidFill>
             <a:srgbClr val="0A0E2A"/>
           </a:solidFill>
         </p:spPr>
         <p:txBody>
-          <a:bodyPr xmlns:a="http://schemas.openxmlformats.org/drawingml/2006/main"/>
-          <a:lstStyle xmlns:a="http://schemas.openxmlformats.org/drawingml/2006/main"/>
-          <a:p xmlns:a="http://schemas.openxmlformats.org/drawingml/2006/main">
+          <a:bodyPr/>
+          <a:lstStyle/>
+          <a:p>
             <a:r>
               <a:rPr lang="en-US" sz="1400" b="1">
                 <a:solidFill>
@@ -5690,21 +6253,21 @@
           <p:nvPr/>
         </p:nvSpPr>
         <p:spPr>
-          <a:xfrm xmlns:a="http://schemas.openxmlformats.org/drawingml/2006/main">
+          <a:xfrm>
             <a:off x="2880000" y="3060000"/>
             <a:ext cx="8640000" cy="1728000"/>
           </a:xfrm>
-          <a:prstGeom xmlns:a="http://schemas.openxmlformats.org/drawingml/2006/main" prst="rect">
-            <a:avLst/>
-          </a:prstGeom>
-          <a:solidFill xmlns:a="http://schemas.openxmlformats.org/drawingml/2006/main">
+          <a:prstGeom prst="rect">
+            <a:avLst/>
+          </a:prstGeom>
+          <a:solidFill>
             <a:srgbClr val="F0F4FF"/>
           </a:solidFill>
         </p:spPr>
         <p:txBody>
-          <a:bodyPr xmlns:a="http://schemas.openxmlformats.org/drawingml/2006/main"/>
-          <a:lstStyle xmlns:a="http://schemas.openxmlformats.org/drawingml/2006/main"/>
-          <a:p xmlns:a="http://schemas.openxmlformats.org/drawingml/2006/main">
+          <a:bodyPr/>
+          <a:lstStyle/>
+          <a:p>
             <a:r>
               <a:rPr lang="en-US" sz="1400" b="0">
                 <a:solidFill>
@@ -5716,7 +6279,16 @@
               <a:t>📈 7-Day Traffic Trend Chart</a:t>
             </a:r>
           </a:p>
-          <a:p xmlns:a="http://schemas.openxmlformats.org/drawingml/2006/main">
+          <a:p>
+            <a:endParaRPr lang="en-US" sz="1400" b="0">
+              <a:solidFill>
+                <a:srgbClr val="222222"/>
+              </a:solidFill>
+              <a:latin typeface="Calibri"/>
+              <a:ea typeface="Calibri"/>
+            </a:endParaRPr>
+          </a:p>
+          <a:p>
             <a:r>
               <a:rPr lang="en-US" sz="1400" b="0">
                 <a:solidFill>
@@ -5725,10 +6297,10 @@
                 <a:latin typeface="Calibri"/>
                 <a:ea typeface="Calibri"/>
               </a:rPr>
-              <a:t/>
-            </a:r>
-          </a:p>
-          <a:p xmlns:a="http://schemas.openxmlformats.org/drawingml/2006/main">
+              <a:t>[Bar chart showing hourly peaks — Mon-Sun]</a:t>
+            </a:r>
+          </a:p>
+          <a:p>
             <a:r>
               <a:rPr lang="en-US" sz="1400" b="0">
                 <a:solidFill>
@@ -5737,10 +6309,19 @@
                 <a:latin typeface="Calibri"/>
                 <a:ea typeface="Calibri"/>
               </a:rPr>
-              <a:t>[Bar chart showing hourly peaks — Mon-Sun]</a:t>
-            </a:r>
-          </a:p>
-          <a:p xmlns:a="http://schemas.openxmlformats.org/drawingml/2006/main">
+              <a:t>Peak hours highlighted in red (8-10am, 5-7pm)</a:t>
+            </a:r>
+          </a:p>
+          <a:p>
+            <a:endParaRPr lang="en-US" sz="1400" b="0">
+              <a:solidFill>
+                <a:srgbClr val="222222"/>
+              </a:solidFill>
+              <a:latin typeface="Calibri"/>
+              <a:ea typeface="Calibri"/>
+            </a:endParaRPr>
+          </a:p>
+          <a:p>
             <a:r>
               <a:rPr lang="en-US" sz="1400" b="0">
                 <a:solidFill>
@@ -5749,30 +6330,6 @@
                 <a:latin typeface="Calibri"/>
                 <a:ea typeface="Calibri"/>
               </a:rPr>
-              <a:t>Peak hours highlighted in red (8-10am, 5-7pm)</a:t>
-            </a:r>
-          </a:p>
-          <a:p xmlns:a="http://schemas.openxmlformats.org/drawingml/2006/main">
-            <a:r>
-              <a:rPr lang="en-US" sz="1400" b="0">
-                <a:solidFill>
-                  <a:srgbClr val="222222"/>
-                </a:solidFill>
-                <a:latin typeface="Calibri"/>
-                <a:ea typeface="Calibri"/>
-              </a:rPr>
-              <a:t/>
-            </a:r>
-          </a:p>
-          <a:p xmlns:a="http://schemas.openxmlformats.org/drawingml/2006/main">
-            <a:r>
-              <a:rPr lang="en-US" sz="1400" b="0">
-                <a:solidFill>
-                  <a:srgbClr val="222222"/>
-                </a:solidFill>
-                <a:latin typeface="Calibri"/>
-                <a:ea typeface="Calibri"/>
-              </a:rPr>
               <a:t>🗺️ Folium Heatmap: 10 road segments with live congestion intensity</a:t>
             </a:r>
           </a:p>
@@ -5785,31 +6342,67 @@
           <p:nvPr/>
         </p:nvSpPr>
         <p:spPr>
-          <a:xfrm xmlns:a="http://schemas.openxmlformats.org/drawingml/2006/main">
+          <a:xfrm>
             <a:off x="540000" y="5040000"/>
             <a:ext cx="10440000" cy="360000"/>
           </a:xfrm>
-          <a:prstGeom xmlns:a="http://schemas.openxmlformats.org/drawingml/2006/main" prst="rect">
-            <a:avLst/>
-          </a:prstGeom>
-          <a:solidFill xmlns:a="http://schemas.openxmlformats.org/drawingml/2006/main">
+          <a:prstGeom prst="rect">
+            <a:avLst/>
+          </a:prstGeom>
+          <a:solidFill>
             <a:srgbClr val="1A3A6A"/>
           </a:solidFill>
         </p:spPr>
         <p:txBody>
-          <a:bodyPr xmlns:a="http://schemas.openxmlformats.org/drawingml/2006/main"/>
-          <a:lstStyle xmlns:a="http://schemas.openxmlformats.org/drawingml/2006/main"/>
-          <a:p xmlns:a="http://schemas.openxmlformats.org/drawingml/2006/main">
-            <a:r>
-              <a:rPr lang="en-US" sz="1400" b="1">
+          <a:bodyPr/>
+          <a:lstStyle/>
+          <a:p>
+            <a:r>
+              <a:rPr lang="en-US" sz="1400" b="1" dirty="0">
                 <a:solidFill>
                   <a:srgbClr val="FFFFFF"/>
                 </a:solidFill>
                 <a:latin typeface="Calibri"/>
                 <a:ea typeface="Calibri"/>
               </a:rPr>
-              <a:t>▶  streamlit run app.py  →  localhost:8501</a:t>
-            </a:r>
+              <a:t>▶  </a:t>
+            </a:r>
+            <a:r>
+              <a:rPr lang="en-US" sz="1400" b="1" dirty="0" err="1">
+                <a:solidFill>
+                  <a:srgbClr val="FFFFFF"/>
+                </a:solidFill>
+                <a:latin typeface="Calibri"/>
+                <a:ea typeface="Calibri"/>
+              </a:rPr>
+              <a:t>streamlit</a:t>
+            </a:r>
+            <a:r>
+              <a:rPr lang="en-US" sz="1400" b="1" dirty="0">
+                <a:solidFill>
+                  <a:srgbClr val="FFFFFF"/>
+                </a:solidFill>
+                <a:latin typeface="Calibri"/>
+                <a:ea typeface="Calibri"/>
+              </a:rPr>
+              <a:t> run app.py  →  </a:t>
+            </a:r>
+            <a:r>
+              <a:rPr lang="en-US" sz="1400" b="1" dirty="0">
+                <a:solidFill>
+                  <a:srgbClr val="FFFFFF"/>
+                </a:solidFill>
+                <a:ea typeface="Calibri"/>
+              </a:rPr>
+              <a:t>http://localhost:8503/</a:t>
+            </a:r>
+            <a:endParaRPr lang="en-US" sz="1400" b="1" dirty="0">
+              <a:solidFill>
+                <a:srgbClr val="FFFFFF"/>
+              </a:solidFill>
+              <a:latin typeface="Calibri"/>
+              <a:ea typeface="Calibri"/>
+            </a:endParaRPr>
           </a:p>
         </p:txBody>
       </p:sp>
@@ -5820,21 +6413,21 @@
           <p:nvPr/>
         </p:nvSpPr>
         <p:spPr>
-          <a:xfrm xmlns:a="http://schemas.openxmlformats.org/drawingml/2006/main">
+          <a:xfrm>
             <a:off x="0" y="6660000"/>
             <a:ext cx="12193200" cy="216000"/>
           </a:xfrm>
-          <a:prstGeom xmlns:a="http://schemas.openxmlformats.org/drawingml/2006/main" prst="rect">
-            <a:avLst/>
-          </a:prstGeom>
-          <a:solidFill xmlns:a="http://schemas.openxmlformats.org/drawingml/2006/main">
+          <a:prstGeom prst="rect">
+            <a:avLst/>
+          </a:prstGeom>
+          <a:solidFill>
             <a:srgbClr val="0A0E2A"/>
           </a:solidFill>
         </p:spPr>
         <p:txBody>
-          <a:bodyPr xmlns:a="http://schemas.openxmlformats.org/drawingml/2006/main"/>
-          <a:lstStyle xmlns:a="http://schemas.openxmlformats.org/drawingml/2006/main"/>
-          <a:p xmlns:a="http://schemas.openxmlformats.org/drawingml/2006/main">
+          <a:bodyPr/>
+          <a:lstStyle/>
+          <a:p>
             <a:r>
               <a:rPr lang="en-US" sz="1100">
                 <a:solidFill>
@@ -5850,17 +6443,21 @@
       </p:sp>
     </p:spTree>
   </p:cSld>
+  <p:clrMapOvr>
+    <a:masterClrMapping/>
+  </p:clrMapOvr>
 </p:sld>
 </file>
 
 <file path=ppt/slides/slide9.xml><?xml version="1.0" encoding="utf-8"?>
-<p:sld xmlns:p="http://schemas.openxmlformats.org/presentationml/2006/main">
+<p:sld xmlns:a="http://schemas.openxmlformats.org/drawingml/2006/main" xmlns:r="http://schemas.openxmlformats.org/officeDocument/2006/relationships" xmlns:p="http://schemas.openxmlformats.org/presentationml/2006/main">
   <p:cSld>
     <p:bg>
       <p:bgPr>
-        <a:solidFill xmlns:a="http://schemas.openxmlformats.org/drawingml/2006/main">
+        <a:solidFill>
           <a:srgbClr val="0A0E2A"/>
         </a:solidFill>
+        <a:effectLst/>
       </p:bgPr>
     </p:bg>
     <p:spTree>
@@ -5869,7 +6466,14 @@
         <p:cNvGrpSpPr/>
         <p:nvPr/>
       </p:nvGrpSpPr>
-      <p:grpSpPr/>
+      <p:grpSpPr>
+        <a:xfrm>
+          <a:off x="0" y="0"/>
+          <a:ext cx="0" cy="0"/>
+          <a:chOff x="0" y="0"/>
+          <a:chExt cx="0" cy="0"/>
+        </a:xfrm>
+      </p:grpSpPr>
       <p:sp>
         <p:nvSpPr>
           <p:cNvPr id="100085" name="TopBar"/>
@@ -5877,21 +6481,21 @@
           <p:nvPr/>
         </p:nvSpPr>
         <p:spPr>
-          <a:xfrm xmlns:a="http://schemas.openxmlformats.org/drawingml/2006/main">
+          <a:xfrm>
             <a:off x="0" y="0"/>
             <a:ext cx="12193200" cy="180000"/>
           </a:xfrm>
-          <a:prstGeom xmlns:a="http://schemas.openxmlformats.org/drawingml/2006/main" prst="rect">
-            <a:avLst/>
-          </a:prstGeom>
-          <a:solidFill xmlns:a="http://schemas.openxmlformats.org/drawingml/2006/main">
+          <a:prstGeom prst="rect">
+            <a:avLst/>
+          </a:prstGeom>
+          <a:solidFill>
             <a:srgbClr val="F5A623"/>
           </a:solidFill>
         </p:spPr>
         <p:txBody>
-          <a:bodyPr xmlns:a="http://schemas.openxmlformats.org/drawingml/2006/main"/>
-          <a:lstStyle xmlns:a="http://schemas.openxmlformats.org/drawingml/2006/main"/>
-          <a:p xmlns:a="http://schemas.openxmlformats.org/drawingml/2006/main">
+          <a:bodyPr/>
+          <a:lstStyle/>
+          <a:p>
             <a:endParaRPr lang="en-US">
               <a:solidFill>
                 <a:srgbClr val="F5A623"/>
@@ -5907,18 +6511,18 @@
           <p:nvPr/>
         </p:nvSpPr>
         <p:spPr>
-          <a:xfrm xmlns:a="http://schemas.openxmlformats.org/drawingml/2006/main">
+          <a:xfrm>
             <a:off x="540000" y="360000"/>
             <a:ext cx="10080000" cy="540000"/>
           </a:xfrm>
-          <a:prstGeom xmlns:a="http://schemas.openxmlformats.org/drawingml/2006/main" prst="rect">
-            <a:avLst/>
-          </a:prstGeom>
-        </p:spPr>
-        <p:txBody>
-          <a:bodyPr xmlns:a="http://schemas.openxmlformats.org/drawingml/2006/main"/>
-          <a:lstStyle xmlns:a="http://schemas.openxmlformats.org/drawingml/2006/main"/>
-          <a:p xmlns:a="http://schemas.openxmlformats.org/drawingml/2006/main">
+          <a:prstGeom prst="rect">
+            <a:avLst/>
+          </a:prstGeom>
+        </p:spPr>
+        <p:txBody>
+          <a:bodyPr/>
+          <a:lstStyle/>
+          <a:p>
             <a:r>
               <a:rPr lang="en-US" sz="3200" b="1">
                 <a:solidFill>
@@ -5939,21 +6543,21 @@
           <p:nvPr/>
         </p:nvSpPr>
         <p:spPr>
-          <a:xfrm xmlns:a="http://schemas.openxmlformats.org/drawingml/2006/main">
+          <a:xfrm>
             <a:off x="540000" y="972000"/>
             <a:ext cx="1800000" cy="54000"/>
           </a:xfrm>
-          <a:prstGeom xmlns:a="http://schemas.openxmlformats.org/drawingml/2006/main" prst="rect">
-            <a:avLst/>
-          </a:prstGeom>
-          <a:solidFill xmlns:a="http://schemas.openxmlformats.org/drawingml/2006/main">
+          <a:prstGeom prst="rect">
+            <a:avLst/>
+          </a:prstGeom>
+          <a:solidFill>
             <a:srgbClr val="F5A623"/>
           </a:solidFill>
         </p:spPr>
         <p:txBody>
-          <a:bodyPr xmlns:a="http://schemas.openxmlformats.org/drawingml/2006/main"/>
-          <a:lstStyle xmlns:a="http://schemas.openxmlformats.org/drawingml/2006/main"/>
-          <a:p xmlns:a="http://schemas.openxmlformats.org/drawingml/2006/main">
+          <a:bodyPr/>
+          <a:lstStyle/>
+          <a:p>
             <a:endParaRPr lang="en-US">
               <a:solidFill>
                 <a:srgbClr val="F5A623"/>
@@ -5969,21 +6573,21 @@
           <p:nvPr/>
         </p:nvSpPr>
         <p:spPr>
-          <a:xfrm xmlns:a="http://schemas.openxmlformats.org/drawingml/2006/main">
+          <a:xfrm>
             <a:off x="540000" y="1152000"/>
             <a:ext cx="2520000" cy="2160000"/>
           </a:xfrm>
-          <a:prstGeom xmlns:a="http://schemas.openxmlformats.org/drawingml/2006/main" prst="rect">
-            <a:avLst/>
-          </a:prstGeom>
-          <a:solidFill xmlns:a="http://schemas.openxmlformats.org/drawingml/2006/main">
+          <a:prstGeom prst="rect">
+            <a:avLst/>
+          </a:prstGeom>
+          <a:solidFill>
             <a:srgbClr val="1A3A6A"/>
           </a:solidFill>
         </p:spPr>
         <p:txBody>
-          <a:bodyPr xmlns:a="http://schemas.openxmlformats.org/drawingml/2006/main"/>
-          <a:lstStyle xmlns:a="http://schemas.openxmlformats.org/drawingml/2006/main"/>
-          <a:p xmlns:a="http://schemas.openxmlformats.org/drawingml/2006/main">
+          <a:bodyPr/>
+          <a:lstStyle/>
+          <a:p>
             <a:r>
               <a:rPr lang="en-US" sz="1400">
                 <a:solidFill>
@@ -5995,7 +6599,16 @@
               <a:t>📊 REAL-TIME KPIs</a:t>
             </a:r>
           </a:p>
-          <a:p xmlns:a="http://schemas.openxmlformats.org/drawingml/2006/main">
+          <a:p>
+            <a:endParaRPr lang="en-US" sz="1400">
+              <a:solidFill>
+                <a:srgbClr val="FFFFFF"/>
+              </a:solidFill>
+              <a:latin typeface="Calibri"/>
+              <a:ea typeface="Calibri"/>
+            </a:endParaRPr>
+          </a:p>
+          <a:p>
             <a:r>
               <a:rPr lang="en-US" sz="1400">
                 <a:solidFill>
@@ -6004,10 +6617,10 @@
                 <a:latin typeface="Calibri"/>
                 <a:ea typeface="Calibri"/>
               </a:rPr>
-              <a:t/>
-            </a:r>
-          </a:p>
-          <a:p xmlns:a="http://schemas.openxmlformats.org/drawingml/2006/main">
+              <a:t>• Current vehicle volume</a:t>
+            </a:r>
+          </a:p>
+          <a:p>
             <a:r>
               <a:rPr lang="en-US" sz="1400">
                 <a:solidFill>
@@ -6016,10 +6629,10 @@
                 <a:latin typeface="Calibri"/>
                 <a:ea typeface="Calibri"/>
               </a:rPr>
-              <a:t>• Current vehicle volume</a:t>
-            </a:r>
-          </a:p>
-          <a:p xmlns:a="http://schemas.openxmlformats.org/drawingml/2006/main">
+              <a:t>• Average speed (km/h)</a:t>
+            </a:r>
+          </a:p>
+          <a:p>
             <a:r>
               <a:rPr lang="en-US" sz="1400">
                 <a:solidFill>
@@ -6028,10 +6641,10 @@
                 <a:latin typeface="Calibri"/>
                 <a:ea typeface="Calibri"/>
               </a:rPr>
-              <a:t>• Average speed (km/h)</a:t>
-            </a:r>
-          </a:p>
-          <a:p xmlns:a="http://schemas.openxmlformats.org/drawingml/2006/main">
+              <a:t>• Rainfall (mm)</a:t>
+            </a:r>
+          </a:p>
+          <a:p>
             <a:r>
               <a:rPr lang="en-US" sz="1400">
                 <a:solidFill>
@@ -6040,18 +6653,6 @@
                 <a:latin typeface="Calibri"/>
                 <a:ea typeface="Calibri"/>
               </a:rPr>
-              <a:t>• Rainfall (mm)</a:t>
-            </a:r>
-          </a:p>
-          <a:p xmlns:a="http://schemas.openxmlformats.org/drawingml/2006/main">
-            <a:r>
-              <a:rPr lang="en-US" sz="1400">
-                <a:solidFill>
-                  <a:srgbClr val="FFFFFF"/>
-                </a:solidFill>
-                <a:latin typeface="Calibri"/>
-                <a:ea typeface="Calibri"/>
-              </a:rPr>
               <a:t>• Congestion severity badge</a:t>
             </a:r>
           </a:p>
@@ -6064,21 +6665,21 @@
           <p:nvPr/>
         </p:nvSpPr>
         <p:spPr>
-          <a:xfrm xmlns:a="http://schemas.openxmlformats.org/drawingml/2006/main">
+          <a:xfrm>
             <a:off x="3420000" y="1152000"/>
             <a:ext cx="2520000" cy="2160000"/>
           </a:xfrm>
-          <a:prstGeom xmlns:a="http://schemas.openxmlformats.org/drawingml/2006/main" prst="rect">
-            <a:avLst/>
-          </a:prstGeom>
-          <a:solidFill xmlns:a="http://schemas.openxmlformats.org/drawingml/2006/main">
+          <a:prstGeom prst="rect">
+            <a:avLst/>
+          </a:prstGeom>
+          <a:solidFill>
             <a:srgbClr val="F5A623"/>
           </a:solidFill>
         </p:spPr>
         <p:txBody>
-          <a:bodyPr xmlns:a="http://schemas.openxmlformats.org/drawingml/2006/main"/>
-          <a:lstStyle xmlns:a="http://schemas.openxmlformats.org/drawingml/2006/main"/>
-          <a:p xmlns:a="http://schemas.openxmlformats.org/drawingml/2006/main">
+          <a:bodyPr/>
+          <a:lstStyle/>
+          <a:p>
             <a:r>
               <a:rPr lang="en-US" sz="1400">
                 <a:solidFill>
@@ -6090,7 +6691,16 @@
               <a:t>🔮 FORECAST CARDS</a:t>
             </a:r>
           </a:p>
-          <a:p xmlns:a="http://schemas.openxmlformats.org/drawingml/2006/main">
+          <a:p>
+            <a:endParaRPr lang="en-US" sz="1400">
+              <a:solidFill>
+                <a:srgbClr val="0A0E2A"/>
+              </a:solidFill>
+              <a:latin typeface="Calibri"/>
+              <a:ea typeface="Calibri"/>
+            </a:endParaRPr>
+          </a:p>
+          <a:p>
             <a:r>
               <a:rPr lang="en-US" sz="1400">
                 <a:solidFill>
@@ -6099,10 +6709,10 @@
                 <a:latin typeface="Calibri"/>
                 <a:ea typeface="Calibri"/>
               </a:rPr>
-              <a:t/>
-            </a:r>
-          </a:p>
-          <a:p xmlns:a="http://schemas.openxmlformats.org/drawingml/2006/main">
+              <a:t>• +1h, +2h, +3h, +4h predictions</a:t>
+            </a:r>
+          </a:p>
+          <a:p>
             <a:r>
               <a:rPr lang="en-US" sz="1400">
                 <a:solidFill>
@@ -6111,10 +6721,10 @@
                 <a:latin typeface="Calibri"/>
                 <a:ea typeface="Calibri"/>
               </a:rPr>
-              <a:t>• +1h, +2h, +3h, +4h predictions</a:t>
-            </a:r>
-          </a:p>
-          <a:p xmlns:a="http://schemas.openxmlformats.org/drawingml/2006/main">
+              <a:t>• Colour-coded severity alerts</a:t>
+            </a:r>
+          </a:p>
+          <a:p>
             <a:r>
               <a:rPr lang="en-US" sz="1400">
                 <a:solidFill>
@@ -6123,18 +6733,6 @@
                 <a:latin typeface="Calibri"/>
                 <a:ea typeface="Calibri"/>
               </a:rPr>
-              <a:t>• Colour-coded severity alerts</a:t>
-            </a:r>
-          </a:p>
-          <a:p xmlns:a="http://schemas.openxmlformats.org/drawingml/2006/main">
-            <a:r>
-              <a:rPr lang="en-US" sz="1400">
-                <a:solidFill>
-                  <a:srgbClr val="0A0E2A"/>
-                </a:solidFill>
-                <a:latin typeface="Calibri"/>
-                <a:ea typeface="Calibri"/>
-              </a:rPr>
               <a:t>• Bar chart visualization</a:t>
             </a:r>
           </a:p>
@@ -6147,21 +6745,21 @@
           <p:nvPr/>
         </p:nvSpPr>
         <p:spPr>
-          <a:xfrm xmlns:a="http://schemas.openxmlformats.org/drawingml/2006/main">
+          <a:xfrm>
             <a:off x="6300000" y="1152000"/>
             <a:ext cx="2520000" cy="2160000"/>
           </a:xfrm>
-          <a:prstGeom xmlns:a="http://schemas.openxmlformats.org/drawingml/2006/main" prst="rect">
-            <a:avLst/>
-          </a:prstGeom>
-          <a:solidFill xmlns:a="http://schemas.openxmlformats.org/drawingml/2006/main">
+          <a:prstGeom prst="rect">
+            <a:avLst/>
+          </a:prstGeom>
+          <a:solidFill>
             <a:srgbClr val="1A3A6A"/>
           </a:solidFill>
         </p:spPr>
         <p:txBody>
-          <a:bodyPr xmlns:a="http://schemas.openxmlformats.org/drawingml/2006/main"/>
-          <a:lstStyle xmlns:a="http://schemas.openxmlformats.org/drawingml/2006/main"/>
-          <a:p xmlns:a="http://schemas.openxmlformats.org/drawingml/2006/main">
+          <a:bodyPr/>
+          <a:lstStyle/>
+          <a:p>
             <a:r>
               <a:rPr lang="en-US" sz="1400">
                 <a:solidFill>
@@ -6173,7 +6771,16 @@
               <a:t>📈 TREND ANALYSIS</a:t>
             </a:r>
           </a:p>
-          <a:p xmlns:a="http://schemas.openxmlformats.org/drawingml/2006/main">
+          <a:p>
+            <a:endParaRPr lang="en-US" sz="1400">
+              <a:solidFill>
+                <a:srgbClr val="FFFFFF"/>
+              </a:solidFill>
+              <a:latin typeface="Calibri"/>
+              <a:ea typeface="Calibri"/>
+            </a:endParaRPr>
+          </a:p>
+          <a:p>
             <a:r>
               <a:rPr lang="en-US" sz="1400">
                 <a:solidFill>
@@ -6182,10 +6789,10 @@
                 <a:latin typeface="Calibri"/>
                 <a:ea typeface="Calibri"/>
               </a:rPr>
-              <a:t/>
-            </a:r>
-          </a:p>
-          <a:p xmlns:a="http://schemas.openxmlformats.org/drawingml/2006/main">
+              <a:t>• Last 7-day traffic trend</a:t>
+            </a:r>
+          </a:p>
+          <a:p>
             <a:r>
               <a:rPr lang="en-US" sz="1400">
                 <a:solidFill>
@@ -6194,10 +6801,10 @@
                 <a:latin typeface="Calibri"/>
                 <a:ea typeface="Calibri"/>
               </a:rPr>
-              <a:t>• Last 7-day traffic trend</a:t>
-            </a:r>
-          </a:p>
-          <a:p xmlns:a="http://schemas.openxmlformats.org/drawingml/2006/main">
+              <a:t>• Hourly traffic profile</a:t>
+            </a:r>
+          </a:p>
+          <a:p>
             <a:r>
               <a:rPr lang="en-US" sz="1400">
                 <a:solidFill>
@@ -6206,18 +6813,6 @@
                 <a:latin typeface="Calibri"/>
                 <a:ea typeface="Calibri"/>
               </a:rPr>
-              <a:t>• Hourly traffic profile</a:t>
-            </a:r>
-          </a:p>
-          <a:p xmlns:a="http://schemas.openxmlformats.org/drawingml/2006/main">
-            <a:r>
-              <a:rPr lang="en-US" sz="1400">
-                <a:solidFill>
-                  <a:srgbClr val="FFFFFF"/>
-                </a:solidFill>
-                <a:latin typeface="Calibri"/>
-                <a:ea typeface="Calibri"/>
-              </a:rPr>
               <a:t>• Peak hour detection (red bars)</a:t>
             </a:r>
           </a:p>
@@ -6230,21 +6825,21 @@
           <p:nvPr/>
         </p:nvSpPr>
         <p:spPr>
-          <a:xfrm xmlns:a="http://schemas.openxmlformats.org/drawingml/2006/main">
+          <a:xfrm>
             <a:off x="540000" y="3600000"/>
             <a:ext cx="2520000" cy="1800000"/>
           </a:xfrm>
-          <a:prstGeom xmlns:a="http://schemas.openxmlformats.org/drawingml/2006/main" prst="rect">
-            <a:avLst/>
-          </a:prstGeom>
-          <a:solidFill xmlns:a="http://schemas.openxmlformats.org/drawingml/2006/main">
+          <a:prstGeom prst="rect">
+            <a:avLst/>
+          </a:prstGeom>
+          <a:solidFill>
             <a:srgbClr val="F5A623"/>
           </a:solidFill>
         </p:spPr>
         <p:txBody>
-          <a:bodyPr xmlns:a="http://schemas.openxmlformats.org/drawingml/2006/main"/>
-          <a:lstStyle xmlns:a="http://schemas.openxmlformats.org/drawingml/2006/main"/>
-          <a:p xmlns:a="http://schemas.openxmlformats.org/drawingml/2006/main">
+          <a:bodyPr/>
+          <a:lstStyle/>
+          <a:p>
             <a:r>
               <a:rPr lang="en-US" sz="1400">
                 <a:solidFill>
@@ -6256,7 +6851,16 @@
               <a:t>🗺️ CONGESTION HEATMAP</a:t>
             </a:r>
           </a:p>
-          <a:p xmlns:a="http://schemas.openxmlformats.org/drawingml/2006/main">
+          <a:p>
+            <a:endParaRPr lang="en-US" sz="1400">
+              <a:solidFill>
+                <a:srgbClr val="0A0E2A"/>
+              </a:solidFill>
+              <a:latin typeface="Calibri"/>
+              <a:ea typeface="Calibri"/>
+            </a:endParaRPr>
+          </a:p>
+          <a:p>
             <a:r>
               <a:rPr lang="en-US" sz="1400">
                 <a:solidFill>
@@ -6265,10 +6869,10 @@
                 <a:latin typeface="Calibri"/>
                 <a:ea typeface="Calibri"/>
               </a:rPr>
-              <a:t/>
-            </a:r>
-          </a:p>
-          <a:p xmlns:a="http://schemas.openxmlformats.org/drawingml/2006/main">
+              <a:t>• Interactive Folium map</a:t>
+            </a:r>
+          </a:p>
+          <a:p>
             <a:r>
               <a:rPr lang="en-US" sz="1400">
                 <a:solidFill>
@@ -6277,10 +6881,10 @@
                 <a:latin typeface="Calibri"/>
                 <a:ea typeface="Calibri"/>
               </a:rPr>
-              <a:t>• Interactive Folium map</a:t>
-            </a:r>
-          </a:p>
-          <a:p xmlns:a="http://schemas.openxmlformats.org/drawingml/2006/main">
+              <a:t>• All 10 road segments</a:t>
+            </a:r>
+          </a:p>
+          <a:p>
             <a:r>
               <a:rPr lang="en-US" sz="1400">
                 <a:solidFill>
@@ -6289,18 +6893,6 @@
                 <a:latin typeface="Calibri"/>
                 <a:ea typeface="Calibri"/>
               </a:rPr>
-              <a:t>• All 10 road segments</a:t>
-            </a:r>
-          </a:p>
-          <a:p xmlns:a="http://schemas.openxmlformats.org/drawingml/2006/main">
-            <a:r>
-              <a:rPr lang="en-US" sz="1400">
-                <a:solidFill>
-                  <a:srgbClr val="0A0E2A"/>
-                </a:solidFill>
-                <a:latin typeface="Calibri"/>
-                <a:ea typeface="Calibri"/>
-              </a:rPr>
               <a:t>• Live volume intensity</a:t>
             </a:r>
           </a:p>
@@ -6313,21 +6905,21 @@
           <p:nvPr/>
         </p:nvSpPr>
         <p:spPr>
-          <a:xfrm xmlns:a="http://schemas.openxmlformats.org/drawingml/2006/main">
+          <a:xfrm>
             <a:off x="3420000" y="3600000"/>
             <a:ext cx="2520000" cy="1800000"/>
           </a:xfrm>
-          <a:prstGeom xmlns:a="http://schemas.openxmlformats.org/drawingml/2006/main" prst="rect">
-            <a:avLst/>
-          </a:prstGeom>
-          <a:solidFill xmlns:a="http://schemas.openxmlformats.org/drawingml/2006/main">
+          <a:prstGeom prst="rect">
+            <a:avLst/>
+          </a:prstGeom>
+          <a:solidFill>
             <a:srgbClr val="1A3A6A"/>
           </a:solidFill>
         </p:spPr>
         <p:txBody>
-          <a:bodyPr xmlns:a="http://schemas.openxmlformats.org/drawingml/2006/main"/>
-          <a:lstStyle xmlns:a="http://schemas.openxmlformats.org/drawingml/2006/main"/>
-          <a:p xmlns:a="http://schemas.openxmlformats.org/drawingml/2006/main">
+          <a:bodyPr/>
+          <a:lstStyle/>
+          <a:p>
             <a:r>
               <a:rPr lang="en-US" sz="1400">
                 <a:solidFill>
@@ -6339,7 +6931,16 @@
               <a:t>🔀 RE-ROUTING ALERTS</a:t>
             </a:r>
           </a:p>
-          <a:p xmlns:a="http://schemas.openxmlformats.org/drawingml/2006/main">
+          <a:p>
+            <a:endParaRPr lang="en-US" sz="1400">
+              <a:solidFill>
+                <a:srgbClr val="FFFFFF"/>
+              </a:solidFill>
+              <a:latin typeface="Calibri"/>
+              <a:ea typeface="Calibri"/>
+            </a:endParaRPr>
+          </a:p>
+          <a:p>
             <a:r>
               <a:rPr lang="en-US" sz="1400">
                 <a:solidFill>
@@ -6348,10 +6949,10 @@
                 <a:latin typeface="Calibri"/>
                 <a:ea typeface="Calibri"/>
               </a:rPr>
-              <a:t/>
-            </a:r>
-          </a:p>
-          <a:p xmlns:a="http://schemas.openxmlformats.org/drawingml/2006/main">
+              <a:t>• Automated recommendations</a:t>
+            </a:r>
+          </a:p>
+          <a:p>
             <a:r>
               <a:rPr lang="en-US" sz="1400">
                 <a:solidFill>
@@ -6360,10 +6961,10 @@
                 <a:latin typeface="Calibri"/>
                 <a:ea typeface="Calibri"/>
               </a:rPr>
-              <a:t>• Automated recommendations</a:t>
-            </a:r>
-          </a:p>
-          <a:p xmlns:a="http://schemas.openxmlformats.org/drawingml/2006/main">
+              <a:t>• Low / Medium / High actions</a:t>
+            </a:r>
+          </a:p>
+          <a:p>
             <a:r>
               <a:rPr lang="en-US" sz="1400">
                 <a:solidFill>
@@ -6372,18 +6973,6 @@
                 <a:latin typeface="Calibri"/>
                 <a:ea typeface="Calibri"/>
               </a:rPr>
-              <a:t>• Low / Medium / High actions</a:t>
-            </a:r>
-          </a:p>
-          <a:p xmlns:a="http://schemas.openxmlformats.org/drawingml/2006/main">
-            <a:r>
-              <a:rPr lang="en-US" sz="1400">
-                <a:solidFill>
-                  <a:srgbClr val="FFFFFF"/>
-                </a:solidFill>
-                <a:latin typeface="Calibri"/>
-                <a:ea typeface="Calibri"/>
-              </a:rPr>
               <a:t>• Municipal authority alerts</a:t>
             </a:r>
           </a:p>
@@ -6396,21 +6985,21 @@
           <p:nvPr/>
         </p:nvSpPr>
         <p:spPr>
-          <a:xfrm xmlns:a="http://schemas.openxmlformats.org/drawingml/2006/main">
+          <a:xfrm>
             <a:off x="6300000" y="3600000"/>
             <a:ext cx="2520000" cy="1800000"/>
           </a:xfrm>
-          <a:prstGeom xmlns:a="http://schemas.openxmlformats.org/drawingml/2006/main" prst="rect">
-            <a:avLst/>
-          </a:prstGeom>
-          <a:solidFill xmlns:a="http://schemas.openxmlformats.org/drawingml/2006/main">
+          <a:prstGeom prst="rect">
+            <a:avLst/>
+          </a:prstGeom>
+          <a:solidFill>
             <a:srgbClr val="F5A623"/>
           </a:solidFill>
         </p:spPr>
         <p:txBody>
-          <a:bodyPr xmlns:a="http://schemas.openxmlformats.org/drawingml/2006/main"/>
-          <a:lstStyle xmlns:a="http://schemas.openxmlformats.org/drawingml/2006/main"/>
-          <a:p xmlns:a="http://schemas.openxmlformats.org/drawingml/2006/main">
+          <a:bodyPr/>
+          <a:lstStyle/>
+          <a:p>
             <a:r>
               <a:rPr lang="en-US" sz="1400">
                 <a:solidFill>
@@ -6422,7 +7011,16 @@
               <a:t>🏆 FEATURE IMPORTANCE</a:t>
             </a:r>
           </a:p>
-          <a:p xmlns:a="http://schemas.openxmlformats.org/drawingml/2006/main">
+          <a:p>
+            <a:endParaRPr lang="en-US" sz="1400">
+              <a:solidFill>
+                <a:srgbClr val="0A0E2A"/>
+              </a:solidFill>
+              <a:latin typeface="Calibri"/>
+              <a:ea typeface="Calibri"/>
+            </a:endParaRPr>
+          </a:p>
+          <a:p>
             <a:r>
               <a:rPr lang="en-US" sz="1400">
                 <a:solidFill>
@@ -6431,10 +7029,10 @@
                 <a:latin typeface="Calibri"/>
                 <a:ea typeface="Calibri"/>
               </a:rPr>
-              <a:t/>
-            </a:r>
-          </a:p>
-          <a:p xmlns:a="http://schemas.openxmlformats.org/drawingml/2006/main">
+              <a:t>• XGBoost feature ranking</a:t>
+            </a:r>
+          </a:p>
+          <a:p>
             <a:r>
               <a:rPr lang="en-US" sz="1400">
                 <a:solidFill>
@@ -6443,10 +7041,10 @@
                 <a:latin typeface="Calibri"/>
                 <a:ea typeface="Calibri"/>
               </a:rPr>
-              <a:t>• XGBoost feature ranking</a:t>
-            </a:r>
-          </a:p>
-          <a:p xmlns:a="http://schemas.openxmlformats.org/drawingml/2006/main">
+              <a:t>• Top predictors visualized</a:t>
+            </a:r>
+          </a:p>
+          <a:p>
             <a:r>
               <a:rPr lang="en-US" sz="1400">
                 <a:solidFill>
@@ -6455,18 +7053,6 @@
                 <a:latin typeface="Calibri"/>
                 <a:ea typeface="Calibri"/>
               </a:rPr>
-              <a:t>• Top predictors visualized</a:t>
-            </a:r>
-          </a:p>
-          <a:p xmlns:a="http://schemas.openxmlformats.org/drawingml/2006/main">
-            <a:r>
-              <a:rPr lang="en-US" sz="1400">
-                <a:solidFill>
-                  <a:srgbClr val="0A0E2A"/>
-                </a:solidFill>
-                <a:latin typeface="Calibri"/>
-                <a:ea typeface="Calibri"/>
-              </a:rPr>
               <a:t>• Model explainability chart</a:t>
             </a:r>
           </a:p>
@@ -6479,21 +7065,21 @@
           <p:nvPr/>
         </p:nvSpPr>
         <p:spPr>
-          <a:xfrm xmlns:a="http://schemas.openxmlformats.org/drawingml/2006/main">
+          <a:xfrm>
             <a:off x="0" y="6660000"/>
             <a:ext cx="12193200" cy="216000"/>
           </a:xfrm>
-          <a:prstGeom xmlns:a="http://schemas.openxmlformats.org/drawingml/2006/main" prst="rect">
-            <a:avLst/>
-          </a:prstGeom>
-          <a:solidFill xmlns:a="http://schemas.openxmlformats.org/drawingml/2006/main">
+          <a:prstGeom prst="rect">
+            <a:avLst/>
+          </a:prstGeom>
+          <a:solidFill>
             <a:srgbClr val="1A2540"/>
           </a:solidFill>
         </p:spPr>
         <p:txBody>
-          <a:bodyPr xmlns:a="http://schemas.openxmlformats.org/drawingml/2006/main"/>
-          <a:lstStyle xmlns:a="http://schemas.openxmlformats.org/drawingml/2006/main"/>
-          <a:p xmlns:a="http://schemas.openxmlformats.org/drawingml/2006/main">
+          <a:bodyPr/>
+          <a:lstStyle/>
+          <a:p>
             <a:r>
               <a:rPr lang="en-US" sz="1100">
                 <a:solidFill>
@@ -6509,6 +7095,9 @@
       </p:sp>
     </p:spTree>
   </p:cSld>
+  <p:clrMapOvr>
+    <a:masterClrMapping/>
+  </p:clrMapOvr>
 </p:sld>
 </file>
 
@@ -6618,5 +7207,118 @@
       </a:bgFillStyleLst>
     </a:fmtScheme>
   </a:themeElements>
+  <a:objectDefaults/>
+  <a:extraClrSchemeLst/>
+</a:theme>
+</file>
+
+<file path=ppt/theme/theme2.xml><?xml version="1.0" encoding="utf-8"?>
+<a:theme xmlns:a="http://schemas.openxmlformats.org/drawingml/2006/main" name="Office Theme">
+  <a:themeElements>
+    <a:clrScheme name="Office">
+      <a:dk1>
+        <a:sysClr val="windowText" lastClr="000000"/>
+      </a:dk1>
+      <a:lt1>
+        <a:sysClr val="window" lastClr="FFFFFF"/>
+      </a:lt1>
+      <a:dk2>
+        <a:srgbClr val="44546A"/>
+      </a:dk2>
+      <a:lt2>
+        <a:srgbClr val="E7E6E6"/>
+      </a:lt2>
+      <a:accent1>
+        <a:srgbClr val="4472C4"/>
+      </a:accent1>
+      <a:accent2>
+        <a:srgbClr val="ED7D31"/>
+      </a:accent2>
+      <a:accent3>
+        <a:srgbClr val="A5A5A5"/>
+      </a:accent3>
+      <a:accent4>
+        <a:srgbClr val="FFC000"/>
+      </a:accent4>
+      <a:accent5>
+        <a:srgbClr val="5B9BD5"/>
+      </a:accent5>
+      <a:accent6>
+        <a:srgbClr val="70AD47"/>
+      </a:accent6>
+      <a:hlink>
+        <a:srgbClr val="0563C1"/>
+      </a:hlink>
+      <a:folHlink>
+        <a:srgbClr val="954F72"/>
+      </a:folHlink>
+    </a:clrScheme>
+    <a:fontScheme name="Office">
+      <a:majorFont>
+        <a:latin typeface="Calibri Light"/>
+        <a:ea typeface=""/>
+        <a:cs typeface=""/>
+      </a:majorFont>
+      <a:minorFont>
+        <a:latin typeface="Calibri"/>
+        <a:ea typeface=""/>
+        <a:cs typeface=""/>
+      </a:minorFont>
+    </a:fontScheme>
+    <a:fmtScheme name="Office">
+      <a:fillStyleLst>
+        <a:solidFill>
+          <a:schemeClr val="phClr"/>
+        </a:solidFill>
+        <a:solidFill>
+          <a:schemeClr val="phClr"/>
+        </a:solidFill>
+        <a:solidFill>
+          <a:schemeClr val="phClr"/>
+        </a:solidFill>
+      </a:fillStyleLst>
+      <a:lnStyleLst>
+        <a:ln w="6350" cap="flat">
+          <a:solidFill>
+            <a:schemeClr val="phClr"/>
+          </a:solidFill>
+        </a:ln>
+        <a:ln w="12700" cap="flat">
+          <a:solidFill>
+            <a:schemeClr val="phClr"/>
+          </a:solidFill>
+        </a:ln>
+        <a:ln w="19050" cap="flat">
+          <a:solidFill>
+            <a:schemeClr val="phClr"/>
+          </a:solidFill>
+        </a:ln>
+      </a:lnStyleLst>
+      <a:effectStyleLst>
+        <a:effectStyle>
+          <a:effectLst/>
+        </a:effectStyle>
+        <a:effectStyle>
+          <a:effectLst/>
+        </a:effectStyle>
+        <a:effectStyle>
+          <a:effectLst/>
+        </a:effectStyle>
+      </a:effectStyleLst>
+      <a:bgFillStyleLst>
+        <a:solidFill>
+          <a:schemeClr val="phClr"/>
+        </a:solidFill>
+        <a:solidFill>
+          <a:schemeClr val="phClr"/>
+        </a:solidFill>
+        <a:solidFill>
+          <a:schemeClr val="phClr"/>
+        </a:solidFill>
+      </a:bgFillStyleLst>
+    </a:fmtScheme>
+  </a:themeElements>
+  <a:objectDefaults/>
+  <a:extraClrSchemeLst/>
 </a:theme>
 </file>